--- a/science-lesson-v4/golden/build/Reference-B-Build-Types.pptx
+++ b/science-lesson-v4/golden/build/Reference-B-Build-Types.pptx
@@ -39,9 +39,11 @@
     <p:sldId id="287" r:id="rId33"/>
     <p:sldId id="288" r:id="rId34"/>
     <p:sldId id="289" r:id="rId35"/>
+    <p:sldId id="290" r:id="rId36"/>
+    <p:sldId id="291" r:id="rId37"/>
   </p:sldIdLst>
   <p:notesMasterIdLst>
-    <p:notesMasterId r:id="rId36"/>
+    <p:notesMasterId r:id="rId38"/>
   </p:notesMasterIdLst>
   <p:sldSz cx="12192000" cy="6858000"/>
   <p:notesSz cx="6858000" cy="12192000"/>
@@ -1858,7 +1860,10 @@
           <a:p>
             <a:r>
               <a:rPr lang="en-US" dirty="0"/>
-              <a:t/>
+              <a:t>Answers:
+1. 84000 J
+2. 2000 J/kg°C
+3. 6°C</a:t>
             </a:r>
             <a:endParaRPr lang="en-US" dirty="0"/>
           </a:p>
@@ -2938,6 +2943,182 @@
             <a:fld id="{F7021451-1387-4CA6-816F-3879F97B5CBC}" type="slidenum">
               <a:rPr lang="en-US"/>
               <a:t>34</a:t>
+            </a:fld>
+            <a:endParaRPr lang="en-US"/>
+          </a:p>
+        </p:txBody>
+      </p:sp>
+    </p:spTree>
+    <p:extLst>
+      <p:ext uri="{BB962C8B-B14F-4D97-AF65-F5344CB8AC3E}">
+        <p14:creationId xmlns:p14="http://schemas.microsoft.com/office/powerpoint/2010/main" val="1024086991"/>
+      </p:ext>
+    </p:extLst>
+  </p:cSld>
+  <p:clrMapOvr>
+    <a:masterClrMapping/>
+  </p:clrMapOvr>
+</p:notes>
+</file>
+
+<file path=ppt/notesSlides/notesSlide35.xml><?xml version="1.0" encoding="utf-8"?>
+<p:notes xmlns:a="http://schemas.openxmlformats.org/drawingml/2006/main" xmlns:r="http://schemas.openxmlformats.org/officeDocument/2006/relationships" xmlns:p="http://schemas.openxmlformats.org/presentationml/2006/main">
+  <p:cSld>
+    <p:spTree>
+      <p:nvGrpSpPr>
+        <p:cNvPr id="1" name=""/>
+        <p:cNvGrpSpPr/>
+        <p:nvPr/>
+      </p:nvGrpSpPr>
+      <p:grpSpPr>
+        <a:xfrm>
+          <a:off x="0" y="0"/>
+          <a:ext cx="0" cy="0"/>
+          <a:chOff x="0" y="0"/>
+          <a:chExt cx="0" cy="0"/>
+        </a:xfrm>
+      </p:grpSpPr>
+      <p:sp>
+        <p:nvSpPr>
+          <p:cNvPr id="2" name="Slide Image Placeholder 1"/>
+          <p:cNvSpPr>
+            <a:spLocks noGrp="1" noRot="1" noChangeAspect="1"/>
+          </p:cNvSpPr>
+          <p:nvPr>
+            <p:ph type="sldImg"/>
+          </p:nvPr>
+        </p:nvSpPr>
+        <p:spPr/>
+      </p:sp>
+      <p:sp>
+        <p:nvSpPr>
+          <p:cNvPr id="3" name="Notes Placeholder 2"/>
+          <p:cNvSpPr>
+            <a:spLocks noGrp="1"/>
+          </p:cNvSpPr>
+          <p:nvPr>
+            <p:ph type="body" idx="1"/>
+          </p:nvPr>
+        </p:nvSpPr>
+        <p:spPr/>
+        <p:txBody>
+          <a:bodyPr/>
+          <a:lstStyle/>
+          <a:p>
+            <a:r>
+              <a:rPr lang="en-US" dirty="0"/>
+              <a:t/>
+            </a:r>
+            <a:endParaRPr lang="en-US" dirty="0"/>
+          </a:p>
+        </p:txBody>
+      </p:sp>
+      <p:sp>
+        <p:nvSpPr>
+          <p:cNvPr id="4" name="Slide Number Placeholder 3"/>
+          <p:cNvSpPr>
+            <a:spLocks noGrp="1"/>
+          </p:cNvSpPr>
+          <p:nvPr>
+            <p:ph type="sldNum" sz="quarter" idx="10"/>
+          </p:nvPr>
+        </p:nvSpPr>
+        <p:spPr/>
+        <p:txBody>
+          <a:bodyPr/>
+          <a:lstStyle/>
+          <a:p>
+            <a:fld id="{F7021451-1387-4CA6-816F-3879F97B5CBC}" type="slidenum">
+              <a:rPr lang="en-US"/>
+              <a:t>35</a:t>
+            </a:fld>
+            <a:endParaRPr lang="en-US"/>
+          </a:p>
+        </p:txBody>
+      </p:sp>
+    </p:spTree>
+    <p:extLst>
+      <p:ext uri="{BB962C8B-B14F-4D97-AF65-F5344CB8AC3E}">
+        <p14:creationId xmlns:p14="http://schemas.microsoft.com/office/powerpoint/2010/main" val="1024086991"/>
+      </p:ext>
+    </p:extLst>
+  </p:cSld>
+  <p:clrMapOvr>
+    <a:masterClrMapping/>
+  </p:clrMapOvr>
+</p:notes>
+</file>
+
+<file path=ppt/notesSlides/notesSlide36.xml><?xml version="1.0" encoding="utf-8"?>
+<p:notes xmlns:a="http://schemas.openxmlformats.org/drawingml/2006/main" xmlns:r="http://schemas.openxmlformats.org/officeDocument/2006/relationships" xmlns:p="http://schemas.openxmlformats.org/presentationml/2006/main">
+  <p:cSld>
+    <p:spTree>
+      <p:nvGrpSpPr>
+        <p:cNvPr id="1" name=""/>
+        <p:cNvGrpSpPr/>
+        <p:nvPr/>
+      </p:nvGrpSpPr>
+      <p:grpSpPr>
+        <a:xfrm>
+          <a:off x="0" y="0"/>
+          <a:ext cx="0" cy="0"/>
+          <a:chOff x="0" y="0"/>
+          <a:chExt cx="0" cy="0"/>
+        </a:xfrm>
+      </p:grpSpPr>
+      <p:sp>
+        <p:nvSpPr>
+          <p:cNvPr id="2" name="Slide Image Placeholder 1"/>
+          <p:cNvSpPr>
+            <a:spLocks noGrp="1" noRot="1" noChangeAspect="1"/>
+          </p:cNvSpPr>
+          <p:nvPr>
+            <p:ph type="sldImg"/>
+          </p:nvPr>
+        </p:nvSpPr>
+        <p:spPr/>
+      </p:sp>
+      <p:sp>
+        <p:nvSpPr>
+          <p:cNvPr id="3" name="Notes Placeholder 2"/>
+          <p:cNvSpPr>
+            <a:spLocks noGrp="1"/>
+          </p:cNvSpPr>
+          <p:nvPr>
+            <p:ph type="body" idx="1"/>
+          </p:nvPr>
+        </p:nvSpPr>
+        <p:spPr/>
+        <p:txBody>
+          <a:bodyPr/>
+          <a:lstStyle/>
+          <a:p>
+            <a:r>
+              <a:rPr lang="en-US" dirty="0"/>
+              <a:t/>
+            </a:r>
+            <a:endParaRPr lang="en-US" dirty="0"/>
+          </a:p>
+        </p:txBody>
+      </p:sp>
+      <p:sp>
+        <p:nvSpPr>
+          <p:cNvPr id="4" name="Slide Number Placeholder 3"/>
+          <p:cNvSpPr>
+            <a:spLocks noGrp="1"/>
+          </p:cNvSpPr>
+          <p:nvPr>
+            <p:ph type="sldNum" sz="quarter" idx="10"/>
+          </p:nvPr>
+        </p:nvSpPr>
+        <p:spPr/>
+        <p:txBody>
+          <a:bodyPr/>
+          <a:lstStyle/>
+          <a:p>
+            <a:fld id="{F7021451-1387-4CA6-816F-3879F97B5CBC}" type="slidenum">
+              <a:rPr lang="en-US"/>
+              <a:t>36</a:t>
             </a:fld>
             <a:endParaRPr lang="en-US"/>
           </a:p>
@@ -16162,7 +16343,48 @@
       </p:sp>
       <p:sp>
         <p:nvSpPr>
-          <p:cNvPr id="30" name="Shape 28"/>
+          <p:cNvPr id="30" name="Text 28"/>
+          <p:cNvSpPr/>
+          <p:nvPr/>
+        </p:nvSpPr>
+        <p:spPr>
+          <a:xfrm>
+            <a:off x="10733075" y="3323540"/>
+            <a:ext cx="274841" cy="264160"/>
+          </a:xfrm>
+          <a:prstGeom prst="rect">
+            <a:avLst/>
+          </a:prstGeom>
+          <a:noFill/>
+          <a:ln/>
+        </p:spPr>
+        <p:txBody>
+          <a:bodyPr wrap="square" lIns="0" tIns="0" rIns="0" bIns="0" rtlCol="0" anchor="ctr">
+            <a:normAutofit/>
+          </a:bodyPr>
+          <a:lstStyle/>
+          <a:p>
+            <a:pPr algn="ctr" indent="0" marL="0">
+              <a:buNone/>
+            </a:pPr>
+            <a:r>
+              <a:rPr lang="en-US" sz="1600" b="1" dirty="0">
+                <a:solidFill>
+                  <a:srgbClr val="0D1B5E"/>
+                </a:solidFill>
+                <a:latin typeface="Trebuchet MS" pitchFamily="34" charset="0"/>
+                <a:ea typeface="Trebuchet MS" pitchFamily="34" charset="-122"/>
+                <a:cs typeface="Trebuchet MS" pitchFamily="34" charset="-120"/>
+              </a:rPr>
+              <a:t>V</a:t>
+            </a:r>
+            <a:endParaRPr lang="en-US" sz="1600" dirty="0"/>
+          </a:p>
+        </p:txBody>
+      </p:sp>
+      <p:sp>
+        <p:nvSpPr>
+          <p:cNvPr id="31" name="Shape 29"/>
           <p:cNvSpPr/>
           <p:nvPr/>
         </p:nvSpPr>
@@ -16185,14 +16407,14 @@
       </p:sp>
       <p:sp>
         <p:nvSpPr>
-          <p:cNvPr id="31" name="Text 29"/>
-          <p:cNvSpPr/>
-          <p:nvPr/>
-        </p:nvSpPr>
-        <p:spPr>
-          <a:xfrm>
-            <a:off x="10554167" y="3199229"/>
-            <a:ext cx="632657" cy="346586"/>
+          <p:cNvPr id="32" name="Text 30"/>
+          <p:cNvSpPr/>
+          <p:nvPr/>
+        </p:nvSpPr>
+        <p:spPr>
+          <a:xfrm>
+            <a:off x="10524338" y="3633420"/>
+            <a:ext cx="309582" cy="601582"/>
           </a:xfrm>
           <a:prstGeom prst="rect">
             <a:avLst/>
@@ -16201,14 +16423,16 @@
           <a:ln/>
         </p:spPr>
         <p:txBody>
-          <a:bodyPr wrap="square" rtlCol="0" anchor="ctr"/>
+          <a:bodyPr wrap="square" lIns="0" tIns="0" rIns="0" bIns="0" rtlCol="0" anchor="ctr">
+            <a:normAutofit/>
+          </a:bodyPr>
           <a:lstStyle/>
           <a:p>
             <a:pPr algn="ctr" indent="0" marL="0">
               <a:buNone/>
             </a:pPr>
             <a:r>
-              <a:rPr lang="en-US" sz="1600" b="1" dirty="0">
+              <a:rPr lang="en-US" sz="900" b="1" dirty="0">
                 <a:solidFill>
                   <a:srgbClr val="0D1B5E"/>
                 </a:solidFill>
@@ -16216,22 +16440,22 @@
                 <a:ea typeface="Trebuchet MS" pitchFamily="34" charset="-122"/>
                 <a:cs typeface="Trebuchet MS" pitchFamily="34" charset="-120"/>
               </a:rPr>
-              <a:t>V</a:t>
-            </a:r>
-            <a:endParaRPr lang="en-US" sz="1600" dirty="0"/>
-          </a:p>
-        </p:txBody>
-      </p:sp>
-      <p:sp>
-        <p:nvSpPr>
-          <p:cNvPr id="32" name="Text 30"/>
-          <p:cNvSpPr/>
-          <p:nvPr/>
-        </p:nvSpPr>
-        <p:spPr>
-          <a:xfrm>
-            <a:off x="10237839" y="3633420"/>
-            <a:ext cx="632657" cy="601582"/>
+              <a:t>rate</a:t>
+            </a:r>
+            <a:endParaRPr lang="en-US" sz="900" dirty="0"/>
+          </a:p>
+        </p:txBody>
+      </p:sp>
+      <p:sp>
+        <p:nvSpPr>
+          <p:cNvPr id="33" name="Text 31"/>
+          <p:cNvSpPr/>
+          <p:nvPr/>
+        </p:nvSpPr>
+        <p:spPr>
+          <a:xfrm>
+            <a:off x="10907071" y="3633420"/>
+            <a:ext cx="309582" cy="601582"/>
           </a:xfrm>
           <a:prstGeom prst="rect">
             <a:avLst/>
@@ -16240,46 +16464,9 @@
           <a:ln/>
         </p:spPr>
         <p:txBody>
-          <a:bodyPr wrap="square" rtlCol="0" anchor="ctr"/>
-          <a:lstStyle/>
-          <a:p>
-            <a:pPr algn="ctr" indent="0" marL="0">
-              <a:buNone/>
-            </a:pPr>
-            <a:r>
-              <a:rPr lang="en-US" sz="1400" b="1" dirty="0">
-                <a:solidFill>
-                  <a:srgbClr val="0D1B5E"/>
-                </a:solidFill>
-                <a:latin typeface="Trebuchet MS" pitchFamily="34" charset="0"/>
-                <a:ea typeface="Trebuchet MS" pitchFamily="34" charset="-122"/>
-                <a:cs typeface="Trebuchet MS" pitchFamily="34" charset="-120"/>
-              </a:rPr>
-              <a:t>rate</a:t>
-            </a:r>
-            <a:endParaRPr lang="en-US" sz="1400" dirty="0"/>
-          </a:p>
-        </p:txBody>
-      </p:sp>
-      <p:sp>
-        <p:nvSpPr>
-          <p:cNvPr id="33" name="Text 31"/>
-          <p:cNvSpPr/>
-          <p:nvPr/>
-        </p:nvSpPr>
-        <p:spPr>
-          <a:xfrm>
-            <a:off x="10870495" y="3633420"/>
-            <a:ext cx="632657" cy="601582"/>
-          </a:xfrm>
-          <a:prstGeom prst="rect">
-            <a:avLst/>
-          </a:prstGeom>
-          <a:noFill/>
-          <a:ln/>
-        </p:spPr>
-        <p:txBody>
-          <a:bodyPr wrap="square" rtlCol="0" anchor="ctr"/>
+          <a:bodyPr wrap="square" lIns="0" tIns="0" rIns="0" bIns="0" rtlCol="0" anchor="ctr">
+            <a:normAutofit/>
+          </a:bodyPr>
           <a:lstStyle/>
           <a:p>
             <a:pPr algn="ctr" indent="0" marL="0">
@@ -17772,7 +17959,48 @@
       </p:sp>
       <p:sp>
         <p:nvSpPr>
-          <p:cNvPr id="25" name="Shape 22"/>
+          <p:cNvPr id="25" name="Text 22"/>
+          <p:cNvSpPr/>
+          <p:nvPr/>
+        </p:nvSpPr>
+        <p:spPr>
+          <a:xfrm>
+            <a:off x="9203848" y="3987967"/>
+            <a:ext cx="1260591" cy="264160"/>
+          </a:xfrm>
+          <a:prstGeom prst="rect">
+            <a:avLst/>
+          </a:prstGeom>
+          <a:noFill/>
+          <a:ln/>
+        </p:spPr>
+        <p:txBody>
+          <a:bodyPr wrap="square" lIns="0" tIns="0" rIns="0" bIns="0" rtlCol="0" anchor="ctr">
+            <a:normAutofit/>
+          </a:bodyPr>
+          <a:lstStyle/>
+          <a:p>
+            <a:pPr algn="ctr" indent="0" marL="0">
+              <a:buNone/>
+            </a:pPr>
+            <a:r>
+              <a:rPr lang="en-US" sz="1600" b="1" dirty="0">
+                <a:solidFill>
+                  <a:srgbClr val="0D1B5E"/>
+                </a:solidFill>
+                <a:latin typeface="Trebuchet MS" pitchFamily="34" charset="0"/>
+                <a:ea typeface="Trebuchet MS" pitchFamily="34" charset="-122"/>
+                <a:cs typeface="Trebuchet MS" pitchFamily="34" charset="-120"/>
+              </a:rPr>
+              <a:t>V</a:t>
+            </a:r>
+            <a:endParaRPr lang="en-US" sz="1600" dirty="0"/>
+          </a:p>
+        </p:txBody>
+      </p:sp>
+      <p:sp>
+        <p:nvSpPr>
+          <p:cNvPr id="26" name="Shape 23"/>
           <p:cNvSpPr/>
           <p:nvPr/>
         </p:nvSpPr>
@@ -17795,14 +18023,14 @@
       </p:sp>
       <p:sp>
         <p:nvSpPr>
-          <p:cNvPr id="26" name="Text 23"/>
-          <p:cNvSpPr/>
-          <p:nvPr/>
-        </p:nvSpPr>
-        <p:spPr>
-          <a:xfrm>
-            <a:off x="8931059" y="3092199"/>
-            <a:ext cx="1806169" cy="989466"/>
+          <p:cNvPr id="27" name="Text 24"/>
+          <p:cNvSpPr/>
+          <p:nvPr/>
+        </p:nvSpPr>
+        <p:spPr>
+          <a:xfrm>
+            <a:off x="8654792" y="4297847"/>
+            <a:ext cx="1142775" cy="1785298"/>
           </a:xfrm>
           <a:prstGeom prst="rect">
             <a:avLst/>
@@ -17811,14 +18039,16 @@
           <a:ln/>
         </p:spPr>
         <p:txBody>
-          <a:bodyPr wrap="square" rtlCol="0" anchor="ctr"/>
+          <a:bodyPr wrap="square" lIns="0" tIns="0" rIns="0" bIns="0" rtlCol="0" anchor="ctr">
+            <a:normAutofit/>
+          </a:bodyPr>
           <a:lstStyle/>
           <a:p>
             <a:pPr algn="ctr" indent="0" marL="0">
               <a:buNone/>
             </a:pPr>
             <a:r>
-              <a:rPr lang="en-US" sz="1600" b="1" dirty="0">
+              <a:rPr lang="en-US" sz="1400" b="1" dirty="0">
                 <a:solidFill>
                   <a:srgbClr val="0D1B5E"/>
                 </a:solidFill>
@@ -17826,22 +18056,22 @@
                 <a:ea typeface="Trebuchet MS" pitchFamily="34" charset="-122"/>
                 <a:cs typeface="Trebuchet MS" pitchFamily="34" charset="-120"/>
               </a:rPr>
-              <a:t>V</a:t>
-            </a:r>
-            <a:endParaRPr lang="en-US" sz="1600" dirty="0"/>
-          </a:p>
-        </p:txBody>
-      </p:sp>
-      <p:sp>
-        <p:nvSpPr>
-          <p:cNvPr id="27" name="Text 24"/>
-          <p:cNvSpPr/>
-          <p:nvPr/>
-        </p:nvSpPr>
-        <p:spPr>
-          <a:xfrm>
-            <a:off x="8027975" y="4297847"/>
-            <a:ext cx="1806169" cy="1785298"/>
+              <a:t>rate</a:t>
+            </a:r>
+            <a:endParaRPr lang="en-US" sz="1400" dirty="0"/>
+          </a:p>
+        </p:txBody>
+      </p:sp>
+      <p:sp>
+        <p:nvSpPr>
+          <p:cNvPr id="28" name="Text 25"/>
+          <p:cNvSpPr/>
+          <p:nvPr/>
+        </p:nvSpPr>
+        <p:spPr>
+          <a:xfrm>
+            <a:off x="9870719" y="4297847"/>
+            <a:ext cx="1142775" cy="1785298"/>
           </a:xfrm>
           <a:prstGeom prst="rect">
             <a:avLst/>
@@ -17850,46 +18080,9 @@
           <a:ln/>
         </p:spPr>
         <p:txBody>
-          <a:bodyPr wrap="square" rtlCol="0" anchor="ctr"/>
-          <a:lstStyle/>
-          <a:p>
-            <a:pPr algn="ctr" indent="0" marL="0">
-              <a:buNone/>
-            </a:pPr>
-            <a:r>
-              <a:rPr lang="en-US" sz="1400" b="1" dirty="0">
-                <a:solidFill>
-                  <a:srgbClr val="0D1B5E"/>
-                </a:solidFill>
-                <a:latin typeface="Trebuchet MS" pitchFamily="34" charset="0"/>
-                <a:ea typeface="Trebuchet MS" pitchFamily="34" charset="-122"/>
-                <a:cs typeface="Trebuchet MS" pitchFamily="34" charset="-120"/>
-              </a:rPr>
-              <a:t>rate</a:t>
-            </a:r>
-            <a:endParaRPr lang="en-US" sz="1400" dirty="0"/>
-          </a:p>
-        </p:txBody>
-      </p:sp>
-      <p:sp>
-        <p:nvSpPr>
-          <p:cNvPr id="28" name="Text 25"/>
-          <p:cNvSpPr/>
-          <p:nvPr/>
-        </p:nvSpPr>
-        <p:spPr>
-          <a:xfrm>
-            <a:off x="9834143" y="4297847"/>
-            <a:ext cx="1806169" cy="1785298"/>
-          </a:xfrm>
-          <a:prstGeom prst="rect">
-            <a:avLst/>
-          </a:prstGeom>
-          <a:noFill/>
-          <a:ln/>
-        </p:spPr>
-        <p:txBody>
-          <a:bodyPr wrap="square" rtlCol="0" anchor="ctr"/>
+          <a:bodyPr wrap="square" lIns="0" tIns="0" rIns="0" bIns="0" rtlCol="0" anchor="ctr">
+            <a:normAutofit/>
+          </a:bodyPr>
           <a:lstStyle/>
           <a:p>
             <a:pPr algn="ctr" indent="0" marL="0">
@@ -18298,7 +18491,7 @@
                 <a:ea typeface="Trebuchet MS" pitchFamily="34" charset="-122"/>
                 <a:cs typeface="Trebuchet MS" pitchFamily="34" charset="-120"/>
               </a:rPr>
-              <a:t>BUILD · SPOT THE MISTAKE</a:t>
+              <a:t>BUILD · YOUR TURN · SPECIFIC HEAT CAPACITY</a:t>
             </a:r>
             <a:endParaRPr lang="en-US" sz="1300" dirty="0"/>
           </a:p>
@@ -18313,7 +18506,7 @@
         <p:spPr>
           <a:xfrm>
             <a:off x="411480" y="1088136"/>
-            <a:ext cx="6819595" cy="5376672"/>
+            <a:ext cx="7387895" cy="1011204"/>
           </a:xfrm>
           <a:prstGeom prst="rect">
             <a:avLst/>
@@ -18328,19 +18521,16 @@
           </a:ln>
         </p:spPr>
         <p:txBody>
-          <a:bodyPr wrap="square" lIns="76200" tIns="76200" rIns="76200" bIns="76200" rtlCol="0" anchor="t">
+          <a:bodyPr wrap="square" lIns="76200" tIns="76200" rIns="76200" bIns="76200" rtlCol="0" anchor="ctr">
             <a:normAutofit/>
           </a:bodyPr>
           <a:lstStyle/>
           <a:p>
             <a:pPr algn="l" indent="0" marL="0">
-              <a:spcAft>
-                <a:spcPts val="1000"/>
-              </a:spcAft>
-              <a:buNone/>
-            </a:pPr>
-            <a:r>
-              <a:rPr lang="en-US" sz="1600" dirty="0">
+              <a:buNone/>
+            </a:pPr>
+            <a:r>
+              <a:rPr lang="en-US" sz="2200" b="1" dirty="0">
                 <a:solidFill>
                   <a:srgbClr val="1A1A2E"/>
                 </a:solidFill>
@@ -18348,70 +18538,24 @@
                 <a:ea typeface="Trebuchet MS" pitchFamily="34" charset="-122"/>
                 <a:cs typeface="Trebuchet MS" pitchFamily="34" charset="-120"/>
               </a:rPr>
-              <a:t>1   rate = time \div volume</a:t>
+              <a:t>Q1  </a:t>
+            </a:r>
+            <a:pPr algn="l" indent="0" marL="0">
+              <a:buNone/>
+            </a:pPr>
+            <a:r>
+              <a:rPr lang="en-US" sz="2200" dirty="0">
+                <a:solidFill>
+                  <a:srgbClr val="1A1A2E"/>
+                </a:solidFill>
+                <a:latin typeface="Trebuchet MS" pitchFamily="34" charset="0"/>
+                <a:ea typeface="Trebuchet MS" pitchFamily="34" charset="-122"/>
+                <a:cs typeface="Trebuchet MS" pitchFamily="34" charset="-120"/>
+              </a:rPr>
+              <a:t>Heat 2 kg of water by 10°C. c = 4200 J/kg°C. Find Δ E.  [2 marks]</a:t>
             </a:r>
             <a:endParaRPr lang="en-US" sz="1300" dirty="0"/>
           </a:p>
-          <a:p>
-            <a:pPr algn="l" indent="0" marL="0">
-              <a:spcAft>
-                <a:spcPts val="1000"/>
-              </a:spcAft>
-              <a:buNone/>
-            </a:pPr>
-            <a:r>
-              <a:rPr lang="en-US" sz="1600" dirty="0">
-                <a:solidFill>
-                  <a:srgbClr val="1A1A2E"/>
-                </a:solidFill>
-                <a:latin typeface="Trebuchet MS" pitchFamily="34" charset="0"/>
-                <a:ea typeface="Trebuchet MS" pitchFamily="34" charset="-122"/>
-                <a:cs typeface="Trebuchet MS" pitchFamily="34" charset="-120"/>
-              </a:rPr>
-              <a:t>2   rate = 40 \div 60</a:t>
-            </a:r>
-            <a:endParaRPr lang="en-US" sz="1300" dirty="0"/>
-          </a:p>
-          <a:p>
-            <a:pPr algn="l" indent="0" marL="0">
-              <a:spcAft>
-                <a:spcPts val="1000"/>
-              </a:spcAft>
-              <a:buNone/>
-            </a:pPr>
-            <a:r>
-              <a:rPr lang="en-US" sz="1600" dirty="0">
-                <a:solidFill>
-                  <a:srgbClr val="1A1A2E"/>
-                </a:solidFill>
-                <a:latin typeface="Trebuchet MS" pitchFamily="34" charset="0"/>
-                <a:ea typeface="Trebuchet MS" pitchFamily="34" charset="-122"/>
-                <a:cs typeface="Trebuchet MS" pitchFamily="34" charset="-120"/>
-              </a:rPr>
-              <a:t>3   rate = 0.67</a:t>
-            </a:r>
-            <a:endParaRPr lang="en-US" sz="1300" dirty="0"/>
-          </a:p>
-          <a:p>
-            <a:pPr algn="l" indent="0" marL="0">
-              <a:spcAft>
-                <a:spcPts val="1000"/>
-              </a:spcAft>
-              <a:buNone/>
-            </a:pPr>
-            <a:r>
-              <a:rPr lang="en-US" sz="1600" dirty="0">
-                <a:solidFill>
-                  <a:srgbClr val="1A1A2E"/>
-                </a:solidFill>
-                <a:latin typeface="Trebuchet MS" pitchFamily="34" charset="0"/>
-                <a:ea typeface="Trebuchet MS" pitchFamily="34" charset="-122"/>
-                <a:cs typeface="Trebuchet MS" pitchFamily="34" charset="-120"/>
-              </a:rPr>
-              <a:t>4   rate = 0.67 cm^3/s</a:t>
-            </a:r>
-            <a:endParaRPr lang="en-US" sz="1300" dirty="0"/>
-          </a:p>
         </p:txBody>
       </p:sp>
       <p:sp>
@@ -18422,14 +18566,14 @@
         </p:nvSpPr>
         <p:spPr>
           <a:xfrm>
-            <a:off x="7368235" y="1088136"/>
-            <a:ext cx="4409237" cy="868680"/>
-          </a:xfrm>
-          <a:prstGeom prst="rect">
-            <a:avLst/>
-          </a:prstGeom>
-          <a:solidFill>
-            <a:srgbClr val="FFFDE7"/>
+            <a:off x="731520" y="2169079"/>
+            <a:ext cx="7067855" cy="662513"/>
+          </a:xfrm>
+          <a:prstGeom prst="rect">
+            <a:avLst/>
+          </a:prstGeom>
+          <a:solidFill>
+            <a:srgbClr val="0D1B5E"/>
           </a:solidFill>
           <a:ln w="25400">
             <a:solidFill>
@@ -18438,80 +18582,38 @@
           </a:ln>
         </p:spPr>
         <p:txBody>
-          <a:bodyPr wrap="square" lIns="76200" tIns="76200" rIns="76200" bIns="76200" rtlCol="0" anchor="t">
-            <a:normAutofit/>
-          </a:bodyPr>
-          <a:lstStyle/>
-          <a:p>
-            <a:pPr algn="l" indent="0" marL="0">
-              <a:spcAft>
-                <a:spcPts val="400"/>
-              </a:spcAft>
-              <a:buNone/>
-            </a:pPr>
-            <a:r>
-              <a:rPr lang="en-US" sz="1300" b="1" dirty="0">
-                <a:solidFill>
-                  <a:srgbClr val="E65100"/>
-                </a:solidFill>
-                <a:latin typeface="Trebuchet MS" pitchFamily="34" charset="0"/>
-                <a:ea typeface="Trebuchet MS" pitchFamily="34" charset="-122"/>
-                <a:cs typeface="Trebuchet MS" pitchFamily="34" charset="-120"/>
-              </a:rPr>
-              <a:t>Your task:</a:t>
-            </a:r>
-            <a:endParaRPr lang="en-US" sz="1300" dirty="0"/>
-          </a:p>
-          <a:p>
-            <a:pPr algn="l" indent="0" marL="0">
-              <a:buNone/>
-            </a:pPr>
-            <a:r>
-              <a:rPr lang="en-US" sz="1200" dirty="0">
-                <a:solidFill>
-                  <a:srgbClr val="1A1A2E"/>
-                </a:solidFill>
-                <a:latin typeface="Trebuchet MS" pitchFamily="34" charset="0"/>
-                <a:ea typeface="Trebuchet MS" pitchFamily="34" charset="-122"/>
-                <a:cs typeface="Trebuchet MS" pitchFamily="34" charset="-120"/>
-              </a:rPr>
-              <a:t>1  Which line is wrong?</a:t>
-            </a:r>
-            <a:endParaRPr lang="en-US" sz="1300" dirty="0"/>
-          </a:p>
-          <a:p>
-            <a:pPr algn="l" indent="0" marL="0">
-              <a:buNone/>
-            </a:pPr>
-            <a:r>
-              <a:rPr lang="en-US" sz="1200" dirty="0">
-                <a:solidFill>
-                  <a:srgbClr val="1A1A2E"/>
-                </a:solidFill>
-                <a:latin typeface="Trebuchet MS" pitchFamily="34" charset="0"/>
-                <a:ea typeface="Trebuchet MS" pitchFamily="34" charset="-122"/>
-                <a:cs typeface="Trebuchet MS" pitchFamily="34" charset="-120"/>
-              </a:rPr>
-              <a:t>2  Why is it wrong?</a:t>
-            </a:r>
-            <a:endParaRPr lang="en-US" sz="1300" dirty="0"/>
-          </a:p>
-          <a:p>
-            <a:pPr algn="l" indent="0" marL="0">
-              <a:buNone/>
-            </a:pPr>
-            <a:r>
-              <a:rPr lang="en-US" sz="1200" dirty="0">
-                <a:solidFill>
-                  <a:srgbClr val="1A1A2E"/>
-                </a:solidFill>
-                <a:latin typeface="Trebuchet MS" pitchFamily="34" charset="0"/>
-                <a:ea typeface="Trebuchet MS" pitchFamily="34" charset="-122"/>
-                <a:cs typeface="Trebuchet MS" pitchFamily="34" charset="-120"/>
-              </a:rPr>
-              <a:t>3  Write the corrected line.</a:t>
-            </a:r>
-            <a:endParaRPr lang="en-US" sz="1300" dirty="0"/>
+          <a:bodyPr wrap="square" lIns="101600" tIns="101600" rIns="101600" bIns="101600" rtlCol="0" anchor="ctr"/>
+          <a:lstStyle/>
+          <a:p>
+            <a:pPr indent="0" marL="0">
+              <a:buNone/>
+            </a:pPr>
+            <a:r>
+              <a:rPr lang="en-US" sz="1200" b="1" dirty="0">
+                <a:solidFill>
+                  <a:srgbClr val="FFFFFF"/>
+                </a:solidFill>
+                <a:latin typeface="Trebuchet MS" pitchFamily="34" charset="0"/>
+                <a:ea typeface="Trebuchet MS" pitchFamily="34" charset="-122"/>
+                <a:cs typeface="Trebuchet MS" pitchFamily="34" charset="-120"/>
+              </a:rPr>
+              <a:t>ANSWER   </a:t>
+            </a:r>
+            <a:pPr indent="0" marL="0">
+              <a:buNone/>
+            </a:pPr>
+            <a:r>
+              <a:rPr lang="en-US" sz="1600" b="1" dirty="0">
+                <a:solidFill>
+                  <a:srgbClr val="FABB2E"/>
+                </a:solidFill>
+                <a:latin typeface="Cambria Math" pitchFamily="34" charset="0"/>
+                <a:ea typeface="Cambria Math" pitchFamily="34" charset="-122"/>
+                <a:cs typeface="Cambria Math" pitchFamily="34" charset="-120"/>
+              </a:rPr>
+              <a:t>84000 J</a:t>
+            </a:r>
+            <a:endParaRPr lang="en-US" sz="1200" dirty="0"/>
           </a:p>
         </p:txBody>
       </p:sp>
@@ -18523,8 +18625,8 @@
         </p:nvSpPr>
         <p:spPr>
           <a:xfrm>
-            <a:off x="7368235" y="2048256"/>
-            <a:ext cx="4409237" cy="4416552"/>
+            <a:off x="411480" y="2904744"/>
+            <a:ext cx="7387895" cy="1011204"/>
           </a:xfrm>
           <a:prstGeom prst="rect">
             <a:avLst/>
@@ -18539,7 +18641,7 @@
           </a:ln>
         </p:spPr>
         <p:txBody>
-          <a:bodyPr wrap="square" lIns="76200" tIns="76200" rIns="76200" bIns="76200" rtlCol="0" anchor="t">
+          <a:bodyPr wrap="square" lIns="76200" tIns="76200" rIns="76200" bIns="76200" rtlCol="0" anchor="ctr">
             <a:normAutofit/>
           </a:bodyPr>
           <a:lstStyle/>
@@ -18548,15 +18650,29 @@
               <a:buNone/>
             </a:pPr>
             <a:r>
-              <a:rPr lang="en-US" sz="1100" i="1" dirty="0">
-                <a:solidFill>
-                  <a:srgbClr val="999999"/>
-                </a:solidFill>
-                <a:latin typeface="Trebuchet MS" pitchFamily="34" charset="0"/>
-                <a:ea typeface="Trebuchet MS" pitchFamily="34" charset="-122"/>
-                <a:cs typeface="Trebuchet MS" pitchFamily="34" charset="-120"/>
-              </a:rPr>
-              <a:t>Write your answer here</a:t>
+              <a:rPr lang="en-US" sz="2200" b="1" dirty="0">
+                <a:solidFill>
+                  <a:srgbClr val="1A1A2E"/>
+                </a:solidFill>
+                <a:latin typeface="Trebuchet MS" pitchFamily="34" charset="0"/>
+                <a:ea typeface="Trebuchet MS" pitchFamily="34" charset="-122"/>
+                <a:cs typeface="Trebuchet MS" pitchFamily="34" charset="-120"/>
+              </a:rPr>
+              <a:t>Q2  </a:t>
+            </a:r>
+            <a:pPr algn="l" indent="0" marL="0">
+              <a:buNone/>
+            </a:pPr>
+            <a:r>
+              <a:rPr lang="en-US" sz="2200" dirty="0">
+                <a:solidFill>
+                  <a:srgbClr val="1A1A2E"/>
+                </a:solidFill>
+                <a:latin typeface="Trebuchet MS" pitchFamily="34" charset="0"/>
+                <a:ea typeface="Trebuchet MS" pitchFamily="34" charset="-122"/>
+                <a:cs typeface="Trebuchet MS" pitchFamily="34" charset="-120"/>
+              </a:rPr>
+              <a:t>50000 J heats 5 kg of oil by 5°C. Find c.  [3 marks]</a:t>
             </a:r>
             <a:endParaRPr lang="en-US" sz="1300" dirty="0"/>
           </a:p>
@@ -18565,6 +18681,588 @@
       <p:sp>
         <p:nvSpPr>
           <p:cNvPr id="13" name="Text 11"/>
+          <p:cNvSpPr/>
+          <p:nvPr/>
+        </p:nvSpPr>
+        <p:spPr>
+          <a:xfrm>
+            <a:off x="731520" y="3985687"/>
+            <a:ext cx="7067855" cy="662513"/>
+          </a:xfrm>
+          <a:prstGeom prst="rect">
+            <a:avLst/>
+          </a:prstGeom>
+          <a:solidFill>
+            <a:srgbClr val="0D1B5E"/>
+          </a:solidFill>
+          <a:ln w="25400">
+            <a:solidFill>
+              <a:srgbClr val="FABB2E"/>
+            </a:solidFill>
+          </a:ln>
+        </p:spPr>
+        <p:txBody>
+          <a:bodyPr wrap="square" lIns="101600" tIns="101600" rIns="101600" bIns="101600" rtlCol="0" anchor="ctr"/>
+          <a:lstStyle/>
+          <a:p>
+            <a:pPr indent="0" marL="0">
+              <a:buNone/>
+            </a:pPr>
+            <a:r>
+              <a:rPr lang="en-US" sz="1200" b="1" dirty="0">
+                <a:solidFill>
+                  <a:srgbClr val="FFFFFF"/>
+                </a:solidFill>
+                <a:latin typeface="Trebuchet MS" pitchFamily="34" charset="0"/>
+                <a:ea typeface="Trebuchet MS" pitchFamily="34" charset="-122"/>
+                <a:cs typeface="Trebuchet MS" pitchFamily="34" charset="-120"/>
+              </a:rPr>
+              <a:t>ANSWER   </a:t>
+            </a:r>
+            <a:pPr indent="0" marL="0">
+              <a:buNone/>
+            </a:pPr>
+            <a:r>
+              <a:rPr lang="en-US" sz="1600" b="1" dirty="0">
+                <a:solidFill>
+                  <a:srgbClr val="FABB2E"/>
+                </a:solidFill>
+                <a:latin typeface="Cambria Math" pitchFamily="34" charset="0"/>
+                <a:ea typeface="Cambria Math" pitchFamily="34" charset="-122"/>
+                <a:cs typeface="Cambria Math" pitchFamily="34" charset="-120"/>
+              </a:rPr>
+              <a:t>2000 </a:t>
+            </a:r>
+            <a:pPr indent="0" marL="0">
+              <a:buNone/>
+            </a:pPr>
+            <a:r>
+              <a:rPr lang="en-US" sz="1600" b="1" dirty="0">
+                <a:solidFill>
+                  <a:srgbClr val="FABB2E"/>
+                </a:solidFill>
+                <a:latin typeface="Cambria Math" pitchFamily="34" charset="0"/>
+                <a:ea typeface="Cambria Math" pitchFamily="34" charset="-122"/>
+                <a:cs typeface="Cambria Math" pitchFamily="34" charset="-120"/>
+              </a:rPr>
+              <a:t>J</a:t>
+            </a:r>
+            <a:pPr indent="0" marL="0">
+              <a:buNone/>
+            </a:pPr>
+            <a:r>
+              <a:rPr lang="en-US" sz="1600" b="1" dirty="0">
+                <a:solidFill>
+                  <a:srgbClr val="FABB2E"/>
+                </a:solidFill>
+                <a:latin typeface="Cambria Math" pitchFamily="34" charset="0"/>
+                <a:ea typeface="Cambria Math" pitchFamily="34" charset="-122"/>
+                <a:cs typeface="Cambria Math" pitchFamily="34" charset="-120"/>
+              </a:rPr>
+              <a:t>⁄</a:t>
+            </a:r>
+            <a:pPr indent="0" marL="0">
+              <a:buNone/>
+            </a:pPr>
+            <a:r>
+              <a:rPr lang="en-US" sz="1600" b="1" dirty="0">
+                <a:solidFill>
+                  <a:srgbClr val="FABB2E"/>
+                </a:solidFill>
+                <a:latin typeface="Cambria Math" pitchFamily="34" charset="0"/>
+                <a:ea typeface="Cambria Math" pitchFamily="34" charset="-122"/>
+                <a:cs typeface="Cambria Math" pitchFamily="34" charset="-120"/>
+              </a:rPr>
+              <a:t>kg°C</a:t>
+            </a:r>
+            <a:endParaRPr lang="en-US" sz="1200" dirty="0"/>
+          </a:p>
+        </p:txBody>
+      </p:sp>
+      <p:sp>
+        <p:nvSpPr>
+          <p:cNvPr id="14" name="Text 12"/>
+          <p:cNvSpPr/>
+          <p:nvPr/>
+        </p:nvSpPr>
+        <p:spPr>
+          <a:xfrm>
+            <a:off x="411480" y="4721352"/>
+            <a:ext cx="7387895" cy="1011204"/>
+          </a:xfrm>
+          <a:prstGeom prst="rect">
+            <a:avLst/>
+          </a:prstGeom>
+          <a:solidFill>
+            <a:srgbClr val="FFFFFF"/>
+          </a:solidFill>
+          <a:ln w="25400">
+            <a:solidFill>
+              <a:srgbClr val="FABB2E"/>
+            </a:solidFill>
+          </a:ln>
+        </p:spPr>
+        <p:txBody>
+          <a:bodyPr wrap="square" lIns="76200" tIns="76200" rIns="76200" bIns="76200" rtlCol="0" anchor="ctr">
+            <a:normAutofit/>
+          </a:bodyPr>
+          <a:lstStyle/>
+          <a:p>
+            <a:pPr algn="l" indent="0" marL="0">
+              <a:buNone/>
+            </a:pPr>
+            <a:r>
+              <a:rPr lang="en-US" sz="2200" b="1" dirty="0">
+                <a:solidFill>
+                  <a:srgbClr val="1A1A2E"/>
+                </a:solidFill>
+                <a:latin typeface="Trebuchet MS" pitchFamily="34" charset="0"/>
+                <a:ea typeface="Trebuchet MS" pitchFamily="34" charset="-122"/>
+                <a:cs typeface="Trebuchet MS" pitchFamily="34" charset="-120"/>
+              </a:rPr>
+              <a:t>Q3  </a:t>
+            </a:r>
+            <a:pPr algn="l" indent="0" marL="0">
+              <a:buNone/>
+            </a:pPr>
+            <a:r>
+              <a:rPr lang="en-US" sz="2200" dirty="0">
+                <a:solidFill>
+                  <a:srgbClr val="1A1A2E"/>
+                </a:solidFill>
+                <a:latin typeface="Trebuchet MS" pitchFamily="34" charset="0"/>
+                <a:ea typeface="Trebuchet MS" pitchFamily="34" charset="-122"/>
+                <a:cs typeface="Trebuchet MS" pitchFamily="34" charset="-120"/>
+              </a:rPr>
+              <a:t>12600 J heats 0.5 kg of water. c = 4200 J/kg°C. Find Δθ.  [3 marks]</a:t>
+            </a:r>
+            <a:endParaRPr lang="en-US" sz="1300" dirty="0"/>
+          </a:p>
+        </p:txBody>
+      </p:sp>
+      <p:sp>
+        <p:nvSpPr>
+          <p:cNvPr id="15" name="Text 13"/>
+          <p:cNvSpPr/>
+          <p:nvPr/>
+        </p:nvSpPr>
+        <p:spPr>
+          <a:xfrm>
+            <a:off x="731520" y="5802295"/>
+            <a:ext cx="7067855" cy="662513"/>
+          </a:xfrm>
+          <a:prstGeom prst="rect">
+            <a:avLst/>
+          </a:prstGeom>
+          <a:solidFill>
+            <a:srgbClr val="0D1B5E"/>
+          </a:solidFill>
+          <a:ln w="25400">
+            <a:solidFill>
+              <a:srgbClr val="FABB2E"/>
+            </a:solidFill>
+          </a:ln>
+        </p:spPr>
+        <p:txBody>
+          <a:bodyPr wrap="square" lIns="101600" tIns="101600" rIns="101600" bIns="101600" rtlCol="0" anchor="ctr"/>
+          <a:lstStyle/>
+          <a:p>
+            <a:pPr indent="0" marL="0">
+              <a:buNone/>
+            </a:pPr>
+            <a:r>
+              <a:rPr lang="en-US" sz="1200" b="1" dirty="0">
+                <a:solidFill>
+                  <a:srgbClr val="FFFFFF"/>
+                </a:solidFill>
+                <a:latin typeface="Trebuchet MS" pitchFamily="34" charset="0"/>
+                <a:ea typeface="Trebuchet MS" pitchFamily="34" charset="-122"/>
+                <a:cs typeface="Trebuchet MS" pitchFamily="34" charset="-120"/>
+              </a:rPr>
+              <a:t>ANSWER   </a:t>
+            </a:r>
+            <a:pPr indent="0" marL="0">
+              <a:buNone/>
+            </a:pPr>
+            <a:r>
+              <a:rPr lang="en-US" sz="1600" b="1" dirty="0">
+                <a:solidFill>
+                  <a:srgbClr val="FABB2E"/>
+                </a:solidFill>
+                <a:latin typeface="Cambria Math" pitchFamily="34" charset="0"/>
+                <a:ea typeface="Cambria Math" pitchFamily="34" charset="-122"/>
+                <a:cs typeface="Cambria Math" pitchFamily="34" charset="-120"/>
+              </a:rPr>
+              <a:t>6°C</a:t>
+            </a:r>
+            <a:endParaRPr lang="en-US" sz="1200" dirty="0"/>
+          </a:p>
+        </p:txBody>
+      </p:sp>
+      <p:sp>
+        <p:nvSpPr>
+          <p:cNvPr id="17" name="Text 14"/>
+          <p:cNvSpPr/>
+          <p:nvPr/>
+        </p:nvSpPr>
+        <p:spPr>
+          <a:xfrm>
+            <a:off x="7890815" y="1088136"/>
+            <a:ext cx="3886657" cy="320040"/>
+          </a:xfrm>
+          <a:prstGeom prst="rect">
+            <a:avLst/>
+          </a:prstGeom>
+          <a:noFill/>
+          <a:ln/>
+        </p:spPr>
+        <p:txBody>
+          <a:bodyPr wrap="square" rtlCol="0" anchor="ctr"/>
+          <a:lstStyle/>
+          <a:p>
+            <a:pPr algn="ctr" indent="0" marL="0">
+              <a:buNone/>
+            </a:pPr>
+            <a:r>
+              <a:rPr lang="en-US" sz="1300" b="1" dirty="0">
+                <a:solidFill>
+                  <a:srgbClr val="0D1B5E"/>
+                </a:solidFill>
+                <a:latin typeface="Trebuchet MS" pitchFamily="34" charset="0"/>
+                <a:ea typeface="Trebuchet MS" pitchFamily="34" charset="-122"/>
+                <a:cs typeface="Trebuchet MS" pitchFamily="34" charset="-120"/>
+              </a:rPr>
+              <a:t>EQUATION</a:t>
+            </a:r>
+            <a:endParaRPr lang="en-US" sz="1300" dirty="0"/>
+          </a:p>
+        </p:txBody>
+      </p:sp>
+      <p:sp>
+        <p:nvSpPr>
+          <p:cNvPr id="18" name="Shape 15"/>
+          <p:cNvSpPr/>
+          <p:nvPr/>
+        </p:nvSpPr>
+        <p:spPr>
+          <a:xfrm>
+            <a:off x="7890815" y="1499616"/>
+            <a:ext cx="3886657" cy="1005840"/>
+          </a:xfrm>
+          <a:prstGeom prst="rect">
+            <a:avLst/>
+          </a:prstGeom>
+          <a:solidFill>
+            <a:srgbClr val="FFFFFF"/>
+          </a:solidFill>
+          <a:ln w="25400">
+            <a:solidFill>
+              <a:srgbClr val="FABB2E"/>
+            </a:solidFill>
+            <a:prstDash val="solid"/>
+          </a:ln>
+        </p:spPr>
+      </p:sp>
+      <p:sp>
+        <p:nvSpPr>
+          <p:cNvPr id="19" name="Text 16"/>
+          <p:cNvSpPr/>
+          <p:nvPr/>
+        </p:nvSpPr>
+        <p:spPr>
+          <a:xfrm>
+            <a:off x="7982255" y="1499616"/>
+            <a:ext cx="3703777" cy="1005840"/>
+          </a:xfrm>
+          <a:prstGeom prst="rect">
+            <a:avLst/>
+          </a:prstGeom>
+          <a:noFill/>
+          <a:ln/>
+        </p:spPr>
+        <p:txBody>
+          <a:bodyPr wrap="square" lIns="0" tIns="0" rIns="0" bIns="0" rtlCol="0" anchor="ctr"/>
+          <a:lstStyle/>
+          <a:p>
+            <a:pPr algn="ctr" indent="0" marL="0">
+              <a:buNone/>
+            </a:pPr>
+            <a:r>
+              <a:rPr lang="en-US" sz="2200" b="1" dirty="0">
+                <a:solidFill>
+                  <a:srgbClr val="0D1B5E"/>
+                </a:solidFill>
+                <a:latin typeface="Cambria Math" pitchFamily="34" charset="0"/>
+                <a:ea typeface="Cambria Math" pitchFamily="34" charset="-122"/>
+                <a:cs typeface="Cambria Math" pitchFamily="34" charset="-120"/>
+              </a:rPr>
+              <a:t>Δ E = mcΔθ</a:t>
+            </a:r>
+            <a:endParaRPr lang="en-US" sz="2200" dirty="0"/>
+          </a:p>
+        </p:txBody>
+      </p:sp>
+      <p:sp>
+        <p:nvSpPr>
+          <p:cNvPr id="20" name="Shape 17"/>
+          <p:cNvSpPr/>
+          <p:nvPr/>
+        </p:nvSpPr>
+        <p:spPr>
+          <a:xfrm>
+            <a:off x="8027975" y="3285218"/>
+            <a:ext cx="3612337" cy="2491267"/>
+          </a:xfrm>
+          <a:prstGeom prst="triangle">
+            <a:avLst/>
+          </a:prstGeom>
+          <a:solidFill>
+            <a:srgbClr val="FFFFFF"/>
+          </a:solidFill>
+          <a:ln w="25400">
+            <a:solidFill>
+              <a:srgbClr val="0D1B5E"/>
+            </a:solidFill>
+            <a:prstDash val="solid"/>
+          </a:ln>
+        </p:spPr>
+      </p:sp>
+      <p:sp>
+        <p:nvSpPr>
+          <p:cNvPr id="21" name="Shape 18"/>
+          <p:cNvSpPr/>
+          <p:nvPr/>
+        </p:nvSpPr>
+        <p:spPr>
+          <a:xfrm>
+            <a:off x="9075553" y="4331551"/>
+            <a:ext cx="1517182" cy="0"/>
+          </a:xfrm>
+          <a:prstGeom prst="line">
+            <a:avLst/>
+          </a:prstGeom>
+          <a:noFill/>
+          <a:ln w="19050">
+            <a:solidFill>
+              <a:srgbClr val="0D1B5E"/>
+            </a:solidFill>
+            <a:prstDash val="solid"/>
+          </a:ln>
+        </p:spPr>
+      </p:sp>
+      <p:sp>
+        <p:nvSpPr>
+          <p:cNvPr id="22" name="Text 19"/>
+          <p:cNvSpPr/>
+          <p:nvPr/>
+        </p:nvSpPr>
+        <p:spPr>
+          <a:xfrm>
+            <a:off x="9227775" y="4039959"/>
+            <a:ext cx="1212737" cy="264160"/>
+          </a:xfrm>
+          <a:prstGeom prst="rect">
+            <a:avLst/>
+          </a:prstGeom>
+          <a:noFill/>
+          <a:ln/>
+        </p:spPr>
+        <p:txBody>
+          <a:bodyPr wrap="square" lIns="0" tIns="0" rIns="0" bIns="0" rtlCol="0" anchor="ctr">
+            <a:normAutofit/>
+          </a:bodyPr>
+          <a:lstStyle/>
+          <a:p>
+            <a:pPr algn="ctr" indent="0" marL="0">
+              <a:buNone/>
+            </a:pPr>
+            <a:r>
+              <a:rPr lang="en-US" sz="1600" b="1" dirty="0">
+                <a:solidFill>
+                  <a:srgbClr val="0D1B5E"/>
+                </a:solidFill>
+                <a:latin typeface="Trebuchet MS" pitchFamily="34" charset="0"/>
+                <a:ea typeface="Trebuchet MS" pitchFamily="34" charset="-122"/>
+                <a:cs typeface="Trebuchet MS" pitchFamily="34" charset="-120"/>
+              </a:rPr>
+              <a:t>Δ E</a:t>
+            </a:r>
+            <a:endParaRPr lang="en-US" sz="1600" dirty="0"/>
+          </a:p>
+        </p:txBody>
+      </p:sp>
+      <p:sp>
+        <p:nvSpPr>
+          <p:cNvPr id="23" name="Shape 20"/>
+          <p:cNvSpPr/>
+          <p:nvPr/>
+        </p:nvSpPr>
+        <p:spPr>
+          <a:xfrm>
+            <a:off x="9406683" y="4331551"/>
+            <a:ext cx="0" cy="1444935"/>
+          </a:xfrm>
+          <a:prstGeom prst="line">
+            <a:avLst/>
+          </a:prstGeom>
+          <a:noFill/>
+          <a:ln w="19050">
+            <a:solidFill>
+              <a:srgbClr val="0D1B5E"/>
+            </a:solidFill>
+            <a:prstDash val="solid"/>
+          </a:ln>
+        </p:spPr>
+      </p:sp>
+      <p:sp>
+        <p:nvSpPr>
+          <p:cNvPr id="24" name="Shape 21"/>
+          <p:cNvSpPr/>
+          <p:nvPr/>
+        </p:nvSpPr>
+        <p:spPr>
+          <a:xfrm>
+            <a:off x="10261603" y="4331551"/>
+            <a:ext cx="0" cy="1444935"/>
+          </a:xfrm>
+          <a:prstGeom prst="line">
+            <a:avLst/>
+          </a:prstGeom>
+          <a:noFill/>
+          <a:ln w="19050">
+            <a:solidFill>
+              <a:srgbClr val="0D1B5E"/>
+            </a:solidFill>
+            <a:prstDash val="solid"/>
+          </a:ln>
+        </p:spPr>
+      </p:sp>
+      <p:sp>
+        <p:nvSpPr>
+          <p:cNvPr id="25" name="Text 22"/>
+          <p:cNvSpPr/>
+          <p:nvPr/>
+        </p:nvSpPr>
+        <p:spPr>
+          <a:xfrm>
+            <a:off x="8672128" y="4349839"/>
+            <a:ext cx="697980" cy="1408359"/>
+          </a:xfrm>
+          <a:prstGeom prst="rect">
+            <a:avLst/>
+          </a:prstGeom>
+          <a:noFill/>
+          <a:ln/>
+        </p:spPr>
+        <p:txBody>
+          <a:bodyPr wrap="square" lIns="0" tIns="0" rIns="0" bIns="0" rtlCol="0" anchor="ctr">
+            <a:normAutofit/>
+          </a:bodyPr>
+          <a:lstStyle/>
+          <a:p>
+            <a:pPr algn="ctr" indent="0" marL="0">
+              <a:buNone/>
+            </a:pPr>
+            <a:r>
+              <a:rPr lang="en-US" sz="1400" b="1" dirty="0">
+                <a:solidFill>
+                  <a:srgbClr val="0D1B5E"/>
+                </a:solidFill>
+                <a:latin typeface="Trebuchet MS" pitchFamily="34" charset="0"/>
+                <a:ea typeface="Trebuchet MS" pitchFamily="34" charset="-122"/>
+                <a:cs typeface="Trebuchet MS" pitchFamily="34" charset="-120"/>
+              </a:rPr>
+              <a:t>m</a:t>
+            </a:r>
+            <a:endParaRPr lang="en-US" sz="1400" dirty="0"/>
+          </a:p>
+        </p:txBody>
+      </p:sp>
+      <p:sp>
+        <p:nvSpPr>
+          <p:cNvPr id="26" name="Text 23"/>
+          <p:cNvSpPr/>
+          <p:nvPr/>
+        </p:nvSpPr>
+        <p:spPr>
+          <a:xfrm>
+            <a:off x="9443259" y="4349839"/>
+            <a:ext cx="781768" cy="1408359"/>
+          </a:xfrm>
+          <a:prstGeom prst="rect">
+            <a:avLst/>
+          </a:prstGeom>
+          <a:noFill/>
+          <a:ln/>
+        </p:spPr>
+        <p:txBody>
+          <a:bodyPr wrap="square" lIns="0" tIns="0" rIns="0" bIns="0" rtlCol="0" anchor="ctr">
+            <a:normAutofit/>
+          </a:bodyPr>
+          <a:lstStyle/>
+          <a:p>
+            <a:pPr algn="ctr" indent="0" marL="0">
+              <a:buNone/>
+            </a:pPr>
+            <a:r>
+              <a:rPr lang="en-US" sz="1400" b="1" dirty="0">
+                <a:solidFill>
+                  <a:srgbClr val="0D1B5E"/>
+                </a:solidFill>
+                <a:latin typeface="Trebuchet MS" pitchFamily="34" charset="0"/>
+                <a:ea typeface="Trebuchet MS" pitchFamily="34" charset="-122"/>
+                <a:cs typeface="Trebuchet MS" pitchFamily="34" charset="-120"/>
+              </a:rPr>
+              <a:t>c</a:t>
+            </a:r>
+            <a:endParaRPr lang="en-US" sz="1400" dirty="0"/>
+          </a:p>
+        </p:txBody>
+      </p:sp>
+      <p:sp>
+        <p:nvSpPr>
+          <p:cNvPr id="27" name="Text 24"/>
+          <p:cNvSpPr/>
+          <p:nvPr/>
+        </p:nvSpPr>
+        <p:spPr>
+          <a:xfrm>
+            <a:off x="10298179" y="4349839"/>
+            <a:ext cx="697980" cy="1408359"/>
+          </a:xfrm>
+          <a:prstGeom prst="rect">
+            <a:avLst/>
+          </a:prstGeom>
+          <a:noFill/>
+          <a:ln/>
+        </p:spPr>
+        <p:txBody>
+          <a:bodyPr wrap="square" lIns="0" tIns="0" rIns="0" bIns="0" rtlCol="0" anchor="ctr">
+            <a:normAutofit/>
+          </a:bodyPr>
+          <a:lstStyle/>
+          <a:p>
+            <a:pPr algn="ctr" indent="0" marL="0">
+              <a:buNone/>
+            </a:pPr>
+            <a:r>
+              <a:rPr lang="en-US" sz="1400" b="1" dirty="0">
+                <a:solidFill>
+                  <a:srgbClr val="0D1B5E"/>
+                </a:solidFill>
+                <a:latin typeface="Trebuchet MS" pitchFamily="34" charset="0"/>
+                <a:ea typeface="Trebuchet MS" pitchFamily="34" charset="-122"/>
+                <a:cs typeface="Trebuchet MS" pitchFamily="34" charset="-120"/>
+              </a:rPr>
+              <a:t>Δθ</a:t>
+            </a:r>
+            <a:endParaRPr lang="en-US" sz="1400" dirty="0"/>
+          </a:p>
+        </p:txBody>
+      </p:sp>
+      <p:sp>
+        <p:nvSpPr>
+          <p:cNvPr id="28" name="Text 25"/>
           <p:cNvSpPr/>
           <p:nvPr/>
         </p:nvSpPr>
@@ -18950,7 +19648,7 @@
                 <a:ea typeface="Trebuchet MS" pitchFamily="34" charset="-122"/>
                 <a:cs typeface="Trebuchet MS" pitchFamily="34" charset="-120"/>
               </a:rPr>
-              <a:t>BUILD · SPOT THE MISTAKE: ANSWER</a:t>
+              <a:t>BUILD · WORKED EXAMPLE · DENSITY OF A BLOCK</a:t>
             </a:r>
             <a:endParaRPr lang="en-US" sz="1300" dirty="0"/>
           </a:p>
@@ -18958,171 +19656,50 @@
       </p:sp>
       <p:sp>
         <p:nvSpPr>
-          <p:cNvPr id="10" name="Text 8"/>
-          <p:cNvSpPr/>
-          <p:nvPr/>
-        </p:nvSpPr>
-        <p:spPr>
-          <a:xfrm>
-            <a:off x="0" y="1014984"/>
-            <a:ext cx="12188952" cy="347472"/>
-          </a:xfrm>
-          <a:prstGeom prst="rect">
-            <a:avLst/>
-          </a:prstGeom>
-          <a:solidFill>
-            <a:srgbClr val="6A0DAD"/>
-          </a:solidFill>
-          <a:ln/>
-        </p:spPr>
-        <p:txBody>
-          <a:bodyPr wrap="square" lIns="101600" tIns="101600" rIns="101600" bIns="101600" rtlCol="0" anchor="ctr"/>
-          <a:lstStyle/>
-          <a:p>
-            <a:pPr algn="l" indent="0" marL="0">
-              <a:buNone/>
-            </a:pPr>
-            <a:r>
-              <a:rPr lang="en-US" sz="1300" b="1" dirty="0">
-                <a:solidFill>
-                  <a:srgbClr val="FFFFFF"/>
-                </a:solidFill>
-                <a:latin typeface="Trebuchet MS" pitchFamily="34" charset="0"/>
-                <a:ea typeface="Trebuchet MS" pitchFamily="34" charset="-122"/>
-                <a:cs typeface="Trebuchet MS" pitchFamily="34" charset="-120"/>
-              </a:rPr>
-              <a:t>☞  Purple pen time · mark and correct your answers</a:t>
-            </a:r>
-            <a:endParaRPr lang="en-US" sz="1300" dirty="0"/>
-          </a:p>
-        </p:txBody>
-      </p:sp>
-      <p:sp>
-        <p:nvSpPr>
-          <p:cNvPr id="11" name="Text 9"/>
-          <p:cNvSpPr/>
-          <p:nvPr/>
-        </p:nvSpPr>
-        <p:spPr>
-          <a:xfrm>
-            <a:off x="411480" y="1453896"/>
-            <a:ext cx="6819595" cy="5010912"/>
-          </a:xfrm>
-          <a:prstGeom prst="rect">
-            <a:avLst/>
-          </a:prstGeom>
-          <a:solidFill>
-            <a:srgbClr val="FFFFFF"/>
+          <p:cNvPr id="10" name="Shape 8"/>
+          <p:cNvSpPr/>
+          <p:nvPr/>
+        </p:nvSpPr>
+        <p:spPr>
+          <a:xfrm>
+            <a:off x="4821997" y="1088136"/>
+            <a:ext cx="6955475" cy="5376672"/>
+          </a:xfrm>
+          <a:prstGeom prst="rect">
+            <a:avLst/>
+          </a:prstGeom>
+          <a:solidFill>
+            <a:srgbClr val="0D1B5E"/>
           </a:solidFill>
           <a:ln w="25400">
             <a:solidFill>
               <a:srgbClr val="FABB2E"/>
             </a:solidFill>
+            <a:prstDash val="solid"/>
           </a:ln>
         </p:spPr>
-        <p:txBody>
-          <a:bodyPr wrap="square" lIns="76200" tIns="76200" rIns="76200" bIns="76200" rtlCol="0" anchor="t">
-            <a:normAutofit/>
-          </a:bodyPr>
-          <a:lstStyle/>
-          <a:p>
-            <a:pPr algn="l" indent="0" marL="0">
-              <a:spcAft>
-                <a:spcPts val="1000"/>
-              </a:spcAft>
-              <a:buNone/>
-            </a:pPr>
-            <a:r>
-              <a:rPr lang="en-US" sz="1600" b="1" u="sng" dirty="0">
-                <a:solidFill>
-                  <a:srgbClr val="E65100"/>
-                </a:solidFill>
-                <a:latin typeface="Trebuchet MS" pitchFamily="34" charset="0"/>
-                <a:ea typeface="Trebuchet MS" pitchFamily="34" charset="-122"/>
-                <a:cs typeface="Trebuchet MS" pitchFamily="34" charset="-120"/>
-              </a:rPr>
-              <a:t>1   rate = time \div volume</a:t>
-            </a:r>
-            <a:endParaRPr lang="en-US" sz="1300" dirty="0"/>
-          </a:p>
-          <a:p>
-            <a:pPr algn="l" indent="0" marL="0">
-              <a:spcAft>
-                <a:spcPts val="1000"/>
-              </a:spcAft>
-              <a:buNone/>
-            </a:pPr>
-            <a:r>
-              <a:rPr lang="en-US" sz="1600" dirty="0">
-                <a:solidFill>
-                  <a:srgbClr val="1A1A2E"/>
-                </a:solidFill>
-                <a:latin typeface="Trebuchet MS" pitchFamily="34" charset="0"/>
-                <a:ea typeface="Trebuchet MS" pitchFamily="34" charset="-122"/>
-                <a:cs typeface="Trebuchet MS" pitchFamily="34" charset="-120"/>
-              </a:rPr>
-              <a:t>2   rate = 40 \div 60</a:t>
-            </a:r>
-            <a:endParaRPr lang="en-US" sz="1300" dirty="0"/>
-          </a:p>
-          <a:p>
-            <a:pPr algn="l" indent="0" marL="0">
-              <a:spcAft>
-                <a:spcPts val="1000"/>
-              </a:spcAft>
-              <a:buNone/>
-            </a:pPr>
-            <a:r>
-              <a:rPr lang="en-US" sz="1600" dirty="0">
-                <a:solidFill>
-                  <a:srgbClr val="1A1A2E"/>
-                </a:solidFill>
-                <a:latin typeface="Trebuchet MS" pitchFamily="34" charset="0"/>
-                <a:ea typeface="Trebuchet MS" pitchFamily="34" charset="-122"/>
-                <a:cs typeface="Trebuchet MS" pitchFamily="34" charset="-120"/>
-              </a:rPr>
-              <a:t>3   rate = 0.67</a:t>
-            </a:r>
-            <a:endParaRPr lang="en-US" sz="1300" dirty="0"/>
-          </a:p>
-          <a:p>
-            <a:pPr algn="l" indent="0" marL="0">
-              <a:spcAft>
-                <a:spcPts val="1000"/>
-              </a:spcAft>
-              <a:buNone/>
-            </a:pPr>
-            <a:r>
-              <a:rPr lang="en-US" sz="1600" dirty="0">
-                <a:solidFill>
-                  <a:srgbClr val="1A1A2E"/>
-                </a:solidFill>
-                <a:latin typeface="Trebuchet MS" pitchFamily="34" charset="0"/>
-                <a:ea typeface="Trebuchet MS" pitchFamily="34" charset="-122"/>
-                <a:cs typeface="Trebuchet MS" pitchFamily="34" charset="-120"/>
-              </a:rPr>
-              <a:t>4   rate = 0.67 cm^3/s</a:t>
-            </a:r>
-            <a:endParaRPr lang="en-US" sz="1300" dirty="0"/>
-          </a:p>
-          <a:p>
-            <a:pPr algn="l" indent="0" marL="0">
-              <a:buNone/>
-            </a:pPr>
-            <a:r>
-              <a:rPr lang="en-US" sz="1600" b="1" dirty="0">
-                <a:solidFill>
-                  <a:srgbClr val="1B5E20"/>
-                </a:solidFill>
-                <a:latin typeface="Trebuchet MS" pitchFamily="34" charset="0"/>
-                <a:ea typeface="Trebuchet MS" pitchFamily="34" charset="-122"/>
-                <a:cs typeface="Trebuchet MS" pitchFamily="34" charset="-120"/>
-              </a:rPr>
-              <a:t>✓  rate = volume \div time = 60 \div 40 = 1.5 cm^3/s</a:t>
-            </a:r>
-            <a:endParaRPr lang="en-US" sz="1300" dirty="0"/>
-          </a:p>
-        </p:txBody>
+      </p:sp>
+      <p:sp>
+        <p:nvSpPr>
+          <p:cNvPr id="11" name="Shape 9"/>
+          <p:cNvSpPr/>
+          <p:nvPr/>
+        </p:nvSpPr>
+        <p:spPr>
+          <a:xfrm>
+            <a:off x="411480" y="1308091"/>
+            <a:ext cx="537667" cy="537667"/>
+          </a:xfrm>
+          <a:prstGeom prst="roundRect">
+            <a:avLst>
+              <a:gd name="adj" fmla="val 11905"/>
+            </a:avLst>
+          </a:prstGeom>
+          <a:solidFill>
+            <a:srgbClr val="FABB2E"/>
+          </a:solidFill>
+          <a:ln/>
+        </p:spPr>
       </p:sp>
       <p:sp>
         <p:nvSpPr>
@@ -19132,88 +19709,1144 @@
         </p:nvSpPr>
         <p:spPr>
           <a:xfrm>
-            <a:off x="7368235" y="1453896"/>
-            <a:ext cx="4409237" cy="5010912"/>
-          </a:xfrm>
-          <a:prstGeom prst="rect">
-            <a:avLst/>
-          </a:prstGeom>
-          <a:solidFill>
-            <a:srgbClr val="FFFFFF"/>
-          </a:solidFill>
-          <a:ln w="25400">
+            <a:off x="411480" y="1308091"/>
+            <a:ext cx="537667" cy="537667"/>
+          </a:xfrm>
+          <a:prstGeom prst="rect">
+            <a:avLst/>
+          </a:prstGeom>
+          <a:noFill/>
+          <a:ln/>
+        </p:spPr>
+        <p:txBody>
+          <a:bodyPr wrap="square" rtlCol="0" anchor="ctr"/>
+          <a:lstStyle/>
+          <a:p>
+            <a:pPr algn="ctr" indent="0" marL="0">
+              <a:buNone/>
+            </a:pPr>
+            <a:r>
+              <a:rPr lang="en-US" sz="2500" b="1" dirty="0">
+                <a:solidFill>
+                  <a:srgbClr val="0D1B5E"/>
+                </a:solidFill>
+                <a:latin typeface="Trebuchet MS" pitchFamily="34" charset="0"/>
+                <a:ea typeface="Trebuchet MS" pitchFamily="34" charset="-122"/>
+                <a:cs typeface="Trebuchet MS" pitchFamily="34" charset="-120"/>
+              </a:rPr>
+              <a:t>G</a:t>
+            </a:r>
+            <a:endParaRPr lang="en-US" sz="2500" dirty="0"/>
+          </a:p>
+        </p:txBody>
+      </p:sp>
+      <p:sp>
+        <p:nvSpPr>
+          <p:cNvPr id="13" name="Text 11"/>
+          <p:cNvSpPr/>
+          <p:nvPr/>
+        </p:nvSpPr>
+        <p:spPr>
+          <a:xfrm>
+            <a:off x="1086307" y="1088136"/>
+            <a:ext cx="3644250" cy="977577"/>
+          </a:xfrm>
+          <a:prstGeom prst="rect">
+            <a:avLst/>
+          </a:prstGeom>
+          <a:noFill/>
+          <a:ln/>
+        </p:spPr>
+        <p:txBody>
+          <a:bodyPr wrap="square" rtlCol="0" anchor="ctr"/>
+          <a:lstStyle/>
+          <a:p>
+            <a:pPr indent="0" marL="0">
+              <a:buNone/>
+            </a:pPr>
+            <a:r>
+              <a:rPr lang="en-US" sz="1500" dirty="0">
+                <a:solidFill>
+                  <a:srgbClr val="0D1B5E"/>
+                </a:solidFill>
+                <a:latin typeface="Trebuchet MS" pitchFamily="34" charset="0"/>
+                <a:ea typeface="Trebuchet MS" pitchFamily="34" charset="-122"/>
+                <a:cs typeface="Trebuchet MS" pitchFamily="34" charset="-120"/>
+              </a:rPr>
+              <a:t>What are you given?</a:t>
+            </a:r>
+            <a:endParaRPr lang="en-US" sz="1500" dirty="0"/>
+          </a:p>
+        </p:txBody>
+      </p:sp>
+      <p:sp>
+        <p:nvSpPr>
+          <p:cNvPr id="14" name="Text 12"/>
+          <p:cNvSpPr/>
+          <p:nvPr/>
+        </p:nvSpPr>
+        <p:spPr>
+          <a:xfrm>
+            <a:off x="4959157" y="1088136"/>
+            <a:ext cx="6681155" cy="977577"/>
+          </a:xfrm>
+          <a:prstGeom prst="rect">
+            <a:avLst/>
+          </a:prstGeom>
+          <a:noFill/>
+          <a:ln/>
+        </p:spPr>
+        <p:txBody>
+          <a:bodyPr wrap="square" rtlCol="0" anchor="ctr"/>
+          <a:lstStyle/>
+          <a:p>
+            <a:pPr indent="0" marL="0">
+              <a:buNone/>
+            </a:pPr>
+            <a:r>
+              <a:rPr lang="en-US" sz="2200" dirty="0">
+                <a:solidFill>
+                  <a:srgbClr val="FABB2E"/>
+                </a:solidFill>
+                <a:latin typeface="Cambria Math" pitchFamily="34" charset="0"/>
+                <a:ea typeface="Cambria Math" pitchFamily="34" charset="-122"/>
+                <a:cs typeface="Cambria Math" pitchFamily="34" charset="-120"/>
+              </a:rPr>
+              <a:t>ρ = 2700 </a:t>
+            </a:r>
+            <a:pPr indent="0" marL="0">
+              <a:buNone/>
+            </a:pPr>
+            <a:r>
+              <a:rPr lang="en-US" sz="2200" dirty="0">
+                <a:solidFill>
+                  <a:srgbClr val="FABB2E"/>
+                </a:solidFill>
+                <a:latin typeface="Cambria Math" pitchFamily="34" charset="0"/>
+                <a:ea typeface="Cambria Math" pitchFamily="34" charset="-122"/>
+                <a:cs typeface="Cambria Math" pitchFamily="34" charset="-120"/>
+              </a:rPr>
+              <a:t>kg</a:t>
+            </a:r>
+            <a:pPr indent="0" marL="0">
+              <a:buNone/>
+            </a:pPr>
+            <a:r>
+              <a:rPr lang="en-US" sz="2200" dirty="0">
+                <a:solidFill>
+                  <a:srgbClr val="FABB2E"/>
+                </a:solidFill>
+                <a:latin typeface="Cambria Math" pitchFamily="34" charset="0"/>
+                <a:ea typeface="Cambria Math" pitchFamily="34" charset="-122"/>
+                <a:cs typeface="Cambria Math" pitchFamily="34" charset="-120"/>
+              </a:rPr>
+              <a:t>⁄</a:t>
+            </a:r>
+            <a:pPr indent="0" marL="0">
+              <a:buNone/>
+            </a:pPr>
+            <a:r>
+              <a:rPr lang="en-US" sz="2200" dirty="0">
+                <a:solidFill>
+                  <a:srgbClr val="FABB2E"/>
+                </a:solidFill>
+                <a:latin typeface="Cambria Math" pitchFamily="34" charset="0"/>
+                <a:ea typeface="Cambria Math" pitchFamily="34" charset="-122"/>
+                <a:cs typeface="Cambria Math" pitchFamily="34" charset="-120"/>
+              </a:rPr>
+              <a:t>m^3,</a:t>
+            </a:r>
+            <a:pPr indent="0" marL="0">
+              <a:buNone/>
+            </a:pPr>
+            <a:r>
+              <a:rPr lang="en-US" sz="2200" dirty="0">
+                <a:solidFill>
+                  <a:srgbClr val="FABB2E"/>
+                </a:solidFill>
+                <a:latin typeface="Cambria Math" pitchFamily="34" charset="0"/>
+                <a:ea typeface="Cambria Math" pitchFamily="34" charset="-122"/>
+                <a:cs typeface="Cambria Math" pitchFamily="34" charset="-120"/>
+              </a:rPr>
+              <a:t> l = 0.2 m, w = 0.1 m, h = 0.05 m</a:t>
+            </a:r>
+            <a:endParaRPr lang="en-US" sz="2200" dirty="0"/>
+          </a:p>
+        </p:txBody>
+      </p:sp>
+      <p:sp>
+        <p:nvSpPr>
+          <p:cNvPr id="15" name="Shape 13"/>
+          <p:cNvSpPr/>
+          <p:nvPr/>
+        </p:nvSpPr>
+        <p:spPr>
+          <a:xfrm>
+            <a:off x="411480" y="2285667"/>
+            <a:ext cx="537667" cy="537667"/>
+          </a:xfrm>
+          <a:prstGeom prst="roundRect">
+            <a:avLst>
+              <a:gd name="adj" fmla="val 11905"/>
+            </a:avLst>
+          </a:prstGeom>
+          <a:solidFill>
+            <a:srgbClr val="FABB2E"/>
+          </a:solidFill>
+          <a:ln/>
+        </p:spPr>
+      </p:sp>
+      <p:sp>
+        <p:nvSpPr>
+          <p:cNvPr id="16" name="Text 14"/>
+          <p:cNvSpPr/>
+          <p:nvPr/>
+        </p:nvSpPr>
+        <p:spPr>
+          <a:xfrm>
+            <a:off x="411480" y="2285667"/>
+            <a:ext cx="537667" cy="537667"/>
+          </a:xfrm>
+          <a:prstGeom prst="rect">
+            <a:avLst/>
+          </a:prstGeom>
+          <a:noFill/>
+          <a:ln/>
+        </p:spPr>
+        <p:txBody>
+          <a:bodyPr wrap="square" rtlCol="0" anchor="ctr"/>
+          <a:lstStyle/>
+          <a:p>
+            <a:pPr algn="ctr" indent="0" marL="0">
+              <a:buNone/>
+            </a:pPr>
+            <a:r>
+              <a:rPr lang="en-US" sz="2500" b="1" dirty="0">
+                <a:solidFill>
+                  <a:srgbClr val="0D1B5E"/>
+                </a:solidFill>
+                <a:latin typeface="Trebuchet MS" pitchFamily="34" charset="0"/>
+                <a:ea typeface="Trebuchet MS" pitchFamily="34" charset="-122"/>
+                <a:cs typeface="Trebuchet MS" pitchFamily="34" charset="-120"/>
+              </a:rPr>
+              <a:t>U</a:t>
+            </a:r>
+            <a:endParaRPr lang="en-US" sz="2500" dirty="0"/>
+          </a:p>
+        </p:txBody>
+      </p:sp>
+      <p:sp>
+        <p:nvSpPr>
+          <p:cNvPr id="17" name="Text 15"/>
+          <p:cNvSpPr/>
+          <p:nvPr/>
+        </p:nvSpPr>
+        <p:spPr>
+          <a:xfrm>
+            <a:off x="1086307" y="2065713"/>
+            <a:ext cx="3644250" cy="977577"/>
+          </a:xfrm>
+          <a:prstGeom prst="rect">
+            <a:avLst/>
+          </a:prstGeom>
+          <a:noFill/>
+          <a:ln/>
+        </p:spPr>
+        <p:txBody>
+          <a:bodyPr wrap="square" rtlCol="0" anchor="ctr"/>
+          <a:lstStyle/>
+          <a:p>
+            <a:pPr indent="0" marL="0">
+              <a:buNone/>
+            </a:pPr>
+            <a:r>
+              <a:rPr lang="en-US" sz="1500" dirty="0">
+                <a:solidFill>
+                  <a:srgbClr val="0D1B5E"/>
+                </a:solidFill>
+                <a:latin typeface="Trebuchet MS" pitchFamily="34" charset="0"/>
+                <a:ea typeface="Trebuchet MS" pitchFamily="34" charset="-122"/>
+                <a:cs typeface="Trebuchet MS" pitchFamily="34" charset="-120"/>
+              </a:rPr>
+              <a:t>What is unknown?</a:t>
+            </a:r>
+            <a:endParaRPr lang="en-US" sz="1500" dirty="0"/>
+          </a:p>
+        </p:txBody>
+      </p:sp>
+      <p:sp>
+        <p:nvSpPr>
+          <p:cNvPr id="18" name="Shape 16"/>
+          <p:cNvSpPr/>
+          <p:nvPr/>
+        </p:nvSpPr>
+        <p:spPr>
+          <a:xfrm>
+            <a:off x="4821997" y="2065713"/>
+            <a:ext cx="6955475" cy="0"/>
+          </a:xfrm>
+          <a:prstGeom prst="line">
+            <a:avLst/>
+          </a:prstGeom>
+          <a:noFill/>
+          <a:ln w="12700">
             <a:solidFill>
               <a:srgbClr val="FABB2E"/>
             </a:solidFill>
+            <a:prstDash val="solid"/>
           </a:ln>
         </p:spPr>
-        <p:txBody>
-          <a:bodyPr wrap="square" lIns="76200" tIns="76200" rIns="76200" bIns="76200" rtlCol="0" anchor="t">
+      </p:sp>
+      <p:sp>
+        <p:nvSpPr>
+          <p:cNvPr id="19" name="Text 17"/>
+          <p:cNvSpPr/>
+          <p:nvPr/>
+        </p:nvSpPr>
+        <p:spPr>
+          <a:xfrm>
+            <a:off x="4959157" y="2065713"/>
+            <a:ext cx="6681155" cy="977577"/>
+          </a:xfrm>
+          <a:prstGeom prst="rect">
+            <a:avLst/>
+          </a:prstGeom>
+          <a:noFill/>
+          <a:ln/>
+        </p:spPr>
+        <p:txBody>
+          <a:bodyPr wrap="square" rtlCol="0" anchor="ctr"/>
+          <a:lstStyle/>
+          <a:p>
+            <a:pPr indent="0" marL="0">
+              <a:buNone/>
+            </a:pPr>
+            <a:r>
+              <a:rPr lang="en-US" sz="2200" dirty="0">
+                <a:solidFill>
+                  <a:srgbClr val="FABB2E"/>
+                </a:solidFill>
+                <a:latin typeface="Cambria Math" pitchFamily="34" charset="0"/>
+                <a:ea typeface="Cambria Math" pitchFamily="34" charset="-122"/>
+                <a:cs typeface="Cambria Math" pitchFamily="34" charset="-120"/>
+              </a:rPr>
+              <a:t>Mass of the aluminium block</a:t>
+            </a:r>
+            <a:endParaRPr lang="en-US" sz="2200" dirty="0"/>
+          </a:p>
+        </p:txBody>
+      </p:sp>
+      <p:sp>
+        <p:nvSpPr>
+          <p:cNvPr id="20" name="Shape 18"/>
+          <p:cNvSpPr/>
+          <p:nvPr/>
+        </p:nvSpPr>
+        <p:spPr>
+          <a:xfrm>
+            <a:off x="411480" y="3419690"/>
+            <a:ext cx="566928" cy="566928"/>
+          </a:xfrm>
+          <a:prstGeom prst="roundRect">
+            <a:avLst>
+              <a:gd name="adj" fmla="val 11290"/>
+            </a:avLst>
+          </a:prstGeom>
+          <a:solidFill>
+            <a:srgbClr val="FABB2E"/>
+          </a:solidFill>
+          <a:ln/>
+        </p:spPr>
+      </p:sp>
+      <p:sp>
+        <p:nvSpPr>
+          <p:cNvPr id="21" name="Text 19"/>
+          <p:cNvSpPr/>
+          <p:nvPr/>
+        </p:nvSpPr>
+        <p:spPr>
+          <a:xfrm>
+            <a:off x="411480" y="3419690"/>
+            <a:ext cx="566928" cy="566928"/>
+          </a:xfrm>
+          <a:prstGeom prst="rect">
+            <a:avLst/>
+          </a:prstGeom>
+          <a:noFill/>
+          <a:ln/>
+        </p:spPr>
+        <p:txBody>
+          <a:bodyPr wrap="square" rtlCol="0" anchor="ctr"/>
+          <a:lstStyle/>
+          <a:p>
+            <a:pPr algn="ctr" indent="0" marL="0">
+              <a:buNone/>
+            </a:pPr>
+            <a:r>
+              <a:rPr lang="en-US" sz="2600" b="1" dirty="0">
+                <a:solidFill>
+                  <a:srgbClr val="0D1B5E"/>
+                </a:solidFill>
+                <a:latin typeface="Trebuchet MS" pitchFamily="34" charset="0"/>
+                <a:ea typeface="Trebuchet MS" pitchFamily="34" charset="-122"/>
+                <a:cs typeface="Trebuchet MS" pitchFamily="34" charset="-120"/>
+              </a:rPr>
+              <a:t>E</a:t>
+            </a:r>
+            <a:endParaRPr lang="en-US" sz="2600" dirty="0"/>
+          </a:p>
+        </p:txBody>
+      </p:sp>
+      <p:sp>
+        <p:nvSpPr>
+          <p:cNvPr id="22" name="Text 20"/>
+          <p:cNvSpPr/>
+          <p:nvPr/>
+        </p:nvSpPr>
+        <p:spPr>
+          <a:xfrm>
+            <a:off x="1115568" y="3043289"/>
+            <a:ext cx="3614989" cy="1319729"/>
+          </a:xfrm>
+          <a:prstGeom prst="rect">
+            <a:avLst/>
+          </a:prstGeom>
+          <a:noFill/>
+          <a:ln/>
+        </p:spPr>
+        <p:txBody>
+          <a:bodyPr wrap="square" rtlCol="0" anchor="ctr"/>
+          <a:lstStyle/>
+          <a:p>
+            <a:pPr indent="0" marL="0">
+              <a:buNone/>
+            </a:pPr>
+            <a:r>
+              <a:rPr lang="en-US" sz="1500" dirty="0">
+                <a:solidFill>
+                  <a:srgbClr val="0D1B5E"/>
+                </a:solidFill>
+                <a:latin typeface="Trebuchet MS" pitchFamily="34" charset="0"/>
+                <a:ea typeface="Trebuchet MS" pitchFamily="34" charset="-122"/>
+                <a:cs typeface="Trebuchet MS" pitchFamily="34" charset="-120"/>
+              </a:rPr>
+              <a:t>What is the equation?</a:t>
+            </a:r>
+            <a:endParaRPr lang="en-US" sz="1500" dirty="0"/>
+          </a:p>
+        </p:txBody>
+      </p:sp>
+      <p:sp>
+        <p:nvSpPr>
+          <p:cNvPr id="23" name="Shape 21"/>
+          <p:cNvSpPr/>
+          <p:nvPr/>
+        </p:nvSpPr>
+        <p:spPr>
+          <a:xfrm>
+            <a:off x="4821997" y="3043289"/>
+            <a:ext cx="6955475" cy="0"/>
+          </a:xfrm>
+          <a:prstGeom prst="line">
+            <a:avLst/>
+          </a:prstGeom>
+          <a:noFill/>
+          <a:ln w="12700">
+            <a:solidFill>
+              <a:srgbClr val="FABB2E"/>
+            </a:solidFill>
+            <a:prstDash val="solid"/>
+          </a:ln>
+        </p:spPr>
+      </p:sp>
+      <p:sp>
+        <p:nvSpPr>
+          <p:cNvPr id="24" name="Text 22"/>
+          <p:cNvSpPr/>
+          <p:nvPr/>
+        </p:nvSpPr>
+        <p:spPr>
+          <a:xfrm>
+            <a:off x="5050597" y="3043289"/>
+            <a:ext cx="4344198" cy="1319729"/>
+          </a:xfrm>
+          <a:prstGeom prst="rect">
+            <a:avLst/>
+          </a:prstGeom>
+          <a:noFill/>
+          <a:ln/>
+        </p:spPr>
+        <p:txBody>
+          <a:bodyPr wrap="square" lIns="0" tIns="0" rIns="0" bIns="0" rtlCol="0" anchor="ctr"/>
+          <a:lstStyle/>
+          <a:p>
+            <a:pPr indent="0" marL="0">
+              <a:buNone/>
+            </a:pPr>
+            <a:r>
+              <a:rPr lang="en-US" sz="2000" b="1" dirty="0">
+                <a:solidFill>
+                  <a:srgbClr val="FABB2E"/>
+                </a:solidFill>
+                <a:latin typeface="Cambria Math" pitchFamily="34" charset="0"/>
+                <a:ea typeface="Cambria Math" pitchFamily="34" charset="-122"/>
+                <a:cs typeface="Cambria Math" pitchFamily="34" charset="-120"/>
+              </a:rPr>
+              <a:t>m = ρ lwh</a:t>
+            </a:r>
+            <a:endParaRPr lang="en-US" sz="2000" dirty="0"/>
+          </a:p>
+        </p:txBody>
+      </p:sp>
+      <p:sp>
+        <p:nvSpPr>
+          <p:cNvPr id="25" name="Shape 23"/>
+          <p:cNvSpPr/>
+          <p:nvPr/>
+        </p:nvSpPr>
+        <p:spPr>
+          <a:xfrm>
+            <a:off x="9577675" y="3153017"/>
+            <a:ext cx="1925477" cy="1100273"/>
+          </a:xfrm>
+          <a:prstGeom prst="triangle">
+            <a:avLst/>
+          </a:prstGeom>
+          <a:solidFill>
+            <a:srgbClr val="FFFFFF"/>
+          </a:solidFill>
+          <a:ln w="25400">
+            <a:solidFill>
+              <a:srgbClr val="0D1B5E"/>
+            </a:solidFill>
+            <a:prstDash val="solid"/>
+          </a:ln>
+        </p:spPr>
+      </p:sp>
+      <p:sp>
+        <p:nvSpPr>
+          <p:cNvPr id="26" name="Shape 24"/>
+          <p:cNvSpPr/>
+          <p:nvPr/>
+        </p:nvSpPr>
+        <p:spPr>
+          <a:xfrm>
+            <a:off x="10136063" y="3615132"/>
+            <a:ext cx="808700" cy="0"/>
+          </a:xfrm>
+          <a:prstGeom prst="line">
+            <a:avLst/>
+          </a:prstGeom>
+          <a:noFill/>
+          <a:ln w="19050">
+            <a:solidFill>
+              <a:srgbClr val="0D1B5E"/>
+            </a:solidFill>
+            <a:prstDash val="solid"/>
+          </a:ln>
+        </p:spPr>
+      </p:sp>
+      <p:sp>
+        <p:nvSpPr>
+          <p:cNvPr id="27" name="Text 25"/>
+          <p:cNvSpPr/>
+          <p:nvPr/>
+        </p:nvSpPr>
+        <p:spPr>
+          <a:xfrm>
+            <a:off x="10312212" y="3323540"/>
+            <a:ext cx="456402" cy="264160"/>
+          </a:xfrm>
+          <a:prstGeom prst="rect">
+            <a:avLst/>
+          </a:prstGeom>
+          <a:noFill/>
+          <a:ln/>
+        </p:spPr>
+        <p:txBody>
+          <a:bodyPr wrap="square" lIns="0" tIns="0" rIns="0" bIns="0" rtlCol="0" anchor="ctr">
             <a:normAutofit/>
           </a:bodyPr>
           <a:lstStyle/>
           <a:p>
-            <a:pPr algn="l" indent="0" marL="0">
-              <a:spcAft>
-                <a:spcPts val="800"/>
-              </a:spcAft>
+            <a:pPr algn="ctr" indent="0" marL="0">
+              <a:buNone/>
+            </a:pPr>
+            <a:r>
+              <a:rPr lang="en-US" sz="1600" b="1" dirty="0">
+                <a:solidFill>
+                  <a:srgbClr val="0D1B5E"/>
+                </a:solidFill>
+                <a:latin typeface="Trebuchet MS" pitchFamily="34" charset="0"/>
+                <a:ea typeface="Trebuchet MS" pitchFamily="34" charset="-122"/>
+                <a:cs typeface="Trebuchet MS" pitchFamily="34" charset="-120"/>
+              </a:rPr>
+              <a:t>m</a:t>
+            </a:r>
+            <a:endParaRPr lang="en-US" sz="1600" dirty="0"/>
+          </a:p>
+        </p:txBody>
+      </p:sp>
+      <p:sp>
+        <p:nvSpPr>
+          <p:cNvPr id="28" name="Shape 26"/>
+          <p:cNvSpPr/>
+          <p:nvPr/>
+        </p:nvSpPr>
+        <p:spPr>
+          <a:xfrm>
+            <a:off x="10198641" y="3615132"/>
+            <a:ext cx="0" cy="638158"/>
+          </a:xfrm>
+          <a:prstGeom prst="line">
+            <a:avLst/>
+          </a:prstGeom>
+          <a:noFill/>
+          <a:ln w="19050">
+            <a:solidFill>
+              <a:srgbClr val="0D1B5E"/>
+            </a:solidFill>
+            <a:prstDash val="solid"/>
+          </a:ln>
+        </p:spPr>
+      </p:sp>
+      <p:sp>
+        <p:nvSpPr>
+          <p:cNvPr id="29" name="Shape 27"/>
+          <p:cNvSpPr/>
+          <p:nvPr/>
+        </p:nvSpPr>
+        <p:spPr>
+          <a:xfrm>
+            <a:off x="10540413" y="3615132"/>
+            <a:ext cx="0" cy="638158"/>
+          </a:xfrm>
+          <a:prstGeom prst="line">
+            <a:avLst/>
+          </a:prstGeom>
+          <a:noFill/>
+          <a:ln w="19050">
+            <a:solidFill>
+              <a:srgbClr val="0D1B5E"/>
+            </a:solidFill>
+            <a:prstDash val="solid"/>
+          </a:ln>
+        </p:spPr>
+      </p:sp>
+      <p:sp>
+        <p:nvSpPr>
+          <p:cNvPr id="30" name="Shape 28"/>
+          <p:cNvSpPr/>
+          <p:nvPr/>
+        </p:nvSpPr>
+        <p:spPr>
+          <a:xfrm>
+            <a:off x="10882186" y="3615132"/>
+            <a:ext cx="0" cy="638158"/>
+          </a:xfrm>
+          <a:prstGeom prst="line">
+            <a:avLst/>
+          </a:prstGeom>
+          <a:noFill/>
+          <a:ln w="19050">
+            <a:solidFill>
+              <a:srgbClr val="0D1B5E"/>
+            </a:solidFill>
+            <a:prstDash val="solid"/>
+          </a:ln>
+        </p:spPr>
+      </p:sp>
+      <p:sp>
+        <p:nvSpPr>
+          <p:cNvPr id="31" name="Text 29"/>
+          <p:cNvSpPr/>
+          <p:nvPr/>
+        </p:nvSpPr>
+        <p:spPr>
+          <a:xfrm>
+            <a:off x="9994569" y="3633420"/>
+            <a:ext cx="167496" cy="601582"/>
+          </a:xfrm>
+          <a:prstGeom prst="rect">
+            <a:avLst/>
+          </a:prstGeom>
+          <a:noFill/>
+          <a:ln/>
+        </p:spPr>
+        <p:txBody>
+          <a:bodyPr wrap="square" lIns="0" tIns="0" rIns="0" bIns="0" rtlCol="0" anchor="ctr">
+            <a:normAutofit/>
+          </a:bodyPr>
+          <a:lstStyle/>
+          <a:p>
+            <a:pPr algn="ctr" indent="0" marL="0">
               <a:buNone/>
             </a:pPr>
             <a:r>
               <a:rPr lang="en-US" sz="1400" b="1" dirty="0">
                 <a:solidFill>
-                  <a:srgbClr val="1A1A2E"/>
-                </a:solidFill>
-                <a:latin typeface="Trebuchet MS" pitchFamily="34" charset="0"/>
-                <a:ea typeface="Trebuchet MS" pitchFamily="34" charset="-122"/>
-                <a:cs typeface="Trebuchet MS" pitchFamily="34" charset="-120"/>
-              </a:rPr>
-              <a:t>Error on line 1</a:t>
-            </a:r>
-            <a:endParaRPr lang="en-US" sz="1300" dirty="0"/>
-          </a:p>
-          <a:p>
-            <a:pPr algn="l" indent="0" marL="0">
-              <a:spcAft>
-                <a:spcPts val="800"/>
-              </a:spcAft>
-              <a:buNone/>
-            </a:pPr>
-            <a:r>
-              <a:rPr lang="en-US" sz="1300" i="1" dirty="0">
-                <a:solidFill>
-                  <a:srgbClr val="1A1A2E"/>
-                </a:solidFill>
-                <a:latin typeface="Trebuchet MS" pitchFamily="34" charset="0"/>
-                <a:ea typeface="Trebuchet MS" pitchFamily="34" charset="-122"/>
-                <a:cs typeface="Trebuchet MS" pitchFamily="34" charset="-120"/>
-              </a:rPr>
-              <a:t>Error type: Equation written upside down</a:t>
-            </a:r>
-            <a:endParaRPr lang="en-US" sz="1300" dirty="0"/>
-          </a:p>
-          <a:p>
-            <a:pPr algn="l" indent="0" marL="0">
-              <a:buNone/>
-            </a:pPr>
-            <a:r>
-              <a:rPr lang="en-US" sz="1300" b="1" dirty="0">
-                <a:solidFill>
-                  <a:srgbClr val="1B5E20"/>
-                </a:solidFill>
-                <a:latin typeface="Trebuchet MS" pitchFamily="34" charset="0"/>
-                <a:ea typeface="Trebuchet MS" pitchFamily="34" charset="-122"/>
-                <a:cs typeface="Trebuchet MS" pitchFamily="34" charset="-120"/>
-              </a:rPr>
-              <a:t>Corrected: rate = volume \div time = 60 \div 40 = 1.5 cm^3/s</a:t>
-            </a:r>
-            <a:endParaRPr lang="en-US" sz="1300" dirty="0"/>
-          </a:p>
-        </p:txBody>
-      </p:sp>
-      <p:sp>
-        <p:nvSpPr>
-          <p:cNvPr id="13" name="Text 11"/>
+                  <a:srgbClr val="0D1B5E"/>
+                </a:solidFill>
+                <a:latin typeface="Trebuchet MS" pitchFamily="34" charset="0"/>
+                <a:ea typeface="Trebuchet MS" pitchFamily="34" charset="-122"/>
+                <a:cs typeface="Trebuchet MS" pitchFamily="34" charset="-120"/>
+              </a:rPr>
+              <a:t>ρ</a:t>
+            </a:r>
+            <a:endParaRPr lang="en-US" sz="1400" dirty="0"/>
+          </a:p>
+        </p:txBody>
+      </p:sp>
+      <p:sp>
+        <p:nvSpPr>
+          <p:cNvPr id="32" name="Text 30"/>
+          <p:cNvSpPr/>
+          <p:nvPr/>
+        </p:nvSpPr>
+        <p:spPr>
+          <a:xfrm>
+            <a:off x="10235217" y="3633420"/>
+            <a:ext cx="268620" cy="601582"/>
+          </a:xfrm>
+          <a:prstGeom prst="rect">
+            <a:avLst/>
+          </a:prstGeom>
+          <a:noFill/>
+          <a:ln/>
+        </p:spPr>
+        <p:txBody>
+          <a:bodyPr wrap="square" lIns="0" tIns="0" rIns="0" bIns="0" rtlCol="0" anchor="ctr">
+            <a:normAutofit/>
+          </a:bodyPr>
+          <a:lstStyle/>
+          <a:p>
+            <a:pPr algn="ctr" indent="0" marL="0">
+              <a:buNone/>
+            </a:pPr>
+            <a:r>
+              <a:rPr lang="en-US" sz="1400" b="1" dirty="0">
+                <a:solidFill>
+                  <a:srgbClr val="0D1B5E"/>
+                </a:solidFill>
+                <a:latin typeface="Trebuchet MS" pitchFamily="34" charset="0"/>
+                <a:ea typeface="Trebuchet MS" pitchFamily="34" charset="-122"/>
+                <a:cs typeface="Trebuchet MS" pitchFamily="34" charset="-120"/>
+              </a:rPr>
+              <a:t>l</a:t>
+            </a:r>
+            <a:endParaRPr lang="en-US" sz="1400" dirty="0"/>
+          </a:p>
+        </p:txBody>
+      </p:sp>
+      <p:sp>
+        <p:nvSpPr>
+          <p:cNvPr id="33" name="Text 31"/>
+          <p:cNvSpPr/>
+          <p:nvPr/>
+        </p:nvSpPr>
+        <p:spPr>
+          <a:xfrm>
+            <a:off x="10576989" y="3633420"/>
+            <a:ext cx="268620" cy="601582"/>
+          </a:xfrm>
+          <a:prstGeom prst="rect">
+            <a:avLst/>
+          </a:prstGeom>
+          <a:noFill/>
+          <a:ln/>
+        </p:spPr>
+        <p:txBody>
+          <a:bodyPr wrap="square" lIns="0" tIns="0" rIns="0" bIns="0" rtlCol="0" anchor="ctr">
+            <a:normAutofit/>
+          </a:bodyPr>
+          <a:lstStyle/>
+          <a:p>
+            <a:pPr algn="ctr" indent="0" marL="0">
+              <a:buNone/>
+            </a:pPr>
+            <a:r>
+              <a:rPr lang="en-US" sz="1400" b="1" dirty="0">
+                <a:solidFill>
+                  <a:srgbClr val="0D1B5E"/>
+                </a:solidFill>
+                <a:latin typeface="Trebuchet MS" pitchFamily="34" charset="0"/>
+                <a:ea typeface="Trebuchet MS" pitchFamily="34" charset="-122"/>
+                <a:cs typeface="Trebuchet MS" pitchFamily="34" charset="-120"/>
+              </a:rPr>
+              <a:t>w</a:t>
+            </a:r>
+            <a:endParaRPr lang="en-US" sz="1400" dirty="0"/>
+          </a:p>
+        </p:txBody>
+      </p:sp>
+      <p:sp>
+        <p:nvSpPr>
+          <p:cNvPr id="34" name="Text 32"/>
+          <p:cNvSpPr/>
+          <p:nvPr/>
+        </p:nvSpPr>
+        <p:spPr>
+          <a:xfrm>
+            <a:off x="10918762" y="3633420"/>
+            <a:ext cx="167496" cy="601582"/>
+          </a:xfrm>
+          <a:prstGeom prst="rect">
+            <a:avLst/>
+          </a:prstGeom>
+          <a:noFill/>
+          <a:ln/>
+        </p:spPr>
+        <p:txBody>
+          <a:bodyPr wrap="square" lIns="0" tIns="0" rIns="0" bIns="0" rtlCol="0" anchor="ctr">
+            <a:normAutofit/>
+          </a:bodyPr>
+          <a:lstStyle/>
+          <a:p>
+            <a:pPr algn="ctr" indent="0" marL="0">
+              <a:buNone/>
+            </a:pPr>
+            <a:r>
+              <a:rPr lang="en-US" sz="1400" b="1" dirty="0">
+                <a:solidFill>
+                  <a:srgbClr val="0D1B5E"/>
+                </a:solidFill>
+                <a:latin typeface="Trebuchet MS" pitchFamily="34" charset="0"/>
+                <a:ea typeface="Trebuchet MS" pitchFamily="34" charset="-122"/>
+                <a:cs typeface="Trebuchet MS" pitchFamily="34" charset="-120"/>
+              </a:rPr>
+              <a:t>h</a:t>
+            </a:r>
+            <a:endParaRPr lang="en-US" sz="1400" dirty="0"/>
+          </a:p>
+        </p:txBody>
+      </p:sp>
+      <p:sp>
+        <p:nvSpPr>
+          <p:cNvPr id="35" name="Shape 33"/>
+          <p:cNvSpPr/>
+          <p:nvPr/>
+        </p:nvSpPr>
+        <p:spPr>
+          <a:xfrm>
+            <a:off x="411480" y="4582973"/>
+            <a:ext cx="537667" cy="537667"/>
+          </a:xfrm>
+          <a:prstGeom prst="roundRect">
+            <a:avLst>
+              <a:gd name="adj" fmla="val 11905"/>
+            </a:avLst>
+          </a:prstGeom>
+          <a:solidFill>
+            <a:srgbClr val="FABB2E"/>
+          </a:solidFill>
+          <a:ln/>
+        </p:spPr>
+      </p:sp>
+      <p:sp>
+        <p:nvSpPr>
+          <p:cNvPr id="36" name="Text 34"/>
+          <p:cNvSpPr/>
+          <p:nvPr/>
+        </p:nvSpPr>
+        <p:spPr>
+          <a:xfrm>
+            <a:off x="411480" y="4582973"/>
+            <a:ext cx="537667" cy="537667"/>
+          </a:xfrm>
+          <a:prstGeom prst="rect">
+            <a:avLst/>
+          </a:prstGeom>
+          <a:noFill/>
+          <a:ln/>
+        </p:spPr>
+        <p:txBody>
+          <a:bodyPr wrap="square" rtlCol="0" anchor="ctr"/>
+          <a:lstStyle/>
+          <a:p>
+            <a:pPr algn="ctr" indent="0" marL="0">
+              <a:buNone/>
+            </a:pPr>
+            <a:r>
+              <a:rPr lang="en-US" sz="2500" b="1" dirty="0">
+                <a:solidFill>
+                  <a:srgbClr val="0D1B5E"/>
+                </a:solidFill>
+                <a:latin typeface="Trebuchet MS" pitchFamily="34" charset="0"/>
+                <a:ea typeface="Trebuchet MS" pitchFamily="34" charset="-122"/>
+                <a:cs typeface="Trebuchet MS" pitchFamily="34" charset="-120"/>
+              </a:rPr>
+              <a:t>S</a:t>
+            </a:r>
+            <a:endParaRPr lang="en-US" sz="2500" dirty="0"/>
+          </a:p>
+        </p:txBody>
+      </p:sp>
+      <p:sp>
+        <p:nvSpPr>
+          <p:cNvPr id="37" name="Text 35"/>
+          <p:cNvSpPr/>
+          <p:nvPr/>
+        </p:nvSpPr>
+        <p:spPr>
+          <a:xfrm>
+            <a:off x="1086307" y="4363018"/>
+            <a:ext cx="3644250" cy="977577"/>
+          </a:xfrm>
+          <a:prstGeom prst="rect">
+            <a:avLst/>
+          </a:prstGeom>
+          <a:noFill/>
+          <a:ln/>
+        </p:spPr>
+        <p:txBody>
+          <a:bodyPr wrap="square" rtlCol="0" anchor="ctr"/>
+          <a:lstStyle/>
+          <a:p>
+            <a:pPr indent="0" marL="0">
+              <a:buNone/>
+            </a:pPr>
+            <a:r>
+              <a:rPr lang="en-US" sz="1500" dirty="0">
+                <a:solidFill>
+                  <a:srgbClr val="0D1B5E"/>
+                </a:solidFill>
+                <a:latin typeface="Trebuchet MS" pitchFamily="34" charset="0"/>
+                <a:ea typeface="Trebuchet MS" pitchFamily="34" charset="-122"/>
+                <a:cs typeface="Trebuchet MS" pitchFamily="34" charset="-120"/>
+              </a:rPr>
+              <a:t>Substitute the numbers</a:t>
+            </a:r>
+            <a:endParaRPr lang="en-US" sz="1500" dirty="0"/>
+          </a:p>
+        </p:txBody>
+      </p:sp>
+      <p:sp>
+        <p:nvSpPr>
+          <p:cNvPr id="38" name="Shape 36"/>
+          <p:cNvSpPr/>
+          <p:nvPr/>
+        </p:nvSpPr>
+        <p:spPr>
+          <a:xfrm>
+            <a:off x="4821997" y="4363018"/>
+            <a:ext cx="6955475" cy="0"/>
+          </a:xfrm>
+          <a:prstGeom prst="line">
+            <a:avLst/>
+          </a:prstGeom>
+          <a:noFill/>
+          <a:ln w="12700">
+            <a:solidFill>
+              <a:srgbClr val="FABB2E"/>
+            </a:solidFill>
+            <a:prstDash val="solid"/>
+          </a:ln>
+        </p:spPr>
+      </p:sp>
+      <p:sp>
+        <p:nvSpPr>
+          <p:cNvPr id="39" name="Text 37"/>
+          <p:cNvSpPr/>
+          <p:nvPr/>
+        </p:nvSpPr>
+        <p:spPr>
+          <a:xfrm>
+            <a:off x="4959157" y="4363018"/>
+            <a:ext cx="6681155" cy="977577"/>
+          </a:xfrm>
+          <a:prstGeom prst="rect">
+            <a:avLst/>
+          </a:prstGeom>
+          <a:noFill/>
+          <a:ln/>
+        </p:spPr>
+        <p:txBody>
+          <a:bodyPr wrap="square" rtlCol="0" anchor="ctr"/>
+          <a:lstStyle/>
+          <a:p>
+            <a:pPr indent="0" marL="0">
+              <a:buNone/>
+            </a:pPr>
+            <a:r>
+              <a:rPr lang="en-US" sz="2200" dirty="0">
+                <a:solidFill>
+                  <a:srgbClr val="FABB2E"/>
+                </a:solidFill>
+                <a:latin typeface="Cambria Math" pitchFamily="34" charset="0"/>
+                <a:ea typeface="Cambria Math" pitchFamily="34" charset="-122"/>
+                <a:cs typeface="Cambria Math" pitchFamily="34" charset="-120"/>
+              </a:rPr>
+              <a:t>m = 2700 × 0.2 × 0.1 × 0.05</a:t>
+            </a:r>
+            <a:endParaRPr lang="en-US" sz="2200" dirty="0"/>
+          </a:p>
+        </p:txBody>
+      </p:sp>
+      <p:sp>
+        <p:nvSpPr>
+          <p:cNvPr id="40" name="Shape 38"/>
+          <p:cNvSpPr/>
+          <p:nvPr/>
+        </p:nvSpPr>
+        <p:spPr>
+          <a:xfrm>
+            <a:off x="411480" y="5619237"/>
+            <a:ext cx="566928" cy="566928"/>
+          </a:xfrm>
+          <a:prstGeom prst="roundRect">
+            <a:avLst>
+              <a:gd name="adj" fmla="val 11290"/>
+            </a:avLst>
+          </a:prstGeom>
+          <a:solidFill>
+            <a:srgbClr val="FABB2E"/>
+          </a:solidFill>
+          <a:ln/>
+        </p:spPr>
+      </p:sp>
+      <p:sp>
+        <p:nvSpPr>
+          <p:cNvPr id="41" name="Text 39"/>
+          <p:cNvSpPr/>
+          <p:nvPr/>
+        </p:nvSpPr>
+        <p:spPr>
+          <a:xfrm>
+            <a:off x="411480" y="5619237"/>
+            <a:ext cx="566928" cy="566928"/>
+          </a:xfrm>
+          <a:prstGeom prst="rect">
+            <a:avLst/>
+          </a:prstGeom>
+          <a:noFill/>
+          <a:ln/>
+        </p:spPr>
+        <p:txBody>
+          <a:bodyPr wrap="square" rtlCol="0" anchor="ctr"/>
+          <a:lstStyle/>
+          <a:p>
+            <a:pPr algn="ctr" indent="0" marL="0">
+              <a:buNone/>
+            </a:pPr>
+            <a:r>
+              <a:rPr lang="en-US" sz="2600" b="1" dirty="0">
+                <a:solidFill>
+                  <a:srgbClr val="0D1B5E"/>
+                </a:solidFill>
+                <a:latin typeface="Trebuchet MS" pitchFamily="34" charset="0"/>
+                <a:ea typeface="Trebuchet MS" pitchFamily="34" charset="-122"/>
+                <a:cs typeface="Trebuchet MS" pitchFamily="34" charset="-120"/>
+              </a:rPr>
+              <a:t>S</a:t>
+            </a:r>
+            <a:endParaRPr lang="en-US" sz="2600" dirty="0"/>
+          </a:p>
+        </p:txBody>
+      </p:sp>
+      <p:sp>
+        <p:nvSpPr>
+          <p:cNvPr id="42" name="Text 40"/>
+          <p:cNvSpPr/>
+          <p:nvPr/>
+        </p:nvSpPr>
+        <p:spPr>
+          <a:xfrm>
+            <a:off x="1115568" y="5340595"/>
+            <a:ext cx="3614989" cy="1124213"/>
+          </a:xfrm>
+          <a:prstGeom prst="rect">
+            <a:avLst/>
+          </a:prstGeom>
+          <a:noFill/>
+          <a:ln/>
+        </p:spPr>
+        <p:txBody>
+          <a:bodyPr wrap="square" rtlCol="0" anchor="ctr"/>
+          <a:lstStyle/>
+          <a:p>
+            <a:pPr indent="0" marL="0">
+              <a:buNone/>
+            </a:pPr>
+            <a:r>
+              <a:rPr lang="en-US" sz="1500" b="1" dirty="0">
+                <a:solidFill>
+                  <a:srgbClr val="0D1B5E"/>
+                </a:solidFill>
+                <a:latin typeface="Trebuchet MS" pitchFamily="34" charset="0"/>
+                <a:ea typeface="Trebuchet MS" pitchFamily="34" charset="-122"/>
+                <a:cs typeface="Trebuchet MS" pitchFamily="34" charset="-120"/>
+              </a:rPr>
+              <a:t>Solve (add units)</a:t>
+            </a:r>
+            <a:endParaRPr lang="en-US" sz="1500" dirty="0"/>
+          </a:p>
+        </p:txBody>
+      </p:sp>
+      <p:sp>
+        <p:nvSpPr>
+          <p:cNvPr id="43" name="Shape 41"/>
+          <p:cNvSpPr/>
+          <p:nvPr/>
+        </p:nvSpPr>
+        <p:spPr>
+          <a:xfrm>
+            <a:off x="4821997" y="5340595"/>
+            <a:ext cx="6955475" cy="0"/>
+          </a:xfrm>
+          <a:prstGeom prst="line">
+            <a:avLst/>
+          </a:prstGeom>
+          <a:noFill/>
+          <a:ln w="12700">
+            <a:solidFill>
+              <a:srgbClr val="FABB2E"/>
+            </a:solidFill>
+            <a:prstDash val="solid"/>
+          </a:ln>
+        </p:spPr>
+      </p:sp>
+      <p:sp>
+        <p:nvSpPr>
+          <p:cNvPr id="44" name="Text 42"/>
+          <p:cNvSpPr/>
+          <p:nvPr/>
+        </p:nvSpPr>
+        <p:spPr>
+          <a:xfrm>
+            <a:off x="4959157" y="5340595"/>
+            <a:ext cx="6681155" cy="1124213"/>
+          </a:xfrm>
+          <a:prstGeom prst="rect">
+            <a:avLst/>
+          </a:prstGeom>
+          <a:noFill/>
+          <a:ln/>
+        </p:spPr>
+        <p:txBody>
+          <a:bodyPr wrap="square" rtlCol="0" anchor="ctr"/>
+          <a:lstStyle/>
+          <a:p>
+            <a:pPr indent="0" marL="0">
+              <a:buNone/>
+            </a:pPr>
+            <a:r>
+              <a:rPr lang="en-US" sz="2400" b="1" dirty="0">
+                <a:solidFill>
+                  <a:srgbClr val="FABB2E"/>
+                </a:solidFill>
+                <a:latin typeface="Cambria Math" pitchFamily="34" charset="0"/>
+                <a:ea typeface="Cambria Math" pitchFamily="34" charset="-122"/>
+                <a:cs typeface="Cambria Math" pitchFamily="34" charset="-120"/>
+              </a:rPr>
+              <a:t>m = 2.7 kg</a:t>
+            </a:r>
+            <a:endParaRPr lang="en-US" sz="2400" dirty="0"/>
+          </a:p>
+        </p:txBody>
+      </p:sp>
+      <p:sp>
+        <p:nvSpPr>
+          <p:cNvPr id="45" name="Text 43"/>
           <p:cNvSpPr/>
           <p:nvPr/>
         </p:nvSpPr>
@@ -19599,7 +21232,7 @@
                 <a:ea typeface="Trebuchet MS" pitchFamily="34" charset="-122"/>
                 <a:cs typeface="Trebuchet MS" pitchFamily="34" charset="-120"/>
               </a:rPr>
-              <a:t>BUILD · READ THE GRAPH: ANSWERS</a:t>
+              <a:t>BUILD · SPOT THE MISTAKE</a:t>
             </a:r>
             <a:endParaRPr lang="en-US" sz="1300" dirty="0"/>
           </a:p>
@@ -19613,211 +21246,14 @@
         </p:nvSpPr>
         <p:spPr>
           <a:xfrm>
-            <a:off x="0" y="1014984"/>
-            <a:ext cx="12188952" cy="347472"/>
-          </a:xfrm>
-          <a:prstGeom prst="rect">
-            <a:avLst/>
-          </a:prstGeom>
-          <a:solidFill>
-            <a:srgbClr val="6A0DAD"/>
-          </a:solidFill>
-          <a:ln/>
-        </p:spPr>
-        <p:txBody>
-          <a:bodyPr wrap="square" lIns="101600" tIns="101600" rIns="101600" bIns="101600" rtlCol="0" anchor="ctr"/>
-          <a:lstStyle/>
-          <a:p>
-            <a:pPr algn="l" indent="0" marL="0">
-              <a:buNone/>
-            </a:pPr>
-            <a:r>
-              <a:rPr lang="en-US" sz="1300" b="1" dirty="0">
-                <a:solidFill>
-                  <a:srgbClr val="FFFFFF"/>
-                </a:solidFill>
-                <a:latin typeface="Trebuchet MS" pitchFamily="34" charset="0"/>
-                <a:ea typeface="Trebuchet MS" pitchFamily="34" charset="-122"/>
-                <a:cs typeface="Trebuchet MS" pitchFamily="34" charset="-120"/>
-              </a:rPr>
-              <a:t>☞  Purple pen time · mark and correct your answers</a:t>
-            </a:r>
-            <a:endParaRPr lang="en-US" sz="1300" dirty="0"/>
-          </a:p>
-        </p:txBody>
-      </p:sp>
-      <p:sp>
-        <p:nvSpPr>
-          <p:cNvPr id="11" name="Shape 9"/>
-          <p:cNvSpPr/>
-          <p:nvPr/>
-        </p:nvSpPr>
-        <p:spPr>
-          <a:xfrm>
-            <a:off x="411480" y="1453896"/>
-            <a:ext cx="6251296" cy="5010912"/>
+            <a:off x="411480" y="1088136"/>
+            <a:ext cx="6819595" cy="5376672"/>
           </a:xfrm>
           <a:prstGeom prst="rect">
             <a:avLst/>
           </a:prstGeom>
           <a:solidFill>
             <a:srgbClr val="FFFFFF"/>
-          </a:solidFill>
-          <a:ln w="25400">
-            <a:solidFill>
-              <a:srgbClr val="FABB2E"/>
-            </a:solidFill>
-            <a:prstDash val="solid"/>
-          </a:ln>
-        </p:spPr>
-      </p:sp>
-      <p:sp>
-        <p:nvSpPr>
-          <p:cNvPr id="12" name="Text 10"/>
-          <p:cNvSpPr/>
-          <p:nvPr/>
-        </p:nvSpPr>
-        <p:spPr>
-          <a:xfrm>
-            <a:off x="502920" y="1499616"/>
-            <a:ext cx="6068416" cy="274320"/>
-          </a:xfrm>
-          <a:prstGeom prst="rect">
-            <a:avLst/>
-          </a:prstGeom>
-          <a:noFill/>
-          <a:ln/>
-        </p:spPr>
-        <p:txBody>
-          <a:bodyPr wrap="square" rtlCol="0" anchor="ctr"/>
-          <a:lstStyle/>
-          <a:p>
-            <a:pPr indent="0" marL="0">
-              <a:buNone/>
-            </a:pPr>
-            <a:r>
-              <a:rPr lang="en-US" sz="1200" b="1" dirty="0">
-                <a:solidFill>
-                  <a:srgbClr val="0D1B5E"/>
-                </a:solidFill>
-                <a:latin typeface="Trebuchet MS" pitchFamily="34" charset="0"/>
-                <a:ea typeface="Trebuchet MS" pitchFamily="34" charset="-122"/>
-                <a:cs typeface="Trebuchet MS" pitchFamily="34" charset="-120"/>
-              </a:rPr>
-              <a:t>Volume of gas against time</a:t>
-            </a:r>
-            <a:endParaRPr lang="en-US" sz="1200" dirty="0"/>
-          </a:p>
-        </p:txBody>
-      </p:sp>
-      <p:sp>
-        <p:nvSpPr>
-          <p:cNvPr id="13" name="Shape 11"/>
-          <p:cNvSpPr/>
-          <p:nvPr/>
-        </p:nvSpPr>
-        <p:spPr>
-          <a:xfrm>
-            <a:off x="1005840" y="1911096"/>
-            <a:ext cx="0" cy="4050792"/>
-          </a:xfrm>
-          <a:prstGeom prst="line">
-            <a:avLst/>
-          </a:prstGeom>
-          <a:noFill/>
-          <a:ln w="19050">
-            <a:solidFill>
-              <a:srgbClr val="0D1B5E"/>
-            </a:solidFill>
-            <a:prstDash val="solid"/>
-          </a:ln>
-        </p:spPr>
-      </p:sp>
-      <p:sp>
-        <p:nvSpPr>
-          <p:cNvPr id="14" name="Shape 12"/>
-          <p:cNvSpPr/>
-          <p:nvPr/>
-        </p:nvSpPr>
-        <p:spPr>
-          <a:xfrm>
-            <a:off x="1005840" y="5961888"/>
-            <a:ext cx="5336896" cy="0"/>
-          </a:xfrm>
-          <a:prstGeom prst="line">
-            <a:avLst/>
-          </a:prstGeom>
-          <a:noFill/>
-          <a:ln w="19050">
-            <a:solidFill>
-              <a:srgbClr val="0D1B5E"/>
-            </a:solidFill>
-            <a:prstDash val="solid"/>
-          </a:ln>
-        </p:spPr>
-      </p:sp>
-      <p:sp>
-        <p:nvSpPr>
-          <p:cNvPr id="15" name="Text 13"/>
-          <p:cNvSpPr/>
-          <p:nvPr/>
-        </p:nvSpPr>
-        <p:spPr>
-          <a:xfrm>
-            <a:off x="1051560" y="1956816"/>
-            <a:ext cx="5245456" cy="3959352"/>
-          </a:xfrm>
-          <a:prstGeom prst="rect">
-            <a:avLst/>
-          </a:prstGeom>
-          <a:solidFill>
-            <a:srgbClr val="D0D0D0"/>
-          </a:solidFill>
-          <a:ln w="12700">
-            <a:solidFill>
-              <a:srgbClr val="999999"/>
-            </a:solidFill>
-            <a:prstDash val="dash"/>
-          </a:ln>
-        </p:spPr>
-        <p:txBody>
-          <a:bodyPr wrap="square" rtlCol="0" anchor="ctr"/>
-          <a:lstStyle/>
-          <a:p>
-            <a:pPr algn="ctr" indent="0" marL="0">
-              <a:buNone/>
-            </a:pPr>
-            <a:r>
-              <a:rPr lang="en-US" sz="1100" i="1" dirty="0">
-                <a:solidFill>
-                  <a:srgbClr val="666666"/>
-                </a:solidFill>
-                <a:latin typeface="Trebuchet MS" pitchFamily="34" charset="0"/>
-                <a:ea typeface="Trebuchet MS" pitchFamily="34" charset="-122"/>
-                <a:cs typeface="Trebuchet MS" pitchFamily="34" charset="-120"/>
-              </a:rPr>
-              <a:t>[Paste image — suggested search: gas volume against time curve that rises steeply then levels off]</a:t>
-            </a:r>
-            <a:endParaRPr lang="en-US" sz="1100" dirty="0"/>
-          </a:p>
-        </p:txBody>
-      </p:sp>
-      <p:sp>
-        <p:nvSpPr>
-          <p:cNvPr id="16" name="Text 14"/>
-          <p:cNvSpPr/>
-          <p:nvPr/>
-        </p:nvSpPr>
-        <p:spPr>
-          <a:xfrm>
-            <a:off x="6799936" y="1453896"/>
-            <a:ext cx="4977536" cy="629107"/>
-          </a:xfrm>
-          <a:prstGeom prst="rect">
-            <a:avLst/>
-          </a:prstGeom>
-          <a:solidFill>
-            <a:srgbClr val="0D1B5E"/>
           </a:solidFill>
           <a:ln w="25400">
             <a:solidFill>
@@ -19826,59 +21262,108 @@
           </a:ln>
         </p:spPr>
         <p:txBody>
-          <a:bodyPr wrap="square" lIns="76200" tIns="76200" rIns="76200" bIns="76200" rtlCol="0" anchor="ctr">
+          <a:bodyPr wrap="square" lIns="76200" tIns="76200" rIns="76200" bIns="76200" rtlCol="0" anchor="t">
             <a:normAutofit/>
           </a:bodyPr>
           <a:lstStyle/>
           <a:p>
             <a:pPr algn="l" indent="0" marL="0">
-              <a:buNone/>
-            </a:pPr>
-            <a:r>
-              <a:rPr lang="en-US" sz="1500" b="1" dirty="0">
-                <a:solidFill>
-                  <a:srgbClr val="FABB2E"/>
-                </a:solidFill>
-                <a:latin typeface="Trebuchet MS" pitchFamily="34" charset="0"/>
-                <a:ea typeface="Trebuchet MS" pitchFamily="34" charset="-122"/>
-                <a:cs typeface="Trebuchet MS" pitchFamily="34" charset="-120"/>
-              </a:rPr>
-              <a:t>Q1  </a:t>
-            </a:r>
+              <a:spcAft>
+                <a:spcPts val="1000"/>
+              </a:spcAft>
+              <a:buNone/>
+            </a:pPr>
+            <a:r>
+              <a:rPr lang="en-US" sz="1600" dirty="0">
+                <a:solidFill>
+                  <a:srgbClr val="1A1A2E"/>
+                </a:solidFill>
+                <a:latin typeface="Trebuchet MS" pitchFamily="34" charset="0"/>
+                <a:ea typeface="Trebuchet MS" pitchFamily="34" charset="-122"/>
+                <a:cs typeface="Trebuchet MS" pitchFamily="34" charset="-120"/>
+              </a:rPr>
+              <a:t>1   rate = time \div volume</a:t>
+            </a:r>
+            <a:endParaRPr lang="en-US" sz="1300" dirty="0"/>
+          </a:p>
+          <a:p>
             <a:pPr algn="l" indent="0" marL="0">
-              <a:buNone/>
-            </a:pPr>
-            <a:r>
-              <a:rPr lang="en-US" sz="1500" dirty="0">
-                <a:solidFill>
-                  <a:srgbClr val="FFFFFF"/>
-                </a:solidFill>
-                <a:latin typeface="Trebuchet MS" pitchFamily="34" charset="0"/>
-                <a:ea typeface="Trebuchet MS" pitchFamily="34" charset="-122"/>
-                <a:cs typeface="Trebuchet MS" pitchFamily="34" charset="-120"/>
-              </a:rPr>
-              <a:t>Where is the reaction fastest?  [1 mark]</a:t>
+              <a:spcAft>
+                <a:spcPts val="1000"/>
+              </a:spcAft>
+              <a:buNone/>
+            </a:pPr>
+            <a:r>
+              <a:rPr lang="en-US" sz="1600" dirty="0">
+                <a:solidFill>
+                  <a:srgbClr val="1A1A2E"/>
+                </a:solidFill>
+                <a:latin typeface="Trebuchet MS" pitchFamily="34" charset="0"/>
+                <a:ea typeface="Trebuchet MS" pitchFamily="34" charset="-122"/>
+                <a:cs typeface="Trebuchet MS" pitchFamily="34" charset="-120"/>
+              </a:rPr>
+              <a:t>2   rate = 40 \div 60</a:t>
             </a:r>
             <a:endParaRPr lang="en-US" sz="1300" dirty="0"/>
           </a:p>
-        </p:txBody>
-      </p:sp>
-      <p:sp>
-        <p:nvSpPr>
-          <p:cNvPr id="17" name="Text 15"/>
-          <p:cNvSpPr/>
-          <p:nvPr/>
-        </p:nvSpPr>
-        <p:spPr>
-          <a:xfrm>
-            <a:off x="6799936" y="2119579"/>
-            <a:ext cx="4977536" cy="943661"/>
-          </a:xfrm>
-          <a:prstGeom prst="rect">
-            <a:avLst/>
-          </a:prstGeom>
-          <a:solidFill>
-            <a:srgbClr val="0D1B5E"/>
+          <a:p>
+            <a:pPr algn="l" indent="0" marL="0">
+              <a:spcAft>
+                <a:spcPts val="1000"/>
+              </a:spcAft>
+              <a:buNone/>
+            </a:pPr>
+            <a:r>
+              <a:rPr lang="en-US" sz="1600" dirty="0">
+                <a:solidFill>
+                  <a:srgbClr val="1A1A2E"/>
+                </a:solidFill>
+                <a:latin typeface="Trebuchet MS" pitchFamily="34" charset="0"/>
+                <a:ea typeface="Trebuchet MS" pitchFamily="34" charset="-122"/>
+                <a:cs typeface="Trebuchet MS" pitchFamily="34" charset="-120"/>
+              </a:rPr>
+              <a:t>3   rate = 0.67</a:t>
+            </a:r>
+            <a:endParaRPr lang="en-US" sz="1300" dirty="0"/>
+          </a:p>
+          <a:p>
+            <a:pPr algn="l" indent="0" marL="0">
+              <a:spcAft>
+                <a:spcPts val="1000"/>
+              </a:spcAft>
+              <a:buNone/>
+            </a:pPr>
+            <a:r>
+              <a:rPr lang="en-US" sz="1600" dirty="0">
+                <a:solidFill>
+                  <a:srgbClr val="1A1A2E"/>
+                </a:solidFill>
+                <a:latin typeface="Trebuchet MS" pitchFamily="34" charset="0"/>
+                <a:ea typeface="Trebuchet MS" pitchFamily="34" charset="-122"/>
+                <a:cs typeface="Trebuchet MS" pitchFamily="34" charset="-120"/>
+              </a:rPr>
+              <a:t>4   rate = 0.67 cm^3/s</a:t>
+            </a:r>
+            <a:endParaRPr lang="en-US" sz="1300" dirty="0"/>
+          </a:p>
+        </p:txBody>
+      </p:sp>
+      <p:sp>
+        <p:nvSpPr>
+          <p:cNvPr id="11" name="Text 9"/>
+          <p:cNvSpPr/>
+          <p:nvPr/>
+        </p:nvSpPr>
+        <p:spPr>
+          <a:xfrm>
+            <a:off x="7368235" y="1088136"/>
+            <a:ext cx="4409237" cy="868680"/>
+          </a:xfrm>
+          <a:prstGeom prst="rect">
+            <a:avLst/>
+          </a:prstGeom>
+          <a:solidFill>
+            <a:srgbClr val="FFFDE7"/>
           </a:solidFill>
           <a:ln w="25400">
             <a:solidFill>
@@ -19887,45 +21372,99 @@
           </a:ln>
         </p:spPr>
         <p:txBody>
-          <a:bodyPr wrap="square" lIns="76200" tIns="76200" rIns="76200" bIns="76200" rtlCol="0" anchor="ctr">
+          <a:bodyPr wrap="square" lIns="76200" tIns="76200" rIns="76200" bIns="76200" rtlCol="0" anchor="t">
             <a:normAutofit/>
           </a:bodyPr>
           <a:lstStyle/>
           <a:p>
             <a:pPr algn="l" indent="0" marL="0">
-              <a:buNone/>
-            </a:pPr>
-            <a:r>
-              <a:rPr lang="en-US" sz="1500" dirty="0">
-                <a:solidFill>
-                  <a:srgbClr val="FABB2E"/>
-                </a:solidFill>
-                <a:latin typeface="Trebuchet MS" pitchFamily="34" charset="0"/>
-                <a:ea typeface="Trebuchet MS" pitchFamily="34" charset="-122"/>
-                <a:cs typeface="Trebuchet MS" pitchFamily="34" charset="-120"/>
-              </a:rPr>
-              <a:t>At the start, where the curve is steepest</a:t>
-            </a:r>
-            <a:endParaRPr lang="en-US" sz="1500" dirty="0"/>
-          </a:p>
-        </p:txBody>
-      </p:sp>
-      <p:sp>
-        <p:nvSpPr>
-          <p:cNvPr id="18" name="Text 16"/>
-          <p:cNvSpPr/>
-          <p:nvPr/>
-        </p:nvSpPr>
-        <p:spPr>
-          <a:xfrm>
-            <a:off x="6799936" y="3154680"/>
-            <a:ext cx="4977536" cy="629107"/>
-          </a:xfrm>
-          <a:prstGeom prst="rect">
-            <a:avLst/>
-          </a:prstGeom>
-          <a:solidFill>
-            <a:srgbClr val="0D1B5E"/>
+              <a:spcAft>
+                <a:spcPts val="400"/>
+              </a:spcAft>
+              <a:buNone/>
+            </a:pPr>
+            <a:r>
+              <a:rPr lang="en-US" sz="1300" b="1" dirty="0">
+                <a:solidFill>
+                  <a:srgbClr val="E65100"/>
+                </a:solidFill>
+                <a:latin typeface="Trebuchet MS" pitchFamily="34" charset="0"/>
+                <a:ea typeface="Trebuchet MS" pitchFamily="34" charset="-122"/>
+                <a:cs typeface="Trebuchet MS" pitchFamily="34" charset="-120"/>
+              </a:rPr>
+              <a:t>Your task:</a:t>
+            </a:r>
+            <a:endParaRPr lang="en-US" sz="1300" dirty="0"/>
+          </a:p>
+          <a:p>
+            <a:pPr algn="l" indent="0" marL="0">
+              <a:buNone/>
+            </a:pPr>
+            <a:r>
+              <a:rPr lang="en-US" sz="1200" dirty="0">
+                <a:solidFill>
+                  <a:srgbClr val="1A1A2E"/>
+                </a:solidFill>
+                <a:latin typeface="Trebuchet MS" pitchFamily="34" charset="0"/>
+                <a:ea typeface="Trebuchet MS" pitchFamily="34" charset="-122"/>
+                <a:cs typeface="Trebuchet MS" pitchFamily="34" charset="-120"/>
+              </a:rPr>
+              <a:t>1  Which line is wrong?</a:t>
+            </a:r>
+            <a:endParaRPr lang="en-US" sz="1300" dirty="0"/>
+          </a:p>
+          <a:p>
+            <a:pPr algn="l" indent="0" marL="0">
+              <a:buNone/>
+            </a:pPr>
+            <a:r>
+              <a:rPr lang="en-US" sz="1200" dirty="0">
+                <a:solidFill>
+                  <a:srgbClr val="1A1A2E"/>
+                </a:solidFill>
+                <a:latin typeface="Trebuchet MS" pitchFamily="34" charset="0"/>
+                <a:ea typeface="Trebuchet MS" pitchFamily="34" charset="-122"/>
+                <a:cs typeface="Trebuchet MS" pitchFamily="34" charset="-120"/>
+              </a:rPr>
+              <a:t>2  Why is it wrong?</a:t>
+            </a:r>
+            <a:endParaRPr lang="en-US" sz="1300" dirty="0"/>
+          </a:p>
+          <a:p>
+            <a:pPr algn="l" indent="0" marL="0">
+              <a:buNone/>
+            </a:pPr>
+            <a:r>
+              <a:rPr lang="en-US" sz="1200" dirty="0">
+                <a:solidFill>
+                  <a:srgbClr val="1A1A2E"/>
+                </a:solidFill>
+                <a:latin typeface="Trebuchet MS" pitchFamily="34" charset="0"/>
+                <a:ea typeface="Trebuchet MS" pitchFamily="34" charset="-122"/>
+                <a:cs typeface="Trebuchet MS" pitchFamily="34" charset="-120"/>
+              </a:rPr>
+              <a:t>3  Write the corrected line.</a:t>
+            </a:r>
+            <a:endParaRPr lang="en-US" sz="1300" dirty="0"/>
+          </a:p>
+        </p:txBody>
+      </p:sp>
+      <p:sp>
+        <p:nvSpPr>
+          <p:cNvPr id="12" name="Text 10"/>
+          <p:cNvSpPr/>
+          <p:nvPr/>
+        </p:nvSpPr>
+        <p:spPr>
+          <a:xfrm>
+            <a:off x="7368235" y="2048256"/>
+            <a:ext cx="4409237" cy="4416552"/>
+          </a:xfrm>
+          <a:prstGeom prst="rect">
+            <a:avLst/>
+          </a:prstGeom>
+          <a:solidFill>
+            <a:srgbClr val="FFFFFF"/>
           </a:solidFill>
           <a:ln w="25400">
             <a:solidFill>
@@ -19934,7 +21473,7 @@
           </a:ln>
         </p:spPr>
         <p:txBody>
-          <a:bodyPr wrap="square" lIns="76200" tIns="76200" rIns="76200" bIns="76200" rtlCol="0" anchor="ctr">
+          <a:bodyPr wrap="square" lIns="76200" tIns="76200" rIns="76200" bIns="76200" rtlCol="0" anchor="t">
             <a:normAutofit/>
           </a:bodyPr>
           <a:lstStyle/>
@@ -19943,29 +21482,15 @@
               <a:buNone/>
             </a:pPr>
             <a:r>
-              <a:rPr lang="en-US" sz="1500" b="1" dirty="0">
-                <a:solidFill>
-                  <a:srgbClr val="FABB2E"/>
-                </a:solidFill>
-                <a:latin typeface="Trebuchet MS" pitchFamily="34" charset="0"/>
-                <a:ea typeface="Trebuchet MS" pitchFamily="34" charset="-122"/>
-                <a:cs typeface="Trebuchet MS" pitchFamily="34" charset="-120"/>
-              </a:rPr>
-              <a:t>Q2  </a:t>
-            </a:r>
-            <a:pPr algn="l" indent="0" marL="0">
-              <a:buNone/>
-            </a:pPr>
-            <a:r>
-              <a:rPr lang="en-US" sz="1500" dirty="0">
-                <a:solidFill>
-                  <a:srgbClr val="FFFFFF"/>
-                </a:solidFill>
-                <a:latin typeface="Trebuchet MS" pitchFamily="34" charset="0"/>
-                <a:ea typeface="Trebuchet MS" pitchFamily="34" charset="-122"/>
-                <a:cs typeface="Trebuchet MS" pitchFamily="34" charset="-120"/>
-              </a:rPr>
-              <a:t>What does the flat section show?  [2 marks]</a:t>
+              <a:rPr lang="en-US" sz="1100" i="1" dirty="0">
+                <a:solidFill>
+                  <a:srgbClr val="999999"/>
+                </a:solidFill>
+                <a:latin typeface="Trebuchet MS" pitchFamily="34" charset="0"/>
+                <a:ea typeface="Trebuchet MS" pitchFamily="34" charset="-122"/>
+                <a:cs typeface="Trebuchet MS" pitchFamily="34" charset="-120"/>
+              </a:rPr>
+              <a:t>Write your answer here</a:t>
             </a:r>
             <a:endParaRPr lang="en-US" sz="1300" dirty="0"/>
           </a:p>
@@ -19973,162 +21498,7 @@
       </p:sp>
       <p:sp>
         <p:nvSpPr>
-          <p:cNvPr id="19" name="Text 17"/>
-          <p:cNvSpPr/>
-          <p:nvPr/>
-        </p:nvSpPr>
-        <p:spPr>
-          <a:xfrm>
-            <a:off x="6799936" y="3820363"/>
-            <a:ext cx="4977536" cy="943661"/>
-          </a:xfrm>
-          <a:prstGeom prst="rect">
-            <a:avLst/>
-          </a:prstGeom>
-          <a:solidFill>
-            <a:srgbClr val="0D1B5E"/>
-          </a:solidFill>
-          <a:ln w="25400">
-            <a:solidFill>
-              <a:srgbClr val="FABB2E"/>
-            </a:solidFill>
-          </a:ln>
-        </p:spPr>
-        <p:txBody>
-          <a:bodyPr wrap="square" lIns="76200" tIns="76200" rIns="76200" bIns="76200" rtlCol="0" anchor="ctr">
-            <a:normAutofit/>
-          </a:bodyPr>
-          <a:lstStyle/>
-          <a:p>
-            <a:pPr algn="l" indent="0" marL="0">
-              <a:buNone/>
-            </a:pPr>
-            <a:r>
-              <a:rPr lang="en-US" sz="1500" dirty="0">
-                <a:solidFill>
-                  <a:srgbClr val="FABB2E"/>
-                </a:solidFill>
-                <a:latin typeface="Trebuchet MS" pitchFamily="34" charset="0"/>
-                <a:ea typeface="Trebuchet MS" pitchFamily="34" charset="-122"/>
-                <a:cs typeface="Trebuchet MS" pitchFamily="34" charset="-120"/>
-              </a:rPr>
-              <a:t>The reaction has stopped, a reactant is used up</a:t>
-            </a:r>
-            <a:endParaRPr lang="en-US" sz="1500" dirty="0"/>
-          </a:p>
-        </p:txBody>
-      </p:sp>
-      <p:sp>
-        <p:nvSpPr>
-          <p:cNvPr id="20" name="Text 18"/>
-          <p:cNvSpPr/>
-          <p:nvPr/>
-        </p:nvSpPr>
-        <p:spPr>
-          <a:xfrm>
-            <a:off x="6799936" y="4855464"/>
-            <a:ext cx="4977536" cy="629107"/>
-          </a:xfrm>
-          <a:prstGeom prst="rect">
-            <a:avLst/>
-          </a:prstGeom>
-          <a:solidFill>
-            <a:srgbClr val="0D1B5E"/>
-          </a:solidFill>
-          <a:ln w="25400">
-            <a:solidFill>
-              <a:srgbClr val="FABB2E"/>
-            </a:solidFill>
-          </a:ln>
-        </p:spPr>
-        <p:txBody>
-          <a:bodyPr wrap="square" lIns="76200" tIns="76200" rIns="76200" bIns="76200" rtlCol="0" anchor="ctr">
-            <a:normAutofit/>
-          </a:bodyPr>
-          <a:lstStyle/>
-          <a:p>
-            <a:pPr algn="l" indent="0" marL="0">
-              <a:buNone/>
-            </a:pPr>
-            <a:r>
-              <a:rPr lang="en-US" sz="1500" b="1" dirty="0">
-                <a:solidFill>
-                  <a:srgbClr val="FABB2E"/>
-                </a:solidFill>
-                <a:latin typeface="Trebuchet MS" pitchFamily="34" charset="0"/>
-                <a:ea typeface="Trebuchet MS" pitchFamily="34" charset="-122"/>
-                <a:cs typeface="Trebuchet MS" pitchFamily="34" charset="-120"/>
-              </a:rPr>
-              <a:t>Q3  </a:t>
-            </a:r>
-            <a:pPr algn="l" indent="0" marL="0">
-              <a:buNone/>
-            </a:pPr>
-            <a:r>
-              <a:rPr lang="en-US" sz="1500" dirty="0">
-                <a:solidFill>
-                  <a:srgbClr val="FFFFFF"/>
-                </a:solidFill>
-                <a:latin typeface="Trebuchet MS" pitchFamily="34" charset="0"/>
-                <a:ea typeface="Trebuchet MS" pitchFamily="34" charset="-122"/>
-                <a:cs typeface="Trebuchet MS" pitchFamily="34" charset="-120"/>
-              </a:rPr>
-              <a:t>How would a powder change the curve?  [2 marks]</a:t>
-            </a:r>
-            <a:endParaRPr lang="en-US" sz="1300" dirty="0"/>
-          </a:p>
-        </p:txBody>
-      </p:sp>
-      <p:sp>
-        <p:nvSpPr>
-          <p:cNvPr id="21" name="Text 19"/>
-          <p:cNvSpPr/>
-          <p:nvPr/>
-        </p:nvSpPr>
-        <p:spPr>
-          <a:xfrm>
-            <a:off x="6799936" y="5521147"/>
-            <a:ext cx="4977536" cy="943661"/>
-          </a:xfrm>
-          <a:prstGeom prst="rect">
-            <a:avLst/>
-          </a:prstGeom>
-          <a:solidFill>
-            <a:srgbClr val="0D1B5E"/>
-          </a:solidFill>
-          <a:ln w="25400">
-            <a:solidFill>
-              <a:srgbClr val="FABB2E"/>
-            </a:solidFill>
-          </a:ln>
-        </p:spPr>
-        <p:txBody>
-          <a:bodyPr wrap="square" lIns="76200" tIns="76200" rIns="76200" bIns="76200" rtlCol="0" anchor="ctr">
-            <a:normAutofit/>
-          </a:bodyPr>
-          <a:lstStyle/>
-          <a:p>
-            <a:pPr algn="l" indent="0" marL="0">
-              <a:buNone/>
-            </a:pPr>
-            <a:r>
-              <a:rPr lang="en-US" sz="1500" dirty="0">
-                <a:solidFill>
-                  <a:srgbClr val="FABB2E"/>
-                </a:solidFill>
-                <a:latin typeface="Trebuchet MS" pitchFamily="34" charset="0"/>
-                <a:ea typeface="Trebuchet MS" pitchFamily="34" charset="-122"/>
-                <a:cs typeface="Trebuchet MS" pitchFamily="34" charset="-120"/>
-              </a:rPr>
-              <a:t>Steeper at the start, levelling at the same final volume</a:t>
-            </a:r>
-            <a:endParaRPr lang="en-US" sz="1500" dirty="0"/>
-          </a:p>
-        </p:txBody>
-      </p:sp>
-      <p:sp>
-        <p:nvSpPr>
-          <p:cNvPr id="22" name="Text 20"/>
+          <p:cNvPr id="13" name="Text 11"/>
           <p:cNvSpPr/>
           <p:nvPr/>
         </p:nvSpPr>
@@ -20514,95 +21884,262 @@
                 <a:ea typeface="Trebuchet MS" pitchFamily="34" charset="-122"/>
                 <a:cs typeface="Trebuchet MS" pitchFamily="34" charset="-120"/>
               </a:rPr>
-              <a:t>BUILD · RESULTS GRAPH</a:t>
+              <a:t>BUILD · SPOT THE MISTAKE: ANSWER</a:t>
             </a:r>
             <a:endParaRPr lang="en-US" sz="1300" dirty="0"/>
           </a:p>
         </p:txBody>
       </p:sp>
-      <p:pic>
-        <p:nvPicPr>
-          <p:cNvPr id="10" name="Image 0" descr="C:\Users\magda\AppData\Local\Temp\gg_out_1788477024233.png">    </p:cNvPr>
-          <p:cNvPicPr>
-            <a:picLocks noChangeAspect="1"/>
-          </p:cNvPicPr>
-          <p:nvPr/>
-        </p:nvPicPr>
-        <p:blipFill>
-          <a:blip r:embed="rId1"/>
-          <a:stretch>
-            <a:fillRect/>
-          </a:stretch>
-        </p:blipFill>
-        <p:spPr>
-          <a:xfrm>
-            <a:off x="411480" y="1088136"/>
-            <a:ext cx="7956194" cy="5376672"/>
-          </a:xfrm>
-          <a:prstGeom prst="rect">
-            <a:avLst/>
-          </a:prstGeom>
-        </p:spPr>
-      </p:pic>
-      <p:sp>
-        <p:nvSpPr>
-          <p:cNvPr id="11" name="Shape 8"/>
-          <p:cNvSpPr/>
-          <p:nvPr/>
-        </p:nvSpPr>
-        <p:spPr>
-          <a:xfrm>
-            <a:off x="8459114" y="1088136"/>
-            <a:ext cx="3318358" cy="5376672"/>
-          </a:xfrm>
-          <a:prstGeom prst="rect">
-            <a:avLst/>
-          </a:prstGeom>
-          <a:solidFill>
-            <a:srgbClr val="152347"/>
+      <p:sp>
+        <p:nvSpPr>
+          <p:cNvPr id="10" name="Text 8"/>
+          <p:cNvSpPr/>
+          <p:nvPr/>
+        </p:nvSpPr>
+        <p:spPr>
+          <a:xfrm>
+            <a:off x="0" y="1014984"/>
+            <a:ext cx="12188952" cy="347472"/>
+          </a:xfrm>
+          <a:prstGeom prst="rect">
+            <a:avLst/>
+          </a:prstGeom>
+          <a:solidFill>
+            <a:srgbClr val="6A0DAD"/>
+          </a:solidFill>
+          <a:ln/>
+        </p:spPr>
+        <p:txBody>
+          <a:bodyPr wrap="square" lIns="101600" tIns="101600" rIns="101600" bIns="101600" rtlCol="0" anchor="ctr"/>
+          <a:lstStyle/>
+          <a:p>
+            <a:pPr algn="l" indent="0" marL="0">
+              <a:buNone/>
+            </a:pPr>
+            <a:r>
+              <a:rPr lang="en-US" sz="1300" b="1" dirty="0">
+                <a:solidFill>
+                  <a:srgbClr val="FFFFFF"/>
+                </a:solidFill>
+                <a:latin typeface="Trebuchet MS" pitchFamily="34" charset="0"/>
+                <a:ea typeface="Trebuchet MS" pitchFamily="34" charset="-122"/>
+                <a:cs typeface="Trebuchet MS" pitchFamily="34" charset="-120"/>
+              </a:rPr>
+              <a:t>☞  Purple pen time · mark and correct your answers</a:t>
+            </a:r>
+            <a:endParaRPr lang="en-US" sz="1300" dirty="0"/>
+          </a:p>
+        </p:txBody>
+      </p:sp>
+      <p:sp>
+        <p:nvSpPr>
+          <p:cNvPr id="11" name="Text 9"/>
+          <p:cNvSpPr/>
+          <p:nvPr/>
+        </p:nvSpPr>
+        <p:spPr>
+          <a:xfrm>
+            <a:off x="411480" y="1453896"/>
+            <a:ext cx="6819595" cy="5010912"/>
+          </a:xfrm>
+          <a:prstGeom prst="rect">
+            <a:avLst/>
+          </a:prstGeom>
+          <a:solidFill>
+            <a:srgbClr val="FFFFFF"/>
           </a:solidFill>
           <a:ln w="25400">
             <a:solidFill>
               <a:srgbClr val="FABB2E"/>
             </a:solidFill>
-            <a:prstDash val="solid"/>
           </a:ln>
         </p:spPr>
-      </p:sp>
-      <p:sp>
-        <p:nvSpPr>
-          <p:cNvPr id="12" name="Text 9"/>
-          <p:cNvSpPr/>
-          <p:nvPr/>
-        </p:nvSpPr>
-        <p:spPr>
-          <a:xfrm>
-            <a:off x="8550554" y="1133856"/>
-            <a:ext cx="3135478" cy="411480"/>
-          </a:xfrm>
-          <a:prstGeom prst="rect">
-            <a:avLst/>
-          </a:prstGeom>
-          <a:noFill/>
-          <a:ln/>
-        </p:spPr>
-        <p:txBody>
-          <a:bodyPr wrap="square" rtlCol="0" anchor="ctr"/>
-          <a:lstStyle/>
-          <a:p>
-            <a:pPr algn="ctr" indent="0" marL="0">
+        <p:txBody>
+          <a:bodyPr wrap="square" lIns="76200" tIns="76200" rIns="76200" bIns="76200" rtlCol="0" anchor="t">
+            <a:normAutofit/>
+          </a:bodyPr>
+          <a:lstStyle/>
+          <a:p>
+            <a:pPr algn="l" indent="0" marL="0">
+              <a:spcAft>
+                <a:spcPts val="1000"/>
+              </a:spcAft>
+              <a:buNone/>
+            </a:pPr>
+            <a:r>
+              <a:rPr lang="en-US" sz="1600" b="1" u="sng" dirty="0">
+                <a:solidFill>
+                  <a:srgbClr val="E65100"/>
+                </a:solidFill>
+                <a:latin typeface="Trebuchet MS" pitchFamily="34" charset="0"/>
+                <a:ea typeface="Trebuchet MS" pitchFamily="34" charset="-122"/>
+                <a:cs typeface="Trebuchet MS" pitchFamily="34" charset="-120"/>
+              </a:rPr>
+              <a:t>1   rate = time \div volume</a:t>
+            </a:r>
+            <a:endParaRPr lang="en-US" sz="1300" dirty="0"/>
+          </a:p>
+          <a:p>
+            <a:pPr algn="l" indent="0" marL="0">
+              <a:spcAft>
+                <a:spcPts val="1000"/>
+              </a:spcAft>
+              <a:buNone/>
+            </a:pPr>
+            <a:r>
+              <a:rPr lang="en-US" sz="1600" dirty="0">
+                <a:solidFill>
+                  <a:srgbClr val="1A1A2E"/>
+                </a:solidFill>
+                <a:latin typeface="Trebuchet MS" pitchFamily="34" charset="0"/>
+                <a:ea typeface="Trebuchet MS" pitchFamily="34" charset="-122"/>
+                <a:cs typeface="Trebuchet MS" pitchFamily="34" charset="-120"/>
+              </a:rPr>
+              <a:t>2   rate = 40 \div 60</a:t>
+            </a:r>
+            <a:endParaRPr lang="en-US" sz="1300" dirty="0"/>
+          </a:p>
+          <a:p>
+            <a:pPr algn="l" indent="0" marL="0">
+              <a:spcAft>
+                <a:spcPts val="1000"/>
+              </a:spcAft>
+              <a:buNone/>
+            </a:pPr>
+            <a:r>
+              <a:rPr lang="en-US" sz="1600" dirty="0">
+                <a:solidFill>
+                  <a:srgbClr val="1A1A2E"/>
+                </a:solidFill>
+                <a:latin typeface="Trebuchet MS" pitchFamily="34" charset="0"/>
+                <a:ea typeface="Trebuchet MS" pitchFamily="34" charset="-122"/>
+                <a:cs typeface="Trebuchet MS" pitchFamily="34" charset="-120"/>
+              </a:rPr>
+              <a:t>3   rate = 0.67</a:t>
+            </a:r>
+            <a:endParaRPr lang="en-US" sz="1300" dirty="0"/>
+          </a:p>
+          <a:p>
+            <a:pPr algn="l" indent="0" marL="0">
+              <a:spcAft>
+                <a:spcPts val="1000"/>
+              </a:spcAft>
+              <a:buNone/>
+            </a:pPr>
+            <a:r>
+              <a:rPr lang="en-US" sz="1600" dirty="0">
+                <a:solidFill>
+                  <a:srgbClr val="1A1A2E"/>
+                </a:solidFill>
+                <a:latin typeface="Trebuchet MS" pitchFamily="34" charset="0"/>
+                <a:ea typeface="Trebuchet MS" pitchFamily="34" charset="-122"/>
+                <a:cs typeface="Trebuchet MS" pitchFamily="34" charset="-120"/>
+              </a:rPr>
+              <a:t>4   rate = 0.67 cm^3/s</a:t>
+            </a:r>
+            <a:endParaRPr lang="en-US" sz="1300" dirty="0"/>
+          </a:p>
+          <a:p>
+            <a:pPr algn="l" indent="0" marL="0">
+              <a:buNone/>
+            </a:pPr>
+            <a:r>
+              <a:rPr lang="en-US" sz="1600" b="1" dirty="0">
+                <a:solidFill>
+                  <a:srgbClr val="1B5E20"/>
+                </a:solidFill>
+                <a:latin typeface="Trebuchet MS" pitchFamily="34" charset="0"/>
+                <a:ea typeface="Trebuchet MS" pitchFamily="34" charset="-122"/>
+                <a:cs typeface="Trebuchet MS" pitchFamily="34" charset="-120"/>
+              </a:rPr>
+              <a:t>✓  rate = volume \div time = 60 \div 40 = 1.5 cm^3/s</a:t>
+            </a:r>
+            <a:endParaRPr lang="en-US" sz="1300" dirty="0"/>
+          </a:p>
+        </p:txBody>
+      </p:sp>
+      <p:sp>
+        <p:nvSpPr>
+          <p:cNvPr id="12" name="Text 10"/>
+          <p:cNvSpPr/>
+          <p:nvPr/>
+        </p:nvSpPr>
+        <p:spPr>
+          <a:xfrm>
+            <a:off x="7368235" y="1453896"/>
+            <a:ext cx="4409237" cy="5010912"/>
+          </a:xfrm>
+          <a:prstGeom prst="rect">
+            <a:avLst/>
+          </a:prstGeom>
+          <a:solidFill>
+            <a:srgbClr val="FFFFFF"/>
+          </a:solidFill>
+          <a:ln w="25400">
+            <a:solidFill>
+              <a:srgbClr val="FABB2E"/>
+            </a:solidFill>
+          </a:ln>
+        </p:spPr>
+        <p:txBody>
+          <a:bodyPr wrap="square" lIns="76200" tIns="76200" rIns="76200" bIns="76200" rtlCol="0" anchor="t">
+            <a:normAutofit/>
+          </a:bodyPr>
+          <a:lstStyle/>
+          <a:p>
+            <a:pPr algn="l" indent="0" marL="0">
+              <a:spcAft>
+                <a:spcPts val="800"/>
+              </a:spcAft>
+              <a:buNone/>
+            </a:pPr>
+            <a:r>
+              <a:rPr lang="en-US" sz="1400" b="1" dirty="0">
+                <a:solidFill>
+                  <a:srgbClr val="1A1A2E"/>
+                </a:solidFill>
+                <a:latin typeface="Trebuchet MS" pitchFamily="34" charset="0"/>
+                <a:ea typeface="Trebuchet MS" pitchFamily="34" charset="-122"/>
+                <a:cs typeface="Trebuchet MS" pitchFamily="34" charset="-120"/>
+              </a:rPr>
+              <a:t>Error on line 1</a:t>
+            </a:r>
+            <a:endParaRPr lang="en-US" sz="1300" dirty="0"/>
+          </a:p>
+          <a:p>
+            <a:pPr algn="l" indent="0" marL="0">
+              <a:spcAft>
+                <a:spcPts val="800"/>
+              </a:spcAft>
+              <a:buNone/>
+            </a:pPr>
+            <a:r>
+              <a:rPr lang="en-US" sz="1300" i="1" dirty="0">
+                <a:solidFill>
+                  <a:srgbClr val="1A1A2E"/>
+                </a:solidFill>
+                <a:latin typeface="Trebuchet MS" pitchFamily="34" charset="0"/>
+                <a:ea typeface="Trebuchet MS" pitchFamily="34" charset="-122"/>
+                <a:cs typeface="Trebuchet MS" pitchFamily="34" charset="-120"/>
+              </a:rPr>
+              <a:t>Error type: Equation written upside down</a:t>
+            </a:r>
+            <a:endParaRPr lang="en-US" sz="1300" dirty="0"/>
+          </a:p>
+          <a:p>
+            <a:pPr algn="l" indent="0" marL="0">
               <a:buNone/>
             </a:pPr>
             <a:r>
               <a:rPr lang="en-US" sz="1300" b="1" dirty="0">
                 <a:solidFill>
-                  <a:srgbClr val="FABB2E"/>
-                </a:solidFill>
-                <a:latin typeface="Trebuchet MS" pitchFamily="34" charset="0"/>
-                <a:ea typeface="Trebuchet MS" pitchFamily="34" charset="-122"/>
-                <a:cs typeface="Trebuchet MS" pitchFamily="34" charset="-120"/>
-              </a:rPr>
-              <a:t>Reading the graph</a:t>
+                  <a:srgbClr val="1B5E20"/>
+                </a:solidFill>
+                <a:latin typeface="Trebuchet MS" pitchFamily="34" charset="0"/>
+                <a:ea typeface="Trebuchet MS" pitchFamily="34" charset="-122"/>
+                <a:cs typeface="Trebuchet MS" pitchFamily="34" charset="-120"/>
+              </a:rPr>
+              <a:t>Corrected: rate = volume \div time = 60 \div 40 = 1.5 cm^3/s</a:t>
             </a:r>
             <a:endParaRPr lang="en-US" sz="1300" dirty="0"/>
           </a:p>
@@ -20610,205 +22147,7 @@
       </p:sp>
       <p:sp>
         <p:nvSpPr>
-          <p:cNvPr id="13" name="Text 10"/>
-          <p:cNvSpPr/>
-          <p:nvPr/>
-        </p:nvSpPr>
-        <p:spPr>
-          <a:xfrm>
-            <a:off x="8550554" y="1591056"/>
-            <a:ext cx="3135478" cy="1395984"/>
-          </a:xfrm>
-          <a:prstGeom prst="rect">
-            <a:avLst/>
-          </a:prstGeom>
-          <a:noFill/>
-          <a:ln/>
-        </p:spPr>
-        <p:txBody>
-          <a:bodyPr wrap="square" rtlCol="0" anchor="t"/>
-          <a:lstStyle/>
-          <a:p>
-            <a:pPr indent="0" marL="0">
-              <a:buNone/>
-            </a:pPr>
-            <a:r>
-              <a:rPr lang="en-US" sz="1100" b="1" dirty="0">
-                <a:solidFill>
-                  <a:srgbClr val="FABB2E"/>
-                </a:solidFill>
-                <a:latin typeface="Trebuchet MS" pitchFamily="34" charset="0"/>
-                <a:ea typeface="Trebuchet MS" pitchFamily="34" charset="-122"/>
-                <a:cs typeface="Trebuchet MS" pitchFamily="34" charset="-120"/>
-              </a:rPr>
-              <a:t>1  </a:t>
-            </a:r>
-            <a:pPr indent="0" marL="0">
-              <a:buNone/>
-            </a:pPr>
-            <a:r>
-              <a:rPr lang="en-US" sz="1100" dirty="0">
-                <a:solidFill>
-                  <a:srgbClr val="FFFFFF"/>
-                </a:solidFill>
-                <a:latin typeface="Trebuchet MS" pitchFamily="34" charset="0"/>
-                <a:ea typeface="Trebuchet MS" pitchFamily="34" charset="-122"/>
-                <a:cs typeface="Trebuchet MS" pitchFamily="34" charset="-120"/>
-              </a:rPr>
-              <a:t>The steepest gradient is at t = 0, where concentration is highest.</a:t>
-            </a:r>
-            <a:endParaRPr lang="en-US" sz="1100" dirty="0"/>
-          </a:p>
-        </p:txBody>
-      </p:sp>
-      <p:sp>
-        <p:nvSpPr>
-          <p:cNvPr id="14" name="Text 11"/>
-          <p:cNvSpPr/>
-          <p:nvPr/>
-        </p:nvSpPr>
-        <p:spPr>
-          <a:xfrm>
-            <a:off x="8550554" y="3032760"/>
-            <a:ext cx="3135478" cy="1395984"/>
-          </a:xfrm>
-          <a:prstGeom prst="rect">
-            <a:avLst/>
-          </a:prstGeom>
-          <a:noFill/>
-          <a:ln/>
-        </p:spPr>
-        <p:txBody>
-          <a:bodyPr wrap="square" rtlCol="0" anchor="t"/>
-          <a:lstStyle/>
-          <a:p>
-            <a:pPr indent="0" marL="0">
-              <a:buNone/>
-            </a:pPr>
-            <a:r>
-              <a:rPr lang="en-US" sz="1100" b="1" dirty="0">
-                <a:solidFill>
-                  <a:srgbClr val="FABB2E"/>
-                </a:solidFill>
-                <a:latin typeface="Trebuchet MS" pitchFamily="34" charset="0"/>
-                <a:ea typeface="Trebuchet MS" pitchFamily="34" charset="-122"/>
-                <a:cs typeface="Trebuchet MS" pitchFamily="34" charset="-120"/>
-              </a:rPr>
-              <a:t>2  </a:t>
-            </a:r>
-            <a:pPr indent="0" marL="0">
-              <a:buNone/>
-            </a:pPr>
-            <a:r>
-              <a:rPr lang="en-US" sz="1100" dirty="0">
-                <a:solidFill>
-                  <a:srgbClr val="FFFFFF"/>
-                </a:solidFill>
-                <a:latin typeface="Trebuchet MS" pitchFamily="34" charset="0"/>
-                <a:ea typeface="Trebuchet MS" pitchFamily="34" charset="-122"/>
-                <a:cs typeface="Trebuchet MS" pitchFamily="34" charset="-120"/>
-              </a:rPr>
-              <a:t>The gradient falls steadily as the acid is used up.</a:t>
-            </a:r>
-            <a:endParaRPr lang="en-US" sz="1100" dirty="0"/>
-          </a:p>
-        </p:txBody>
-      </p:sp>
-      <p:sp>
-        <p:nvSpPr>
-          <p:cNvPr id="15" name="Text 12"/>
-          <p:cNvSpPr/>
-          <p:nvPr/>
-        </p:nvSpPr>
-        <p:spPr>
-          <a:xfrm>
-            <a:off x="8550554" y="4474464"/>
-            <a:ext cx="3135478" cy="1395984"/>
-          </a:xfrm>
-          <a:prstGeom prst="rect">
-            <a:avLst/>
-          </a:prstGeom>
-          <a:noFill/>
-          <a:ln/>
-        </p:spPr>
-        <p:txBody>
-          <a:bodyPr wrap="square" rtlCol="0" anchor="t"/>
-          <a:lstStyle/>
-          <a:p>
-            <a:pPr indent="0" marL="0">
-              <a:buNone/>
-            </a:pPr>
-            <a:r>
-              <a:rPr lang="en-US" sz="1100" b="1" dirty="0">
-                <a:solidFill>
-                  <a:srgbClr val="FABB2E"/>
-                </a:solidFill>
-                <a:latin typeface="Trebuchet MS" pitchFamily="34" charset="0"/>
-                <a:ea typeface="Trebuchet MS" pitchFamily="34" charset="-122"/>
-                <a:cs typeface="Trebuchet MS" pitchFamily="34" charset="-120"/>
-              </a:rPr>
-              <a:t>3  </a:t>
-            </a:r>
-            <a:pPr indent="0" marL="0">
-              <a:buNone/>
-            </a:pPr>
-            <a:r>
-              <a:rPr lang="en-US" sz="1100" dirty="0">
-                <a:solidFill>
-                  <a:srgbClr val="FFFFFF"/>
-                </a:solidFill>
-                <a:latin typeface="Trebuchet MS" pitchFamily="34" charset="0"/>
-                <a:ea typeface="Trebuchet MS" pitchFamily="34" charset="-122"/>
-                <a:cs typeface="Trebuchet MS" pitchFamily="34" charset="-120"/>
-              </a:rPr>
-              <a:t>The curve flattens when one reactant runs out.</a:t>
-            </a:r>
-            <a:endParaRPr lang="en-US" sz="1100" dirty="0"/>
-          </a:p>
-        </p:txBody>
-      </p:sp>
-      <p:sp>
-        <p:nvSpPr>
-          <p:cNvPr id="16" name="Text 13"/>
-          <p:cNvSpPr/>
-          <p:nvPr/>
-        </p:nvSpPr>
-        <p:spPr>
-          <a:xfrm>
-            <a:off x="8550554" y="5824728"/>
-            <a:ext cx="3135478" cy="640080"/>
-          </a:xfrm>
-          <a:prstGeom prst="rect">
-            <a:avLst/>
-          </a:prstGeom>
-          <a:noFill/>
-          <a:ln/>
-        </p:spPr>
-        <p:txBody>
-          <a:bodyPr wrap="square" rtlCol="0" anchor="ctr"/>
-          <a:lstStyle/>
-          <a:p>
-            <a:pPr algn="ctr" indent="0" marL="0">
-              <a:buNone/>
-            </a:pPr>
-            <a:r>
-              <a:rPr lang="en-US" sz="1100" i="1" dirty="0">
-                <a:solidFill>
-                  <a:srgbClr val="FABB2E"/>
-                </a:solidFill>
-                <a:latin typeface="Trebuchet MS" pitchFamily="34" charset="0"/>
-                <a:ea typeface="Trebuchet MS" pitchFamily="34" charset="-122"/>
-                <a:cs typeface="Trebuchet MS" pitchFamily="34" charset="-120"/>
-              </a:rPr>
-              <a:t>Same final volume, different time to get there.</a:t>
-            </a:r>
-            <a:endParaRPr lang="en-US" sz="1100" dirty="0"/>
-          </a:p>
-        </p:txBody>
-      </p:sp>
-      <p:sp>
-        <p:nvSpPr>
-          <p:cNvPr id="17" name="Text 14"/>
+          <p:cNvPr id="13" name="Text 11"/>
           <p:cNvSpPr/>
           <p:nvPr/>
         </p:nvSpPr>
@@ -21194,7 +22533,7 @@
                 <a:ea typeface="Trebuchet MS" pitchFamily="34" charset="-122"/>
                 <a:cs typeface="Trebuchet MS" pitchFamily="34" charset="-120"/>
               </a:rPr>
-              <a:t>BUILD · MAKE A PREDICTION</a:t>
+              <a:t>BUILD · READ THE GRAPH: ANSWERS</a:t>
             </a:r>
             <a:endParaRPr lang="en-US" sz="1300" dirty="0"/>
           </a:p>
@@ -21208,14 +22547,211 @@
         </p:nvSpPr>
         <p:spPr>
           <a:xfrm>
-            <a:off x="411480" y="1088136"/>
-            <a:ext cx="11365992" cy="685800"/>
-          </a:xfrm>
-          <a:prstGeom prst="rect">
-            <a:avLst/>
-          </a:prstGeom>
-          <a:solidFill>
-            <a:srgbClr val="FFFDE7"/>
+            <a:off x="0" y="1014984"/>
+            <a:ext cx="12188952" cy="347472"/>
+          </a:xfrm>
+          <a:prstGeom prst="rect">
+            <a:avLst/>
+          </a:prstGeom>
+          <a:solidFill>
+            <a:srgbClr val="6A0DAD"/>
+          </a:solidFill>
+          <a:ln/>
+        </p:spPr>
+        <p:txBody>
+          <a:bodyPr wrap="square" lIns="101600" tIns="101600" rIns="101600" bIns="101600" rtlCol="0" anchor="ctr"/>
+          <a:lstStyle/>
+          <a:p>
+            <a:pPr algn="l" indent="0" marL="0">
+              <a:buNone/>
+            </a:pPr>
+            <a:r>
+              <a:rPr lang="en-US" sz="1300" b="1" dirty="0">
+                <a:solidFill>
+                  <a:srgbClr val="FFFFFF"/>
+                </a:solidFill>
+                <a:latin typeface="Trebuchet MS" pitchFamily="34" charset="0"/>
+                <a:ea typeface="Trebuchet MS" pitchFamily="34" charset="-122"/>
+                <a:cs typeface="Trebuchet MS" pitchFamily="34" charset="-120"/>
+              </a:rPr>
+              <a:t>☞  Purple pen time · mark and correct your answers</a:t>
+            </a:r>
+            <a:endParaRPr lang="en-US" sz="1300" dirty="0"/>
+          </a:p>
+        </p:txBody>
+      </p:sp>
+      <p:sp>
+        <p:nvSpPr>
+          <p:cNvPr id="11" name="Shape 9"/>
+          <p:cNvSpPr/>
+          <p:nvPr/>
+        </p:nvSpPr>
+        <p:spPr>
+          <a:xfrm>
+            <a:off x="411480" y="1453896"/>
+            <a:ext cx="6251296" cy="5010912"/>
+          </a:xfrm>
+          <a:prstGeom prst="rect">
+            <a:avLst/>
+          </a:prstGeom>
+          <a:solidFill>
+            <a:srgbClr val="FFFFFF"/>
+          </a:solidFill>
+          <a:ln w="25400">
+            <a:solidFill>
+              <a:srgbClr val="FABB2E"/>
+            </a:solidFill>
+            <a:prstDash val="solid"/>
+          </a:ln>
+        </p:spPr>
+      </p:sp>
+      <p:sp>
+        <p:nvSpPr>
+          <p:cNvPr id="12" name="Text 10"/>
+          <p:cNvSpPr/>
+          <p:nvPr/>
+        </p:nvSpPr>
+        <p:spPr>
+          <a:xfrm>
+            <a:off x="502920" y="1499616"/>
+            <a:ext cx="6068416" cy="274320"/>
+          </a:xfrm>
+          <a:prstGeom prst="rect">
+            <a:avLst/>
+          </a:prstGeom>
+          <a:noFill/>
+          <a:ln/>
+        </p:spPr>
+        <p:txBody>
+          <a:bodyPr wrap="square" rtlCol="0" anchor="ctr"/>
+          <a:lstStyle/>
+          <a:p>
+            <a:pPr indent="0" marL="0">
+              <a:buNone/>
+            </a:pPr>
+            <a:r>
+              <a:rPr lang="en-US" sz="1200" b="1" dirty="0">
+                <a:solidFill>
+                  <a:srgbClr val="0D1B5E"/>
+                </a:solidFill>
+                <a:latin typeface="Trebuchet MS" pitchFamily="34" charset="0"/>
+                <a:ea typeface="Trebuchet MS" pitchFamily="34" charset="-122"/>
+                <a:cs typeface="Trebuchet MS" pitchFamily="34" charset="-120"/>
+              </a:rPr>
+              <a:t>Volume of gas against time</a:t>
+            </a:r>
+            <a:endParaRPr lang="en-US" sz="1200" dirty="0"/>
+          </a:p>
+        </p:txBody>
+      </p:sp>
+      <p:sp>
+        <p:nvSpPr>
+          <p:cNvPr id="13" name="Shape 11"/>
+          <p:cNvSpPr/>
+          <p:nvPr/>
+        </p:nvSpPr>
+        <p:spPr>
+          <a:xfrm>
+            <a:off x="1005840" y="1911096"/>
+            <a:ext cx="0" cy="4050792"/>
+          </a:xfrm>
+          <a:prstGeom prst="line">
+            <a:avLst/>
+          </a:prstGeom>
+          <a:noFill/>
+          <a:ln w="19050">
+            <a:solidFill>
+              <a:srgbClr val="0D1B5E"/>
+            </a:solidFill>
+            <a:prstDash val="solid"/>
+          </a:ln>
+        </p:spPr>
+      </p:sp>
+      <p:sp>
+        <p:nvSpPr>
+          <p:cNvPr id="14" name="Shape 12"/>
+          <p:cNvSpPr/>
+          <p:nvPr/>
+        </p:nvSpPr>
+        <p:spPr>
+          <a:xfrm>
+            <a:off x="1005840" y="5961888"/>
+            <a:ext cx="5336896" cy="0"/>
+          </a:xfrm>
+          <a:prstGeom prst="line">
+            <a:avLst/>
+          </a:prstGeom>
+          <a:noFill/>
+          <a:ln w="19050">
+            <a:solidFill>
+              <a:srgbClr val="0D1B5E"/>
+            </a:solidFill>
+            <a:prstDash val="solid"/>
+          </a:ln>
+        </p:spPr>
+      </p:sp>
+      <p:sp>
+        <p:nvSpPr>
+          <p:cNvPr id="15" name="Text 13"/>
+          <p:cNvSpPr/>
+          <p:nvPr/>
+        </p:nvSpPr>
+        <p:spPr>
+          <a:xfrm>
+            <a:off x="1051560" y="1956816"/>
+            <a:ext cx="5245456" cy="3959352"/>
+          </a:xfrm>
+          <a:prstGeom prst="rect">
+            <a:avLst/>
+          </a:prstGeom>
+          <a:solidFill>
+            <a:srgbClr val="D0D0D0"/>
+          </a:solidFill>
+          <a:ln w="12700">
+            <a:solidFill>
+              <a:srgbClr val="999999"/>
+            </a:solidFill>
+            <a:prstDash val="dash"/>
+          </a:ln>
+        </p:spPr>
+        <p:txBody>
+          <a:bodyPr wrap="square" rtlCol="0" anchor="ctr"/>
+          <a:lstStyle/>
+          <a:p>
+            <a:pPr algn="ctr" indent="0" marL="0">
+              <a:buNone/>
+            </a:pPr>
+            <a:r>
+              <a:rPr lang="en-US" sz="1100" i="1" dirty="0">
+                <a:solidFill>
+                  <a:srgbClr val="666666"/>
+                </a:solidFill>
+                <a:latin typeface="Trebuchet MS" pitchFamily="34" charset="0"/>
+                <a:ea typeface="Trebuchet MS" pitchFamily="34" charset="-122"/>
+                <a:cs typeface="Trebuchet MS" pitchFamily="34" charset="-120"/>
+              </a:rPr>
+              <a:t>[Paste image — suggested search: gas volume against time curve that rises steeply then levels off]</a:t>
+            </a:r>
+            <a:endParaRPr lang="en-US" sz="1100" dirty="0"/>
+          </a:p>
+        </p:txBody>
+      </p:sp>
+      <p:sp>
+        <p:nvSpPr>
+          <p:cNvPr id="16" name="Text 14"/>
+          <p:cNvSpPr/>
+          <p:nvPr/>
+        </p:nvSpPr>
+        <p:spPr>
+          <a:xfrm>
+            <a:off x="6799936" y="1453896"/>
+            <a:ext cx="4977536" cy="629107"/>
+          </a:xfrm>
+          <a:prstGeom prst="rect">
+            <a:avLst/>
+          </a:prstGeom>
+          <a:solidFill>
+            <a:srgbClr val="0D1B5E"/>
           </a:solidFill>
           <a:ln w="25400">
             <a:solidFill>
@@ -21233,15 +22769,29 @@
               <a:buNone/>
             </a:pPr>
             <a:r>
-              <a:rPr lang="en-US" sz="1300" i="1" dirty="0">
-                <a:solidFill>
-                  <a:srgbClr val="1A1A2E"/>
-                </a:solidFill>
-                <a:latin typeface="Trebuchet MS" pitchFamily="34" charset="0"/>
-                <a:ea typeface="Trebuchet MS" pitchFamily="34" charset="-122"/>
-                <a:cs typeface="Trebuchet MS" pitchFamily="34" charset="-120"/>
-              </a:rPr>
-              <a:t>Two flasks hold the same mass of marble and the same acid. One holds chips, the other holds powder.</a:t>
+              <a:rPr lang="en-US" sz="1500" b="1" dirty="0">
+                <a:solidFill>
+                  <a:srgbClr val="FABB2E"/>
+                </a:solidFill>
+                <a:latin typeface="Trebuchet MS" pitchFamily="34" charset="0"/>
+                <a:ea typeface="Trebuchet MS" pitchFamily="34" charset="-122"/>
+                <a:cs typeface="Trebuchet MS" pitchFamily="34" charset="-120"/>
+              </a:rPr>
+              <a:t>Q1  </a:t>
+            </a:r>
+            <a:pPr algn="l" indent="0" marL="0">
+              <a:buNone/>
+            </a:pPr>
+            <a:r>
+              <a:rPr lang="en-US" sz="1500" dirty="0">
+                <a:solidFill>
+                  <a:srgbClr val="FFFFFF"/>
+                </a:solidFill>
+                <a:latin typeface="Trebuchet MS" pitchFamily="34" charset="0"/>
+                <a:ea typeface="Trebuchet MS" pitchFamily="34" charset="-122"/>
+                <a:cs typeface="Trebuchet MS" pitchFamily="34" charset="-120"/>
+              </a:rPr>
+              <a:t>Where is the reaction fastest?  [1 mark]</a:t>
             </a:r>
             <a:endParaRPr lang="en-US" sz="1300" dirty="0"/>
           </a:p>
@@ -21249,61 +22799,20 @@
       </p:sp>
       <p:sp>
         <p:nvSpPr>
-          <p:cNvPr id="11" name="Text 9"/>
-          <p:cNvSpPr/>
-          <p:nvPr/>
-        </p:nvSpPr>
-        <p:spPr>
-          <a:xfrm>
-            <a:off x="411480" y="1865376"/>
-            <a:ext cx="11365992" cy="1188720"/>
-          </a:xfrm>
-          <a:prstGeom prst="rect">
-            <a:avLst/>
-          </a:prstGeom>
-          <a:solidFill>
-            <a:srgbClr val="E65100"/>
-          </a:solidFill>
-          <a:ln/>
-        </p:spPr>
-        <p:txBody>
-          <a:bodyPr wrap="square" lIns="152400" tIns="152400" rIns="152400" bIns="152400" rtlCol="0" anchor="ctr"/>
-          <a:lstStyle/>
-          <a:p>
-            <a:pPr algn="ctr" indent="0" marL="0">
-              <a:buNone/>
-            </a:pPr>
-            <a:r>
-              <a:rPr lang="en-US" sz="2200" b="1" dirty="0">
-                <a:solidFill>
-                  <a:srgbClr val="FFFFFF"/>
-                </a:solidFill>
-                <a:latin typeface="Trebuchet MS" pitchFamily="34" charset="0"/>
-                <a:ea typeface="Trebuchet MS" pitchFamily="34" charset="-122"/>
-                <a:cs typeface="Trebuchet MS" pitchFamily="34" charset="-120"/>
-              </a:rPr>
-              <a:t>Which flask stops bubbling first, and will they lose the same total mass?</a:t>
-            </a:r>
-            <a:endParaRPr lang="en-US" sz="2200" dirty="0"/>
-          </a:p>
-        </p:txBody>
-      </p:sp>
-      <p:sp>
-        <p:nvSpPr>
-          <p:cNvPr id="12" name="Text 10"/>
-          <p:cNvSpPr/>
-          <p:nvPr/>
-        </p:nvSpPr>
-        <p:spPr>
-          <a:xfrm>
-            <a:off x="411480" y="3145536"/>
-            <a:ext cx="11365992" cy="2816352"/>
-          </a:xfrm>
-          <a:prstGeom prst="rect">
-            <a:avLst/>
-          </a:prstGeom>
-          <a:solidFill>
-            <a:srgbClr val="FFFDE7"/>
+          <p:cNvPr id="17" name="Text 15"/>
+          <p:cNvSpPr/>
+          <p:nvPr/>
+        </p:nvSpPr>
+        <p:spPr>
+          <a:xfrm>
+            <a:off x="6799936" y="2119579"/>
+            <a:ext cx="4977536" cy="943661"/>
+          </a:xfrm>
+          <a:prstGeom prst="rect">
+            <a:avLst/>
+          </a:prstGeom>
+          <a:solidFill>
+            <a:srgbClr val="0D1B5E"/>
           </a:solidFill>
           <a:ln w="25400">
             <a:solidFill>
@@ -21317,19 +22826,80 @@
           </a:bodyPr>
           <a:lstStyle/>
           <a:p>
-            <a:pPr algn="ctr" indent="0" marL="0">
-              <a:buNone/>
-            </a:pPr>
-            <a:r>
-              <a:rPr lang="en-US" sz="1400" i="1" dirty="0">
-                <a:solidFill>
-                  <a:srgbClr val="555555"/>
-                </a:solidFill>
-                <a:latin typeface="Trebuchet MS" pitchFamily="34" charset="0"/>
-                <a:ea typeface="Trebuchet MS" pitchFamily="34" charset="-122"/>
-                <a:cs typeface="Trebuchet MS" pitchFamily="34" charset="-120"/>
-              </a:rPr>
-              <a:t>Write your prediction in your book now.</a:t>
+            <a:pPr algn="l" indent="0" marL="0">
+              <a:buNone/>
+            </a:pPr>
+            <a:r>
+              <a:rPr lang="en-US" sz="1500" dirty="0">
+                <a:solidFill>
+                  <a:srgbClr val="FABB2E"/>
+                </a:solidFill>
+                <a:latin typeface="Trebuchet MS" pitchFamily="34" charset="0"/>
+                <a:ea typeface="Trebuchet MS" pitchFamily="34" charset="-122"/>
+                <a:cs typeface="Trebuchet MS" pitchFamily="34" charset="-120"/>
+              </a:rPr>
+              <a:t>At the start, where the curve is steepest</a:t>
+            </a:r>
+            <a:endParaRPr lang="en-US" sz="1500" dirty="0"/>
+          </a:p>
+        </p:txBody>
+      </p:sp>
+      <p:sp>
+        <p:nvSpPr>
+          <p:cNvPr id="18" name="Text 16"/>
+          <p:cNvSpPr/>
+          <p:nvPr/>
+        </p:nvSpPr>
+        <p:spPr>
+          <a:xfrm>
+            <a:off x="6799936" y="3154680"/>
+            <a:ext cx="4977536" cy="629107"/>
+          </a:xfrm>
+          <a:prstGeom prst="rect">
+            <a:avLst/>
+          </a:prstGeom>
+          <a:solidFill>
+            <a:srgbClr val="0D1B5E"/>
+          </a:solidFill>
+          <a:ln w="25400">
+            <a:solidFill>
+              <a:srgbClr val="FABB2E"/>
+            </a:solidFill>
+          </a:ln>
+        </p:spPr>
+        <p:txBody>
+          <a:bodyPr wrap="square" lIns="76200" tIns="76200" rIns="76200" bIns="76200" rtlCol="0" anchor="ctr">
+            <a:normAutofit/>
+          </a:bodyPr>
+          <a:lstStyle/>
+          <a:p>
+            <a:pPr algn="l" indent="0" marL="0">
+              <a:buNone/>
+            </a:pPr>
+            <a:r>
+              <a:rPr lang="en-US" sz="1500" b="1" dirty="0">
+                <a:solidFill>
+                  <a:srgbClr val="FABB2E"/>
+                </a:solidFill>
+                <a:latin typeface="Trebuchet MS" pitchFamily="34" charset="0"/>
+                <a:ea typeface="Trebuchet MS" pitchFamily="34" charset="-122"/>
+                <a:cs typeface="Trebuchet MS" pitchFamily="34" charset="-120"/>
+              </a:rPr>
+              <a:t>Q2  </a:t>
+            </a:r>
+            <a:pPr algn="l" indent="0" marL="0">
+              <a:buNone/>
+            </a:pPr>
+            <a:r>
+              <a:rPr lang="en-US" sz="1500" dirty="0">
+                <a:solidFill>
+                  <a:srgbClr val="FFFFFF"/>
+                </a:solidFill>
+                <a:latin typeface="Trebuchet MS" pitchFamily="34" charset="0"/>
+                <a:ea typeface="Trebuchet MS" pitchFamily="34" charset="-122"/>
+                <a:cs typeface="Trebuchet MS" pitchFamily="34" charset="-120"/>
+              </a:rPr>
+              <a:t>What does the flat section show?  [2 marks]</a:t>
             </a:r>
             <a:endParaRPr lang="en-US" sz="1300" dirty="0"/>
           </a:p>
@@ -21337,14 +22907,14 @@
       </p:sp>
       <p:sp>
         <p:nvSpPr>
-          <p:cNvPr id="13" name="Text 11"/>
-          <p:cNvSpPr/>
-          <p:nvPr/>
-        </p:nvSpPr>
-        <p:spPr>
-          <a:xfrm>
-            <a:off x="411480" y="6053328"/>
-            <a:ext cx="11365992" cy="411480"/>
+          <p:cNvPr id="19" name="Text 17"/>
+          <p:cNvSpPr/>
+          <p:nvPr/>
+        </p:nvSpPr>
+        <p:spPr>
+          <a:xfrm>
+            <a:off x="6799936" y="3820363"/>
+            <a:ext cx="4977536" cy="943661"/>
           </a:xfrm>
           <a:prstGeom prst="rect">
             <a:avLst/>
@@ -21352,33 +22922,147 @@
           <a:solidFill>
             <a:srgbClr val="0D1B5E"/>
           </a:solidFill>
-          <a:ln/>
-        </p:spPr>
-        <p:txBody>
-          <a:bodyPr wrap="square" rtlCol="0" anchor="ctr"/>
-          <a:lstStyle/>
-          <a:p>
-            <a:pPr algn="ctr" indent="0" marL="0">
-              <a:buNone/>
-            </a:pPr>
-            <a:r>
-              <a:rPr lang="en-US" sz="1200" b="1" dirty="0">
-                <a:solidFill>
-                  <a:srgbClr val="FFFFFF"/>
-                </a:solidFill>
-                <a:latin typeface="Trebuchet MS" pitchFamily="34" charset="0"/>
-                <a:ea typeface="Trebuchet MS" pitchFamily="34" charset="-122"/>
-                <a:cs typeface="Trebuchet MS" pitchFamily="34" charset="-120"/>
-              </a:rPr>
-              <a:t>Commit your prediction before seeing the answer</a:t>
-            </a:r>
-            <a:endParaRPr lang="en-US" sz="1200" dirty="0"/>
-          </a:p>
-        </p:txBody>
-      </p:sp>
-      <p:sp>
-        <p:nvSpPr>
-          <p:cNvPr id="14" name="Text 12"/>
+          <a:ln w="25400">
+            <a:solidFill>
+              <a:srgbClr val="FABB2E"/>
+            </a:solidFill>
+          </a:ln>
+        </p:spPr>
+        <p:txBody>
+          <a:bodyPr wrap="square" lIns="76200" tIns="76200" rIns="76200" bIns="76200" rtlCol="0" anchor="ctr">
+            <a:normAutofit/>
+          </a:bodyPr>
+          <a:lstStyle/>
+          <a:p>
+            <a:pPr algn="l" indent="0" marL="0">
+              <a:buNone/>
+            </a:pPr>
+            <a:r>
+              <a:rPr lang="en-US" sz="1500" dirty="0">
+                <a:solidFill>
+                  <a:srgbClr val="FABB2E"/>
+                </a:solidFill>
+                <a:latin typeface="Trebuchet MS" pitchFamily="34" charset="0"/>
+                <a:ea typeface="Trebuchet MS" pitchFamily="34" charset="-122"/>
+                <a:cs typeface="Trebuchet MS" pitchFamily="34" charset="-120"/>
+              </a:rPr>
+              <a:t>The reaction has stopped, a reactant is used up</a:t>
+            </a:r>
+            <a:endParaRPr lang="en-US" sz="1500" dirty="0"/>
+          </a:p>
+        </p:txBody>
+      </p:sp>
+      <p:sp>
+        <p:nvSpPr>
+          <p:cNvPr id="20" name="Text 18"/>
+          <p:cNvSpPr/>
+          <p:nvPr/>
+        </p:nvSpPr>
+        <p:spPr>
+          <a:xfrm>
+            <a:off x="6799936" y="4855464"/>
+            <a:ext cx="4977536" cy="629107"/>
+          </a:xfrm>
+          <a:prstGeom prst="rect">
+            <a:avLst/>
+          </a:prstGeom>
+          <a:solidFill>
+            <a:srgbClr val="0D1B5E"/>
+          </a:solidFill>
+          <a:ln w="25400">
+            <a:solidFill>
+              <a:srgbClr val="FABB2E"/>
+            </a:solidFill>
+          </a:ln>
+        </p:spPr>
+        <p:txBody>
+          <a:bodyPr wrap="square" lIns="76200" tIns="76200" rIns="76200" bIns="76200" rtlCol="0" anchor="ctr">
+            <a:normAutofit/>
+          </a:bodyPr>
+          <a:lstStyle/>
+          <a:p>
+            <a:pPr algn="l" indent="0" marL="0">
+              <a:buNone/>
+            </a:pPr>
+            <a:r>
+              <a:rPr lang="en-US" sz="1500" b="1" dirty="0">
+                <a:solidFill>
+                  <a:srgbClr val="FABB2E"/>
+                </a:solidFill>
+                <a:latin typeface="Trebuchet MS" pitchFamily="34" charset="0"/>
+                <a:ea typeface="Trebuchet MS" pitchFamily="34" charset="-122"/>
+                <a:cs typeface="Trebuchet MS" pitchFamily="34" charset="-120"/>
+              </a:rPr>
+              <a:t>Q3  </a:t>
+            </a:r>
+            <a:pPr algn="l" indent="0" marL="0">
+              <a:buNone/>
+            </a:pPr>
+            <a:r>
+              <a:rPr lang="en-US" sz="1500" dirty="0">
+                <a:solidFill>
+                  <a:srgbClr val="FFFFFF"/>
+                </a:solidFill>
+                <a:latin typeface="Trebuchet MS" pitchFamily="34" charset="0"/>
+                <a:ea typeface="Trebuchet MS" pitchFamily="34" charset="-122"/>
+                <a:cs typeface="Trebuchet MS" pitchFamily="34" charset="-120"/>
+              </a:rPr>
+              <a:t>How would a powder change the curve?  [2 marks]</a:t>
+            </a:r>
+            <a:endParaRPr lang="en-US" sz="1300" dirty="0"/>
+          </a:p>
+        </p:txBody>
+      </p:sp>
+      <p:sp>
+        <p:nvSpPr>
+          <p:cNvPr id="21" name="Text 19"/>
+          <p:cNvSpPr/>
+          <p:nvPr/>
+        </p:nvSpPr>
+        <p:spPr>
+          <a:xfrm>
+            <a:off x="6799936" y="5521147"/>
+            <a:ext cx="4977536" cy="943661"/>
+          </a:xfrm>
+          <a:prstGeom prst="rect">
+            <a:avLst/>
+          </a:prstGeom>
+          <a:solidFill>
+            <a:srgbClr val="0D1B5E"/>
+          </a:solidFill>
+          <a:ln w="25400">
+            <a:solidFill>
+              <a:srgbClr val="FABB2E"/>
+            </a:solidFill>
+          </a:ln>
+        </p:spPr>
+        <p:txBody>
+          <a:bodyPr wrap="square" lIns="76200" tIns="76200" rIns="76200" bIns="76200" rtlCol="0" anchor="ctr">
+            <a:normAutofit/>
+          </a:bodyPr>
+          <a:lstStyle/>
+          <a:p>
+            <a:pPr algn="l" indent="0" marL="0">
+              <a:buNone/>
+            </a:pPr>
+            <a:r>
+              <a:rPr lang="en-US" sz="1500" dirty="0">
+                <a:solidFill>
+                  <a:srgbClr val="FABB2E"/>
+                </a:solidFill>
+                <a:latin typeface="Trebuchet MS" pitchFamily="34" charset="0"/>
+                <a:ea typeface="Trebuchet MS" pitchFamily="34" charset="-122"/>
+                <a:cs typeface="Trebuchet MS" pitchFamily="34" charset="-120"/>
+              </a:rPr>
+              <a:t>Steeper at the start, levelling at the same final volume</a:t>
+            </a:r>
+            <a:endParaRPr lang="en-US" sz="1500" dirty="0"/>
+          </a:p>
+        </p:txBody>
+      </p:sp>
+      <p:sp>
+        <p:nvSpPr>
+          <p:cNvPr id="22" name="Text 20"/>
           <p:cNvSpPr/>
           <p:nvPr/>
         </p:nvSpPr>
@@ -21764,158 +23448,76 @@
                 <a:ea typeface="Trebuchet MS" pitchFamily="34" charset="-122"/>
                 <a:cs typeface="Trebuchet MS" pitchFamily="34" charset="-120"/>
               </a:rPr>
-              <a:t>BUILD · CHECK YOUR PREDICTION</a:t>
+              <a:t>BUILD · RESULTS GRAPH</a:t>
             </a:r>
             <a:endParaRPr lang="en-US" sz="1300" dirty="0"/>
           </a:p>
         </p:txBody>
       </p:sp>
-      <p:sp>
-        <p:nvSpPr>
-          <p:cNvPr id="10" name="Text 8"/>
-          <p:cNvSpPr/>
-          <p:nvPr/>
-        </p:nvSpPr>
-        <p:spPr>
-          <a:xfrm>
-            <a:off x="0" y="1014984"/>
-            <a:ext cx="12188952" cy="347472"/>
-          </a:xfrm>
-          <a:prstGeom prst="rect">
-            <a:avLst/>
-          </a:prstGeom>
-          <a:solidFill>
-            <a:srgbClr val="6A0DAD"/>
-          </a:solidFill>
-          <a:ln/>
-        </p:spPr>
-        <p:txBody>
-          <a:bodyPr wrap="square" lIns="101600" tIns="101600" rIns="101600" bIns="101600" rtlCol="0" anchor="ctr"/>
-          <a:lstStyle/>
-          <a:p>
-            <a:pPr algn="l" indent="0" marL="0">
-              <a:buNone/>
-            </a:pPr>
-            <a:r>
-              <a:rPr lang="en-US" sz="1300" b="1" dirty="0">
-                <a:solidFill>
-                  <a:srgbClr val="FFFFFF"/>
-                </a:solidFill>
-                <a:latin typeface="Trebuchet MS" pitchFamily="34" charset="0"/>
-                <a:ea typeface="Trebuchet MS" pitchFamily="34" charset="-122"/>
-                <a:cs typeface="Trebuchet MS" pitchFamily="34" charset="-120"/>
-              </a:rPr>
-              <a:t>☞  Purple pen time · mark and correct your answers</a:t>
-            </a:r>
-            <a:endParaRPr lang="en-US" sz="1300" dirty="0"/>
-          </a:p>
-        </p:txBody>
-      </p:sp>
-      <p:sp>
-        <p:nvSpPr>
-          <p:cNvPr id="11" name="Text 9"/>
-          <p:cNvSpPr/>
-          <p:nvPr/>
-        </p:nvSpPr>
-        <p:spPr>
-          <a:xfrm>
-            <a:off x="411480" y="1453896"/>
-            <a:ext cx="5591556" cy="347472"/>
-          </a:xfrm>
-          <a:prstGeom prst="rect">
-            <a:avLst/>
-          </a:prstGeom>
-          <a:solidFill>
-            <a:srgbClr val="E65100"/>
-          </a:solidFill>
-          <a:ln/>
-        </p:spPr>
-        <p:txBody>
-          <a:bodyPr wrap="square" rtlCol="0" anchor="ctr"/>
-          <a:lstStyle/>
-          <a:p>
-            <a:pPr algn="ctr" indent="0" marL="0">
-              <a:buNone/>
-            </a:pPr>
-            <a:r>
-              <a:rPr lang="en-US" sz="1200" b="1" dirty="0">
-                <a:solidFill>
-                  <a:srgbClr val="FFFFFF"/>
-                </a:solidFill>
-                <a:latin typeface="Trebuchet MS" pitchFamily="34" charset="0"/>
-                <a:ea typeface="Trebuchet MS" pitchFamily="34" charset="-122"/>
-                <a:cs typeface="Trebuchet MS" pitchFamily="34" charset="-120"/>
-              </a:rPr>
-              <a:t>YOUR PREDICTION</a:t>
-            </a:r>
-            <a:endParaRPr lang="en-US" sz="1200" dirty="0"/>
-          </a:p>
-        </p:txBody>
-      </p:sp>
-      <p:sp>
-        <p:nvSpPr>
-          <p:cNvPr id="12" name="Text 10"/>
-          <p:cNvSpPr/>
-          <p:nvPr/>
-        </p:nvSpPr>
-        <p:spPr>
-          <a:xfrm>
-            <a:off x="411480" y="1801368"/>
-            <a:ext cx="5591556" cy="3291840"/>
-          </a:xfrm>
-          <a:prstGeom prst="rect">
-            <a:avLst/>
-          </a:prstGeom>
-          <a:solidFill>
-            <a:srgbClr val="FFFFFF"/>
+      <p:pic>
+        <p:nvPicPr>
+          <p:cNvPr id="10" name="Image 0" descr="C:\Users\magda\AppData\Local\Temp\gg_out_1790976015810.png">    </p:cNvPr>
+          <p:cNvPicPr>
+            <a:picLocks noChangeAspect="1"/>
+          </p:cNvPicPr>
+          <p:nvPr/>
+        </p:nvPicPr>
+        <p:blipFill>
+          <a:blip r:embed="rId1"/>
+          <a:stretch>
+            <a:fillRect/>
+          </a:stretch>
+        </p:blipFill>
+        <p:spPr>
+          <a:xfrm>
+            <a:off x="411480" y="1088136"/>
+            <a:ext cx="7956194" cy="5376672"/>
+          </a:xfrm>
+          <a:prstGeom prst="rect">
+            <a:avLst/>
+          </a:prstGeom>
+        </p:spPr>
+      </p:pic>
+      <p:sp>
+        <p:nvSpPr>
+          <p:cNvPr id="11" name="Shape 8"/>
+          <p:cNvSpPr/>
+          <p:nvPr/>
+        </p:nvSpPr>
+        <p:spPr>
+          <a:xfrm>
+            <a:off x="8459114" y="1088136"/>
+            <a:ext cx="3318358" cy="5376672"/>
+          </a:xfrm>
+          <a:prstGeom prst="rect">
+            <a:avLst/>
+          </a:prstGeom>
+          <a:solidFill>
+            <a:srgbClr val="152347"/>
           </a:solidFill>
           <a:ln w="25400">
             <a:solidFill>
               <a:srgbClr val="FABB2E"/>
             </a:solidFill>
+            <a:prstDash val="solid"/>
           </a:ln>
         </p:spPr>
-        <p:txBody>
-          <a:bodyPr wrap="square" lIns="76200" tIns="76200" rIns="76200" bIns="76200" rtlCol="0" anchor="ctr">
-            <a:normAutofit/>
-          </a:bodyPr>
-          <a:lstStyle/>
-          <a:p>
-            <a:pPr algn="l" indent="0" marL="0">
-              <a:buNone/>
-            </a:pPr>
-            <a:r>
-              <a:rPr lang="en-US" sz="1600" i="1" dirty="0">
-                <a:solidFill>
-                  <a:srgbClr val="1A1A2E"/>
-                </a:solidFill>
-                <a:latin typeface="Trebuchet MS" pitchFamily="34" charset="0"/>
-                <a:ea typeface="Trebuchet MS" pitchFamily="34" charset="-122"/>
-                <a:cs typeface="Trebuchet MS" pitchFamily="34" charset="-120"/>
-              </a:rPr>
-              <a:t>Which flask stops bubbling first, and will they lose the same total mass?</a:t>
-            </a:r>
-            <a:endParaRPr lang="en-US" sz="1600" dirty="0"/>
-          </a:p>
-        </p:txBody>
-      </p:sp>
-      <p:sp>
-        <p:nvSpPr>
-          <p:cNvPr id="13" name="Text 11"/>
-          <p:cNvSpPr/>
-          <p:nvPr/>
-        </p:nvSpPr>
-        <p:spPr>
-          <a:xfrm>
-            <a:off x="6185916" y="1453896"/>
-            <a:ext cx="5591556" cy="347472"/>
-          </a:xfrm>
-          <a:prstGeom prst="rect">
-            <a:avLst/>
-          </a:prstGeom>
-          <a:solidFill>
-            <a:srgbClr val="0D1B5E"/>
-          </a:solidFill>
+      </p:sp>
+      <p:sp>
+        <p:nvSpPr>
+          <p:cNvPr id="12" name="Text 9"/>
+          <p:cNvSpPr/>
+          <p:nvPr/>
+        </p:nvSpPr>
+        <p:spPr>
+          <a:xfrm>
+            <a:off x="8550554" y="1133856"/>
+            <a:ext cx="3135478" cy="411480"/>
+          </a:xfrm>
+          <a:prstGeom prst="rect">
+            <a:avLst/>
+          </a:prstGeom>
+          <a:noFill/>
           <a:ln/>
         </p:spPr>
         <p:txBody>
@@ -21926,7 +23528,7 @@
               <a:buNone/>
             </a:pPr>
             <a:r>
-              <a:rPr lang="en-US" sz="1200" b="1" dirty="0">
+              <a:rPr lang="en-US" sz="1300" b="1" dirty="0">
                 <a:solidFill>
                   <a:srgbClr val="FABB2E"/>
                 </a:solidFill>
@@ -21934,46 +23536,38 @@
                 <a:ea typeface="Trebuchet MS" pitchFamily="34" charset="-122"/>
                 <a:cs typeface="Trebuchet MS" pitchFamily="34" charset="-120"/>
               </a:rPr>
-              <a:t>WHAT ACTUALLY HAPPENS</a:t>
-            </a:r>
-            <a:endParaRPr lang="en-US" sz="1200" dirty="0"/>
-          </a:p>
-        </p:txBody>
-      </p:sp>
-      <p:sp>
-        <p:nvSpPr>
-          <p:cNvPr id="14" name="Text 12"/>
-          <p:cNvSpPr/>
-          <p:nvPr/>
-        </p:nvSpPr>
-        <p:spPr>
-          <a:xfrm>
-            <a:off x="6185916" y="1801368"/>
-            <a:ext cx="5591556" cy="3291840"/>
-          </a:xfrm>
-          <a:prstGeom prst="rect">
-            <a:avLst/>
-          </a:prstGeom>
-          <a:solidFill>
-            <a:srgbClr val="0D1B5E"/>
-          </a:solidFill>
-          <a:ln w="25400">
-            <a:solidFill>
-              <a:srgbClr val="FABB2E"/>
-            </a:solidFill>
-          </a:ln>
-        </p:spPr>
-        <p:txBody>
-          <a:bodyPr wrap="square" lIns="76200" tIns="76200" rIns="76200" bIns="76200" rtlCol="0" anchor="ctr">
-            <a:normAutofit/>
-          </a:bodyPr>
-          <a:lstStyle/>
-          <a:p>
-            <a:pPr algn="l" indent="0" marL="0">
-              <a:buNone/>
-            </a:pPr>
-            <a:r>
-              <a:rPr lang="en-US" sz="1600" b="1" dirty="0">
+              <a:t>Reading the graph</a:t>
+            </a:r>
+            <a:endParaRPr lang="en-US" sz="1300" dirty="0"/>
+          </a:p>
+        </p:txBody>
+      </p:sp>
+      <p:sp>
+        <p:nvSpPr>
+          <p:cNvPr id="13" name="Text 10"/>
+          <p:cNvSpPr/>
+          <p:nvPr/>
+        </p:nvSpPr>
+        <p:spPr>
+          <a:xfrm>
+            <a:off x="8550554" y="1591056"/>
+            <a:ext cx="3135478" cy="1395984"/>
+          </a:xfrm>
+          <a:prstGeom prst="rect">
+            <a:avLst/>
+          </a:prstGeom>
+          <a:noFill/>
+          <a:ln/>
+        </p:spPr>
+        <p:txBody>
+          <a:bodyPr wrap="square" rtlCol="0" anchor="t"/>
+          <a:lstStyle/>
+          <a:p>
+            <a:pPr indent="0" marL="0">
+              <a:buNone/>
+            </a:pPr>
+            <a:r>
+              <a:rPr lang="en-US" sz="1100" b="1" dirty="0">
                 <a:solidFill>
                   <a:srgbClr val="FABB2E"/>
                 </a:solidFill>
@@ -21981,76 +23575,174 @@
                 <a:ea typeface="Trebuchet MS" pitchFamily="34" charset="-122"/>
                 <a:cs typeface="Trebuchet MS" pitchFamily="34" charset="-120"/>
               </a:rPr>
-              <a:t>The powder finishes first, but both lose exactly the same total mass.</a:t>
-            </a:r>
-            <a:endParaRPr lang="en-US" sz="1600" dirty="0"/>
-          </a:p>
-        </p:txBody>
-      </p:sp>
-      <p:sp>
-        <p:nvSpPr>
-          <p:cNvPr id="15" name="Text 13"/>
-          <p:cNvSpPr/>
-          <p:nvPr/>
-        </p:nvSpPr>
-        <p:spPr>
-          <a:xfrm>
-            <a:off x="411480" y="5184648"/>
-            <a:ext cx="11365992" cy="1188720"/>
-          </a:xfrm>
-          <a:prstGeom prst="rect">
-            <a:avLst/>
-          </a:prstGeom>
-          <a:solidFill>
-            <a:srgbClr val="FFFFFF"/>
-          </a:solidFill>
-          <a:ln w="25400">
-            <a:solidFill>
-              <a:srgbClr val="FABB2E"/>
-            </a:solidFill>
-          </a:ln>
-        </p:spPr>
-        <p:txBody>
-          <a:bodyPr wrap="square" lIns="76200" tIns="76200" rIns="76200" bIns="76200" rtlCol="0" anchor="ctr">
-            <a:normAutofit/>
-          </a:bodyPr>
-          <a:lstStyle/>
-          <a:p>
-            <a:pPr algn="l" indent="0" marL="0">
-              <a:buNone/>
-            </a:pPr>
-            <a:r>
-              <a:rPr lang="en-US" sz="1300" b="1" dirty="0">
-                <a:solidFill>
-                  <a:srgbClr val="0D1B5E"/>
-                </a:solidFill>
-                <a:latin typeface="Trebuchet MS" pitchFamily="34" charset="0"/>
-                <a:ea typeface="Trebuchet MS" pitchFamily="34" charset="-122"/>
-                <a:cs typeface="Trebuchet MS" pitchFamily="34" charset="-120"/>
-              </a:rPr>
-              <a:t>WHY:  </a:t>
-            </a:r>
-            <a:pPr algn="l" indent="0" marL="0">
-              <a:buNone/>
-            </a:pPr>
-            <a:r>
-              <a:rPr lang="en-US" sz="1300" dirty="0">
-                <a:solidFill>
-                  <a:srgbClr val="1A1A2E"/>
-                </a:solidFill>
-                <a:latin typeface="Trebuchet MS" pitchFamily="34" charset="0"/>
-                <a:ea typeface="Trebuchet MS" pitchFamily="34" charset="-122"/>
-                <a:cs typeface="Trebuchet MS" pitchFamily="34" charset="-120"/>
-              </a:rPr>
-              <a:t>Surface area changes the rate, not the amount of product.</a:t>
-            </a:r>
-            <a:endParaRPr lang="en-US" sz="1300" dirty="0"/>
-          </a:p>
-        </p:txBody>
-      </p:sp>
-      <p:sp>
-        <p:nvSpPr>
-          <p:cNvPr id="16" name="Text 14"/>
+              <a:t>1  </a:t>
+            </a:r>
+            <a:pPr indent="0" marL="0">
+              <a:buNone/>
+            </a:pPr>
+            <a:r>
+              <a:rPr lang="en-US" sz="1100" dirty="0">
+                <a:solidFill>
+                  <a:srgbClr val="FFFFFF"/>
+                </a:solidFill>
+                <a:latin typeface="Trebuchet MS" pitchFamily="34" charset="0"/>
+                <a:ea typeface="Trebuchet MS" pitchFamily="34" charset="-122"/>
+                <a:cs typeface="Trebuchet MS" pitchFamily="34" charset="-120"/>
+              </a:rPr>
+              <a:t>The steepest gradient is at t = 0, where concentration is highest.</a:t>
+            </a:r>
+            <a:endParaRPr lang="en-US" sz="1100" dirty="0"/>
+          </a:p>
+        </p:txBody>
+      </p:sp>
+      <p:sp>
+        <p:nvSpPr>
+          <p:cNvPr id="14" name="Text 11"/>
+          <p:cNvSpPr/>
+          <p:nvPr/>
+        </p:nvSpPr>
+        <p:spPr>
+          <a:xfrm>
+            <a:off x="8550554" y="3032760"/>
+            <a:ext cx="3135478" cy="1395984"/>
+          </a:xfrm>
+          <a:prstGeom prst="rect">
+            <a:avLst/>
+          </a:prstGeom>
+          <a:noFill/>
+          <a:ln/>
+        </p:spPr>
+        <p:txBody>
+          <a:bodyPr wrap="square" rtlCol="0" anchor="t"/>
+          <a:lstStyle/>
+          <a:p>
+            <a:pPr indent="0" marL="0">
+              <a:buNone/>
+            </a:pPr>
+            <a:r>
+              <a:rPr lang="en-US" sz="1100" b="1" dirty="0">
+                <a:solidFill>
+                  <a:srgbClr val="FABB2E"/>
+                </a:solidFill>
+                <a:latin typeface="Trebuchet MS" pitchFamily="34" charset="0"/>
+                <a:ea typeface="Trebuchet MS" pitchFamily="34" charset="-122"/>
+                <a:cs typeface="Trebuchet MS" pitchFamily="34" charset="-120"/>
+              </a:rPr>
+              <a:t>2  </a:t>
+            </a:r>
+            <a:pPr indent="0" marL="0">
+              <a:buNone/>
+            </a:pPr>
+            <a:r>
+              <a:rPr lang="en-US" sz="1100" dirty="0">
+                <a:solidFill>
+                  <a:srgbClr val="FFFFFF"/>
+                </a:solidFill>
+                <a:latin typeface="Trebuchet MS" pitchFamily="34" charset="0"/>
+                <a:ea typeface="Trebuchet MS" pitchFamily="34" charset="-122"/>
+                <a:cs typeface="Trebuchet MS" pitchFamily="34" charset="-120"/>
+              </a:rPr>
+              <a:t>The gradient falls steadily as the acid is used up.</a:t>
+            </a:r>
+            <a:endParaRPr lang="en-US" sz="1100" dirty="0"/>
+          </a:p>
+        </p:txBody>
+      </p:sp>
+      <p:sp>
+        <p:nvSpPr>
+          <p:cNvPr id="15" name="Text 12"/>
+          <p:cNvSpPr/>
+          <p:nvPr/>
+        </p:nvSpPr>
+        <p:spPr>
+          <a:xfrm>
+            <a:off x="8550554" y="4474464"/>
+            <a:ext cx="3135478" cy="1395984"/>
+          </a:xfrm>
+          <a:prstGeom prst="rect">
+            <a:avLst/>
+          </a:prstGeom>
+          <a:noFill/>
+          <a:ln/>
+        </p:spPr>
+        <p:txBody>
+          <a:bodyPr wrap="square" rtlCol="0" anchor="t"/>
+          <a:lstStyle/>
+          <a:p>
+            <a:pPr indent="0" marL="0">
+              <a:buNone/>
+            </a:pPr>
+            <a:r>
+              <a:rPr lang="en-US" sz="1100" b="1" dirty="0">
+                <a:solidFill>
+                  <a:srgbClr val="FABB2E"/>
+                </a:solidFill>
+                <a:latin typeface="Trebuchet MS" pitchFamily="34" charset="0"/>
+                <a:ea typeface="Trebuchet MS" pitchFamily="34" charset="-122"/>
+                <a:cs typeface="Trebuchet MS" pitchFamily="34" charset="-120"/>
+              </a:rPr>
+              <a:t>3  </a:t>
+            </a:r>
+            <a:pPr indent="0" marL="0">
+              <a:buNone/>
+            </a:pPr>
+            <a:r>
+              <a:rPr lang="en-US" sz="1100" dirty="0">
+                <a:solidFill>
+                  <a:srgbClr val="FFFFFF"/>
+                </a:solidFill>
+                <a:latin typeface="Trebuchet MS" pitchFamily="34" charset="0"/>
+                <a:ea typeface="Trebuchet MS" pitchFamily="34" charset="-122"/>
+                <a:cs typeface="Trebuchet MS" pitchFamily="34" charset="-120"/>
+              </a:rPr>
+              <a:t>The curve flattens when one reactant runs out.</a:t>
+            </a:r>
+            <a:endParaRPr lang="en-US" sz="1100" dirty="0"/>
+          </a:p>
+        </p:txBody>
+      </p:sp>
+      <p:sp>
+        <p:nvSpPr>
+          <p:cNvPr id="16" name="Text 13"/>
+          <p:cNvSpPr/>
+          <p:nvPr/>
+        </p:nvSpPr>
+        <p:spPr>
+          <a:xfrm>
+            <a:off x="8550554" y="5824728"/>
+            <a:ext cx="3135478" cy="640080"/>
+          </a:xfrm>
+          <a:prstGeom prst="rect">
+            <a:avLst/>
+          </a:prstGeom>
+          <a:noFill/>
+          <a:ln/>
+        </p:spPr>
+        <p:txBody>
+          <a:bodyPr wrap="square" rtlCol="0" anchor="ctr"/>
+          <a:lstStyle/>
+          <a:p>
+            <a:pPr algn="ctr" indent="0" marL="0">
+              <a:buNone/>
+            </a:pPr>
+            <a:r>
+              <a:rPr lang="en-US" sz="1100" i="1" dirty="0">
+                <a:solidFill>
+                  <a:srgbClr val="FABB2E"/>
+                </a:solidFill>
+                <a:latin typeface="Trebuchet MS" pitchFamily="34" charset="0"/>
+                <a:ea typeface="Trebuchet MS" pitchFamily="34" charset="-122"/>
+                <a:cs typeface="Trebuchet MS" pitchFamily="34" charset="-120"/>
+              </a:rPr>
+              <a:t>Same final volume, different time to get there.</a:t>
+            </a:r>
+            <a:endParaRPr lang="en-US" sz="1100" dirty="0"/>
+          </a:p>
+        </p:txBody>
+      </p:sp>
+      <p:sp>
+        <p:nvSpPr>
+          <p:cNvPr id="17" name="Text 14"/>
           <p:cNvSpPr/>
           <p:nvPr/>
         </p:nvSpPr>
@@ -22117,7 +23809,7 @@
     <p:bg>
       <p:bgPr>
         <a:solidFill>
-          <a:srgbClr val="4A148C"/>
+          <a:srgbClr val="EDF2FA"/>
         </a:solidFill>
       </p:bgPr>
     </p:bg>
@@ -22409,34 +24101,36 @@
         </p:nvSpPr>
         <p:spPr>
           <a:xfrm>
-            <a:off x="0" y="1796796"/>
-            <a:ext cx="12188952" cy="822960"/>
-          </a:xfrm>
-          <a:prstGeom prst="rect">
-            <a:avLst/>
-          </a:prstGeom>
-          <a:noFill/>
-          <a:ln/>
-        </p:spPr>
-        <p:txBody>
-          <a:bodyPr wrap="square" rtlCol="0" anchor="ctr"/>
+            <a:off x="0" y="649224"/>
+            <a:ext cx="12188952" cy="347472"/>
+          </a:xfrm>
+          <a:prstGeom prst="rect">
+            <a:avLst/>
+          </a:prstGeom>
+          <a:solidFill>
+            <a:srgbClr val="E65100"/>
+          </a:solidFill>
+          <a:ln/>
+        </p:spPr>
+        <p:txBody>
+          <a:bodyPr wrap="square" lIns="101600" tIns="101600" rIns="101600" bIns="101600" rtlCol="0" anchor="ctr"/>
           <a:lstStyle/>
           <a:p>
             <a:pPr algn="ctr" indent="0" marL="0">
               <a:buNone/>
             </a:pPr>
             <a:r>
-              <a:rPr lang="en-US" sz="4000" b="1" dirty="0">
-                <a:solidFill>
-                  <a:srgbClr val="FABB2E"/>
-                </a:solidFill>
-                <a:latin typeface="Trebuchet MS" pitchFamily="34" charset="0"/>
-                <a:ea typeface="Trebuchet MS" pitchFamily="34" charset="-122"/>
-                <a:cs typeface="Trebuchet MS" pitchFamily="34" charset="-120"/>
-              </a:rPr>
-              <a:t>IPEVO Visualiser</a:t>
-            </a:r>
-            <a:endParaRPr lang="en-US" sz="4000" dirty="0"/>
+              <a:rPr lang="en-US" sz="1300" b="1" dirty="0">
+                <a:solidFill>
+                  <a:srgbClr val="FFFFFF"/>
+                </a:solidFill>
+                <a:latin typeface="Trebuchet MS" pitchFamily="34" charset="0"/>
+                <a:ea typeface="Trebuchet MS" pitchFamily="34" charset="-122"/>
+                <a:cs typeface="Trebuchet MS" pitchFamily="34" charset="-120"/>
+              </a:rPr>
+              <a:t>BUILD · MAKE A PREDICTION</a:t>
+            </a:r>
+            <a:endParaRPr lang="en-US" sz="1300" dirty="0"/>
           </a:p>
         </p:txBody>
       </p:sp>
@@ -22448,53 +24142,14 @@
         </p:nvSpPr>
         <p:spPr>
           <a:xfrm>
-            <a:off x="0" y="2802636"/>
-            <a:ext cx="12188952" cy="320040"/>
-          </a:xfrm>
-          <a:prstGeom prst="rect">
-            <a:avLst/>
-          </a:prstGeom>
-          <a:noFill/>
-          <a:ln/>
-        </p:spPr>
-        <p:txBody>
-          <a:bodyPr wrap="square" rtlCol="0" anchor="ctr"/>
-          <a:lstStyle/>
-          <a:p>
-            <a:pPr algn="ctr" indent="0" marL="0">
-              <a:buNone/>
-            </a:pPr>
-            <a:r>
-              <a:rPr lang="en-US" sz="1400" dirty="0">
-                <a:solidFill>
-                  <a:srgbClr val="FFFFFF"/>
-                </a:solidFill>
-                <a:latin typeface="Trebuchet MS" pitchFamily="34" charset="0"/>
-                <a:ea typeface="Trebuchet MS" pitchFamily="34" charset="-122"/>
-                <a:cs typeface="Trebuchet MS" pitchFamily="34" charset="-120"/>
-              </a:rPr>
-              <a:t>Model rate calculations under the visualiser</a:t>
-            </a:r>
-            <a:endParaRPr lang="en-US" sz="1400" dirty="0"/>
-          </a:p>
-        </p:txBody>
-      </p:sp>
-      <p:sp>
-        <p:nvSpPr>
-          <p:cNvPr id="11" name="Text 9"/>
-          <p:cNvSpPr/>
-          <p:nvPr/>
-        </p:nvSpPr>
-        <p:spPr>
-          <a:xfrm>
-            <a:off x="2742514" y="3351276"/>
-            <a:ext cx="6703924" cy="640080"/>
-          </a:xfrm>
-          <a:prstGeom prst="rect">
-            <a:avLst/>
-          </a:prstGeom>
-          <a:solidFill>
-            <a:srgbClr val="FFFFFF"/>
+            <a:off x="411480" y="1088136"/>
+            <a:ext cx="11365992" cy="685800"/>
+          </a:xfrm>
+          <a:prstGeom prst="rect">
+            <a:avLst/>
+          </a:prstGeom>
+          <a:solidFill>
+            <a:srgbClr val="FFFDE7"/>
           </a:solidFill>
           <a:ln w="25400">
             <a:solidFill>
@@ -22508,26 +24163,107 @@
           </a:bodyPr>
           <a:lstStyle/>
           <a:p>
+            <a:pPr algn="l" indent="0" marL="0">
+              <a:buNone/>
+            </a:pPr>
+            <a:r>
+              <a:rPr lang="en-US" sz="1300" i="1" dirty="0">
+                <a:solidFill>
+                  <a:srgbClr val="1A1A2E"/>
+                </a:solidFill>
+                <a:latin typeface="Trebuchet MS" pitchFamily="34" charset="0"/>
+                <a:ea typeface="Trebuchet MS" pitchFamily="34" charset="-122"/>
+                <a:cs typeface="Trebuchet MS" pitchFamily="34" charset="-120"/>
+              </a:rPr>
+              <a:t>Two flasks hold the same mass of marble and the same acid. One holds chips, the other holds powder.</a:t>
+            </a:r>
+            <a:endParaRPr lang="en-US" sz="1300" dirty="0"/>
+          </a:p>
+        </p:txBody>
+      </p:sp>
+      <p:sp>
+        <p:nvSpPr>
+          <p:cNvPr id="11" name="Text 9"/>
+          <p:cNvSpPr/>
+          <p:nvPr/>
+        </p:nvSpPr>
+        <p:spPr>
+          <a:xfrm>
+            <a:off x="411480" y="1865376"/>
+            <a:ext cx="11365992" cy="1188720"/>
+          </a:xfrm>
+          <a:prstGeom prst="rect">
+            <a:avLst/>
+          </a:prstGeom>
+          <a:solidFill>
+            <a:srgbClr val="E65100"/>
+          </a:solidFill>
+          <a:ln/>
+        </p:spPr>
+        <p:txBody>
+          <a:bodyPr wrap="square" lIns="152400" tIns="152400" rIns="152400" bIns="152400" rtlCol="0" anchor="ctr"/>
+          <a:lstStyle/>
+          <a:p>
             <a:pPr algn="ctr" indent="0" marL="0">
               <a:buNone/>
             </a:pPr>
             <a:r>
-              <a:rPr lang="en-US" sz="1600" u="sng" dirty="0">
-                <a:solidFill>
-                  <a:srgbClr val="00838F"/>
-                </a:solidFill>
-                <a:latin typeface="Trebuchet MS" pitchFamily="34" charset="0"/>
-                <a:ea typeface="Trebuchet MS" pitchFamily="34" charset="-122"/>
-                <a:cs typeface="Trebuchet MS" pitchFamily="34" charset="-120"/>
-                <a:hlinkClick r:id="rId1" invalidUrl="" action="" tgtFrame="" tooltip="" history="1" highlightClick="0" endSnd="0">
-                  <a:extLst>
-                    <a:ext uri="{A12FA001-AC4F-418D-AE19-62706E023703}">
-                      <ahyp:hlinkClr xmlns:ahyp="http://schemas.microsoft.com/office/drawing/2018/hyperlinkcolor" val="tx"/>
-                    </a:ext>
-                  </a:extLst>
-                </a:hlinkClick>
-              </a:rPr>
-              <a:t>https://apps.ipevo.com/pwa/visualizer.app/</a:t>
+              <a:rPr lang="en-US" sz="2200" b="1" dirty="0">
+                <a:solidFill>
+                  <a:srgbClr val="FFFFFF"/>
+                </a:solidFill>
+                <a:latin typeface="Trebuchet MS" pitchFamily="34" charset="0"/>
+                <a:ea typeface="Trebuchet MS" pitchFamily="34" charset="-122"/>
+                <a:cs typeface="Trebuchet MS" pitchFamily="34" charset="-120"/>
+              </a:rPr>
+              <a:t>Which flask stops bubbling first, and will they lose the same total mass?</a:t>
+            </a:r>
+            <a:endParaRPr lang="en-US" sz="2200" dirty="0"/>
+          </a:p>
+        </p:txBody>
+      </p:sp>
+      <p:sp>
+        <p:nvSpPr>
+          <p:cNvPr id="12" name="Text 10"/>
+          <p:cNvSpPr/>
+          <p:nvPr/>
+        </p:nvSpPr>
+        <p:spPr>
+          <a:xfrm>
+            <a:off x="411480" y="3145536"/>
+            <a:ext cx="11365992" cy="2816352"/>
+          </a:xfrm>
+          <a:prstGeom prst="rect">
+            <a:avLst/>
+          </a:prstGeom>
+          <a:solidFill>
+            <a:srgbClr val="FFFDE7"/>
+          </a:solidFill>
+          <a:ln w="25400">
+            <a:solidFill>
+              <a:srgbClr val="FABB2E"/>
+            </a:solidFill>
+          </a:ln>
+        </p:spPr>
+        <p:txBody>
+          <a:bodyPr wrap="square" lIns="76200" tIns="76200" rIns="76200" bIns="76200" rtlCol="0" anchor="ctr">
+            <a:normAutofit/>
+          </a:bodyPr>
+          <a:lstStyle/>
+          <a:p>
+            <a:pPr algn="ctr" indent="0" marL="0">
+              <a:buNone/>
+            </a:pPr>
+            <a:r>
+              <a:rPr lang="en-US" sz="1400" i="1" dirty="0">
+                <a:solidFill>
+                  <a:srgbClr val="555555"/>
+                </a:solidFill>
+                <a:latin typeface="Trebuchet MS" pitchFamily="34" charset="0"/>
+                <a:ea typeface="Trebuchet MS" pitchFamily="34" charset="-122"/>
+                <a:cs typeface="Trebuchet MS" pitchFamily="34" charset="-120"/>
+              </a:rPr>
+              <a:t>Write your prediction in your book now.</a:t>
             </a:r>
             <a:endParaRPr lang="en-US" sz="1300" dirty="0"/>
           </a:p>
@@ -22535,19 +24271,21 @@
       </p:sp>
       <p:sp>
         <p:nvSpPr>
-          <p:cNvPr id="12" name="Text 10"/>
-          <p:cNvSpPr/>
-          <p:nvPr/>
-        </p:nvSpPr>
-        <p:spPr>
-          <a:xfrm>
-            <a:off x="0" y="4128516"/>
-            <a:ext cx="12188952" cy="274320"/>
-          </a:xfrm>
-          <a:prstGeom prst="rect">
-            <a:avLst/>
-          </a:prstGeom>
-          <a:noFill/>
+          <p:cNvPr id="13" name="Text 11"/>
+          <p:cNvSpPr/>
+          <p:nvPr/>
+        </p:nvSpPr>
+        <p:spPr>
+          <a:xfrm>
+            <a:off x="411480" y="6053328"/>
+            <a:ext cx="11365992" cy="411480"/>
+          </a:xfrm>
+          <a:prstGeom prst="rect">
+            <a:avLst/>
+          </a:prstGeom>
+          <a:solidFill>
+            <a:srgbClr val="0D1B5E"/>
+          </a:solidFill>
           <a:ln/>
         </p:spPr>
         <p:txBody>
@@ -22558,23 +24296,23 @@
               <a:buNone/>
             </a:pPr>
             <a:r>
-              <a:rPr lang="en-US" sz="1100" i="1" dirty="0">
-                <a:solidFill>
-                  <a:srgbClr val="FFFFFF"/>
-                </a:solidFill>
-                <a:latin typeface="Trebuchet MS" pitchFamily="34" charset="0"/>
-                <a:ea typeface="Trebuchet MS" pitchFamily="34" charset="-122"/>
-                <a:cs typeface="Trebuchet MS" pitchFamily="34" charset="-120"/>
-              </a:rPr>
-              <a:t>↑  Click to open</a:t>
-            </a:r>
-            <a:endParaRPr lang="en-US" sz="1100" dirty="0"/>
-          </a:p>
-        </p:txBody>
-      </p:sp>
-      <p:sp>
-        <p:nvSpPr>
-          <p:cNvPr id="13" name="Text 11"/>
+              <a:rPr lang="en-US" sz="1200" b="1" dirty="0">
+                <a:solidFill>
+                  <a:srgbClr val="FFFFFF"/>
+                </a:solidFill>
+                <a:latin typeface="Trebuchet MS" pitchFamily="34" charset="0"/>
+                <a:ea typeface="Trebuchet MS" pitchFamily="34" charset="-122"/>
+                <a:cs typeface="Trebuchet MS" pitchFamily="34" charset="-120"/>
+              </a:rPr>
+              <a:t>Commit your prediction before seeing the answer</a:t>
+            </a:r>
+            <a:endParaRPr lang="en-US" sz="1200" dirty="0"/>
+          </a:p>
+        </p:txBody>
+      </p:sp>
+      <p:sp>
+        <p:nvSpPr>
+          <p:cNvPr id="14" name="Text 12"/>
           <p:cNvSpPr/>
           <p:nvPr/>
         </p:nvSpPr>
@@ -23230,7 +24968,7 @@
             <a:avLst/>
           </a:prstGeom>
           <a:solidFill>
-            <a:srgbClr val="152347"/>
+            <a:srgbClr val="E65100"/>
           </a:solidFill>
           <a:ln/>
         </p:spPr>
@@ -23242,7 +24980,7 @@
               <a:buNone/>
             </a:pPr>
             <a:r>
-              <a:rPr lang="en-US" sz="1000" dirty="0">
+              <a:rPr lang="en-US" sz="1100" b="1" dirty="0">
                 <a:solidFill>
                   <a:srgbClr val="FFFFFF"/>
                 </a:solidFill>
@@ -23252,7 +24990,7 @@
               </a:rPr>
               <a:t>BUILD</a:t>
             </a:r>
-            <a:endParaRPr lang="en-US" sz="1000" dirty="0"/>
+            <a:endParaRPr lang="en-US" sz="1100" dirty="0"/>
           </a:p>
         </p:txBody>
       </p:sp>
@@ -23271,7 +25009,7 @@
             <a:avLst/>
           </a:prstGeom>
           <a:solidFill>
-            <a:srgbClr val="B71C1C"/>
+            <a:srgbClr val="152347"/>
           </a:solidFill>
           <a:ln/>
         </p:spPr>
@@ -23283,7 +25021,7 @@
               <a:buNone/>
             </a:pPr>
             <a:r>
-              <a:rPr lang="en-US" sz="1100" b="1" dirty="0">
+              <a:rPr lang="en-US" sz="1000" dirty="0">
                 <a:solidFill>
                   <a:srgbClr val="FFFFFF"/>
                 </a:solidFill>
@@ -23293,7 +25031,7 @@
               </a:rPr>
               <a:t>APPLY</a:t>
             </a:r>
-            <a:endParaRPr lang="en-US" sz="1100" dirty="0"/>
+            <a:endParaRPr lang="en-US" sz="1000" dirty="0"/>
           </a:p>
         </p:txBody>
       </p:sp>
@@ -23373,7 +25111,7 @@
             <a:avLst/>
           </a:prstGeom>
           <a:solidFill>
-            <a:srgbClr val="B71C1C"/>
+            <a:srgbClr val="E65100"/>
           </a:solidFill>
           <a:ln/>
         </p:spPr>
@@ -23393,7 +25131,7 @@
                 <a:ea typeface="Trebuchet MS" pitchFamily="34" charset="-122"/>
                 <a:cs typeface="Trebuchet MS" pitchFamily="34" charset="-120"/>
               </a:rPr>
-              <a:t>APPLY · CHOOSE YOUR LEVEL</a:t>
+              <a:t>BUILD · CHECK YOUR PREDICTION</a:t>
             </a:r>
             <a:endParaRPr lang="en-US" sz="1300" dirty="0"/>
           </a:p>
@@ -23407,36 +25145,36 @@
         </p:nvSpPr>
         <p:spPr>
           <a:xfrm>
-            <a:off x="7982712" y="649224"/>
-            <a:ext cx="4114800" cy="347472"/>
-          </a:xfrm>
-          <a:prstGeom prst="rect">
-            <a:avLst/>
-          </a:prstGeom>
-          <a:solidFill>
-            <a:srgbClr val="0D1B5E"/>
-          </a:solidFill>
-          <a:ln/>
-        </p:spPr>
-        <p:txBody>
-          <a:bodyPr wrap="square" lIns="76200" tIns="76200" rIns="76200" bIns="76200" rtlCol="0" anchor="ctr"/>
-          <a:lstStyle/>
-          <a:p>
-            <a:pPr algn="r" indent="0" marL="0">
-              <a:buNone/>
-            </a:pPr>
-            <a:r>
-              <a:rPr lang="en-US" sz="1050" b="1" dirty="0">
-                <a:solidFill>
-                  <a:srgbClr val="FABB2E"/>
-                </a:solidFill>
-                <a:latin typeface="Trebuchet MS" pitchFamily="34" charset="0"/>
-                <a:ea typeface="Trebuchet MS" pitchFamily="34" charset="-122"/>
-                <a:cs typeface="Trebuchet MS" pitchFamily="34" charset="-120"/>
-              </a:rPr>
-              <a:t>Read more — AQA Chemistry (Kerboodle), pp. 130–136</a:t>
-            </a:r>
-            <a:endParaRPr lang="en-US" sz="1050" dirty="0"/>
+            <a:off x="0" y="1014984"/>
+            <a:ext cx="12188952" cy="347472"/>
+          </a:xfrm>
+          <a:prstGeom prst="rect">
+            <a:avLst/>
+          </a:prstGeom>
+          <a:solidFill>
+            <a:srgbClr val="6A0DAD"/>
+          </a:solidFill>
+          <a:ln/>
+        </p:spPr>
+        <p:txBody>
+          <a:bodyPr wrap="square" lIns="101600" tIns="101600" rIns="101600" bIns="101600" rtlCol="0" anchor="ctr"/>
+          <a:lstStyle/>
+          <a:p>
+            <a:pPr algn="l" indent="0" marL="0">
+              <a:buNone/>
+            </a:pPr>
+            <a:r>
+              <a:rPr lang="en-US" sz="1300" b="1" dirty="0">
+                <a:solidFill>
+                  <a:srgbClr val="FFFFFF"/>
+                </a:solidFill>
+                <a:latin typeface="Trebuchet MS" pitchFamily="34" charset="0"/>
+                <a:ea typeface="Trebuchet MS" pitchFamily="34" charset="-122"/>
+                <a:cs typeface="Trebuchet MS" pitchFamily="34" charset="-120"/>
+              </a:rPr>
+              <a:t>☞  Purple pen time · mark and correct your answers</a:t>
+            </a:r>
+            <a:endParaRPr lang="en-US" sz="1300" dirty="0"/>
           </a:p>
         </p:txBody>
       </p:sp>
@@ -23448,14 +25186,14 @@
         </p:nvSpPr>
         <p:spPr>
           <a:xfrm>
-            <a:off x="411480" y="1088136"/>
-            <a:ext cx="5614416" cy="384048"/>
-          </a:xfrm>
-          <a:prstGeom prst="rect">
-            <a:avLst/>
-          </a:prstGeom>
-          <a:solidFill>
-            <a:srgbClr val="2E7D32"/>
+            <a:off x="411480" y="1453896"/>
+            <a:ext cx="5591556" cy="347472"/>
+          </a:xfrm>
+          <a:prstGeom prst="rect">
+            <a:avLst/>
+          </a:prstGeom>
+          <a:solidFill>
+            <a:srgbClr val="E65100"/>
           </a:solidFill>
           <a:ln/>
         </p:spPr>
@@ -23467,17 +25205,17 @@
               <a:buNone/>
             </a:pPr>
             <a:r>
-              <a:rPr lang="en-US" sz="1300" b="1" dirty="0">
-                <a:solidFill>
-                  <a:srgbClr val="FFFFFF"/>
-                </a:solidFill>
-                <a:latin typeface="Trebuchet MS" pitchFamily="34" charset="0"/>
-                <a:ea typeface="Trebuchet MS" pitchFamily="34" charset="-122"/>
-                <a:cs typeface="Trebuchet MS" pitchFamily="34" charset="-120"/>
-              </a:rPr>
-              <a:t>DEVELOPING</a:t>
-            </a:r>
-            <a:endParaRPr lang="en-US" sz="1300" dirty="0"/>
+              <a:rPr lang="en-US" sz="1200" b="1" dirty="0">
+                <a:solidFill>
+                  <a:srgbClr val="FFFFFF"/>
+                </a:solidFill>
+                <a:latin typeface="Trebuchet MS" pitchFamily="34" charset="0"/>
+                <a:ea typeface="Trebuchet MS" pitchFamily="34" charset="-122"/>
+                <a:cs typeface="Trebuchet MS" pitchFamily="34" charset="-120"/>
+              </a:rPr>
+              <a:t>YOUR PREDICTION</a:t>
+            </a:r>
+            <a:endParaRPr lang="en-US" sz="1200" dirty="0"/>
           </a:p>
         </p:txBody>
       </p:sp>
@@ -23489,8 +25227,8 @@
         </p:nvSpPr>
         <p:spPr>
           <a:xfrm>
-            <a:off x="411480" y="1472184"/>
-            <a:ext cx="5614416" cy="2258568"/>
+            <a:off x="411480" y="1801368"/>
+            <a:ext cx="5591556" cy="3291840"/>
           </a:xfrm>
           <a:prstGeom prst="rect">
             <a:avLst/>
@@ -23505,7 +25243,7 @@
           </a:ln>
         </p:spPr>
         <p:txBody>
-          <a:bodyPr wrap="square" lIns="76200" tIns="76200" rIns="76200" bIns="76200" rtlCol="0" anchor="t">
+          <a:bodyPr wrap="square" lIns="76200" tIns="76200" rIns="76200" bIns="76200" rtlCol="0" anchor="ctr">
             <a:normAutofit/>
           </a:bodyPr>
           <a:lstStyle/>
@@ -23514,7 +25252,7 @@
               <a:buNone/>
             </a:pPr>
             <a:r>
-              <a:rPr lang="en-US" sz="1800" b="1" dirty="0">
+              <a:rPr lang="en-US" sz="1600" i="1" dirty="0">
                 <a:solidFill>
                   <a:srgbClr val="1A1A2E"/>
                 </a:solidFill>
@@ -23522,94 +25260,9 @@
                 <a:ea typeface="Trebuchet MS" pitchFamily="34" charset="-122"/>
                 <a:cs typeface="Trebuchet MS" pitchFamily="34" charset="-120"/>
               </a:rPr>
-              <a:t>Q1  </a:t>
-            </a:r>
-            <a:pPr algn="l" indent="0" marL="0">
-              <a:spcAft>
-                <a:spcPts val="800"/>
-              </a:spcAft>
-              <a:buNone/>
-            </a:pPr>
-            <a:r>
-              <a:rPr lang="en-US" sz="1800" dirty="0">
-                <a:solidFill>
-                  <a:srgbClr val="1A1A2E"/>
-                </a:solidFill>
-                <a:latin typeface="Trebuchet MS" pitchFamily="34" charset="0"/>
-                <a:ea typeface="Trebuchet MS" pitchFamily="34" charset="-122"/>
-                <a:cs typeface="Trebuchet MS" pitchFamily="34" charset="-120"/>
-              </a:rPr>
-              <a:t>Name three factors that change the rate of a reaction.  [3 marks]</a:t>
-            </a:r>
-            <a:endParaRPr lang="en-US" sz="1800" dirty="0"/>
-          </a:p>
-          <a:p>
-            <a:pPr algn="l" indent="0" marL="0">
-              <a:buNone/>
-            </a:pPr>
-            <a:r>
-              <a:rPr lang="en-US" sz="1800" b="1" dirty="0">
-                <a:solidFill>
-                  <a:srgbClr val="1A1A2E"/>
-                </a:solidFill>
-                <a:latin typeface="Trebuchet MS" pitchFamily="34" charset="0"/>
-                <a:ea typeface="Trebuchet MS" pitchFamily="34" charset="-122"/>
-                <a:cs typeface="Trebuchet MS" pitchFamily="34" charset="-120"/>
-              </a:rPr>
-              <a:t>Q2  </a:t>
-            </a:r>
-            <a:pPr algn="l" indent="0" marL="0">
-              <a:spcAft>
-                <a:spcPts val="800"/>
-              </a:spcAft>
-              <a:buNone/>
-            </a:pPr>
-            <a:r>
-              <a:rPr lang="en-US" sz="1800" dirty="0">
-                <a:solidFill>
-                  <a:srgbClr val="1A1A2E"/>
-                </a:solidFill>
-                <a:latin typeface="Trebuchet MS" pitchFamily="34" charset="0"/>
-                <a:ea typeface="Trebuchet MS" pitchFamily="34" charset="-122"/>
-                <a:cs typeface="Trebuchet MS" pitchFamily="34" charset="-120"/>
-              </a:rPr>
-              <a:t>State what a catalyst does.  [1 mark]</a:t>
-            </a:r>
-            <a:endParaRPr lang="en-US" sz="1800" dirty="0"/>
-          </a:p>
-          <a:p>
-            <a:pPr algn="l" indent="0" marL="0">
-              <a:buNone/>
-            </a:pPr>
-            <a:r>
-              <a:rPr lang="en-US" sz="1800" b="1" dirty="0">
-                <a:solidFill>
-                  <a:srgbClr val="1A1A2E"/>
-                </a:solidFill>
-                <a:latin typeface="Trebuchet MS" pitchFamily="34" charset="0"/>
-                <a:ea typeface="Trebuchet MS" pitchFamily="34" charset="-122"/>
-                <a:cs typeface="Trebuchet MS" pitchFamily="34" charset="-120"/>
-              </a:rPr>
-              <a:t>Q3  </a:t>
-            </a:r>
-            <a:pPr algn="l" indent="0" marL="0">
-              <a:spcAft>
-                <a:spcPts val="800"/>
-              </a:spcAft>
-              <a:buNone/>
-            </a:pPr>
-            <a:r>
-              <a:rPr lang="en-US" sz="1800" dirty="0">
-                <a:solidFill>
-                  <a:srgbClr val="1A1A2E"/>
-                </a:solidFill>
-                <a:latin typeface="Trebuchet MS" pitchFamily="34" charset="0"/>
-                <a:ea typeface="Trebuchet MS" pitchFamily="34" charset="-122"/>
-                <a:cs typeface="Trebuchet MS" pitchFamily="34" charset="-120"/>
-              </a:rPr>
-              <a:t>Give the unit of rate measured by gas volume.  [1 mark]</a:t>
-            </a:r>
-            <a:endParaRPr lang="en-US" sz="1800" dirty="0"/>
+              <a:t>Which flask stops bubbling first, and will they lose the same total mass?</a:t>
+            </a:r>
+            <a:endParaRPr lang="en-US" sz="1600" dirty="0"/>
           </a:p>
         </p:txBody>
       </p:sp>
@@ -23621,14 +25274,14 @@
         </p:nvSpPr>
         <p:spPr>
           <a:xfrm>
-            <a:off x="6163056" y="1088136"/>
-            <a:ext cx="5614416" cy="384048"/>
-          </a:xfrm>
-          <a:prstGeom prst="rect">
-            <a:avLst/>
-          </a:prstGeom>
-          <a:solidFill>
-            <a:srgbClr val="E65100"/>
+            <a:off x="6185916" y="1453896"/>
+            <a:ext cx="5591556" cy="347472"/>
+          </a:xfrm>
+          <a:prstGeom prst="rect">
+            <a:avLst/>
+          </a:prstGeom>
+          <a:solidFill>
+            <a:srgbClr val="0D1B5E"/>
           </a:solidFill>
           <a:ln/>
         </p:spPr>
@@ -23640,17 +25293,17 @@
               <a:buNone/>
             </a:pPr>
             <a:r>
-              <a:rPr lang="en-US" sz="1300" b="1" dirty="0">
-                <a:solidFill>
-                  <a:srgbClr val="FFFFFF"/>
-                </a:solidFill>
-                <a:latin typeface="Trebuchet MS" pitchFamily="34" charset="0"/>
-                <a:ea typeface="Trebuchet MS" pitchFamily="34" charset="-122"/>
-                <a:cs typeface="Trebuchet MS" pitchFamily="34" charset="-120"/>
-              </a:rPr>
-              <a:t>REACHING</a:t>
-            </a:r>
-            <a:endParaRPr lang="en-US" sz="1300" dirty="0"/>
+              <a:rPr lang="en-US" sz="1200" b="1" dirty="0">
+                <a:solidFill>
+                  <a:srgbClr val="FABB2E"/>
+                </a:solidFill>
+                <a:latin typeface="Trebuchet MS" pitchFamily="34" charset="0"/>
+                <a:ea typeface="Trebuchet MS" pitchFamily="34" charset="-122"/>
+                <a:cs typeface="Trebuchet MS" pitchFamily="34" charset="-120"/>
+              </a:rPr>
+              <a:t>WHAT ACTUALLY HAPPENS</a:t>
+            </a:r>
+            <a:endParaRPr lang="en-US" sz="1200" dirty="0"/>
           </a:p>
         </p:txBody>
       </p:sp>
@@ -23662,14 +25315,14 @@
         </p:nvSpPr>
         <p:spPr>
           <a:xfrm>
-            <a:off x="6163056" y="1472184"/>
-            <a:ext cx="5614416" cy="2258568"/>
-          </a:xfrm>
-          <a:prstGeom prst="rect">
-            <a:avLst/>
-          </a:prstGeom>
-          <a:solidFill>
-            <a:srgbClr val="FFFFFF"/>
+            <a:off x="6185916" y="1801368"/>
+            <a:ext cx="5591556" cy="3291840"/>
+          </a:xfrm>
+          <a:prstGeom prst="rect">
+            <a:avLst/>
+          </a:prstGeom>
+          <a:solidFill>
+            <a:srgbClr val="0D1B5E"/>
           </a:solidFill>
           <a:ln w="25400">
             <a:solidFill>
@@ -23678,7 +25331,7 @@
           </a:ln>
         </p:spPr>
         <p:txBody>
-          <a:bodyPr wrap="square" lIns="76200" tIns="76200" rIns="76200" bIns="76200" rtlCol="0" anchor="t">
+          <a:bodyPr wrap="square" lIns="76200" tIns="76200" rIns="76200" bIns="76200" rtlCol="0" anchor="ctr">
             <a:normAutofit/>
           </a:bodyPr>
           <a:lstStyle/>
@@ -23687,102 +25340,17 @@
               <a:buNone/>
             </a:pPr>
             <a:r>
-              <a:rPr lang="en-US" sz="1800" b="1" dirty="0">
-                <a:solidFill>
-                  <a:srgbClr val="1A1A2E"/>
-                </a:solidFill>
-                <a:latin typeface="Trebuchet MS" pitchFamily="34" charset="0"/>
-                <a:ea typeface="Trebuchet MS" pitchFamily="34" charset="-122"/>
-                <a:cs typeface="Trebuchet MS" pitchFamily="34" charset="-120"/>
-              </a:rPr>
-              <a:t>Q1  </a:t>
-            </a:r>
-            <a:pPr algn="l" indent="0" marL="0">
-              <a:spcAft>
-                <a:spcPts val="800"/>
-              </a:spcAft>
-              <a:buNone/>
-            </a:pPr>
-            <a:r>
-              <a:rPr lang="en-US" sz="1800" dirty="0">
-                <a:solidFill>
-                  <a:srgbClr val="1A1A2E"/>
-                </a:solidFill>
-                <a:latin typeface="Trebuchet MS" pitchFamily="34" charset="0"/>
-                <a:ea typeface="Trebuchet MS" pitchFamily="34" charset="-122"/>
-                <a:cs typeface="Trebuchet MS" pitchFamily="34" charset="-120"/>
-              </a:rPr>
-              <a:t>Explain why powdered marble reacts faster than chips.  [3 marks]</a:t>
-            </a:r>
-            <a:endParaRPr lang="en-US" sz="1800" dirty="0"/>
-          </a:p>
-          <a:p>
-            <a:pPr algn="l" indent="0" marL="0">
-              <a:buNone/>
-            </a:pPr>
-            <a:r>
-              <a:rPr lang="en-US" sz="1800" b="1" dirty="0">
-                <a:solidFill>
-                  <a:srgbClr val="1A1A2E"/>
-                </a:solidFill>
-                <a:latin typeface="Trebuchet MS" pitchFamily="34" charset="0"/>
-                <a:ea typeface="Trebuchet MS" pitchFamily="34" charset="-122"/>
-                <a:cs typeface="Trebuchet MS" pitchFamily="34" charset="-120"/>
-              </a:rPr>
-              <a:t>Q2  </a:t>
-            </a:r>
-            <a:pPr algn="l" indent="0" marL="0">
-              <a:spcAft>
-                <a:spcPts val="800"/>
-              </a:spcAft>
-              <a:buNone/>
-            </a:pPr>
-            <a:r>
-              <a:rPr lang="en-US" sz="1800" dirty="0">
-                <a:solidFill>
-                  <a:srgbClr val="1A1A2E"/>
-                </a:solidFill>
-                <a:latin typeface="Trebuchet MS" pitchFamily="34" charset="0"/>
-                <a:ea typeface="Trebuchet MS" pitchFamily="34" charset="-122"/>
-                <a:cs typeface="Trebuchet MS" pitchFamily="34" charset="-120"/>
-              </a:rPr>
-              <a:t>Explain the shape of a mass loss curve.  [3 marks]</a:t>
-            </a:r>
-            <a:endParaRPr lang="en-US" sz="1800" dirty="0"/>
-          </a:p>
-          <a:p>
-            <a:pPr algn="l" indent="0" marL="0">
-              <a:buNone/>
-            </a:pPr>
-            <a:r>
-              <a:rPr lang="en-US" sz="1800" b="1" dirty="0">
-                <a:solidFill>
-                  <a:srgbClr val="1A1A2E"/>
-                </a:solidFill>
-                <a:latin typeface="Trebuchet MS" pitchFamily="34" charset="0"/>
-                <a:ea typeface="Trebuchet MS" pitchFamily="34" charset="-122"/>
-                <a:cs typeface="Trebuchet MS" pitchFamily="34" charset="-120"/>
-              </a:rPr>
-              <a:t>Q3  </a:t>
-            </a:r>
-            <a:pPr algn="l" indent="0" marL="0">
-              <a:spcAft>
-                <a:spcPts val="800"/>
-              </a:spcAft>
-              <a:buNone/>
-            </a:pPr>
-            <a:r>
-              <a:rPr lang="en-US" sz="1800" dirty="0">
-                <a:solidFill>
-                  <a:srgbClr val="1A1A2E"/>
-                </a:solidFill>
-                <a:latin typeface="Trebuchet MS" pitchFamily="34" charset="0"/>
-                <a:ea typeface="Trebuchet MS" pitchFamily="34" charset="-122"/>
-                <a:cs typeface="Trebuchet MS" pitchFamily="34" charset="-120"/>
-              </a:rPr>
-              <a:t>60 cm3 of gas is collected in 25 s. Calculate the mean rate.  [2 marks]</a:t>
-            </a:r>
-            <a:endParaRPr lang="en-US" sz="1800" dirty="0"/>
+              <a:rPr lang="en-US" sz="1600" b="1" dirty="0">
+                <a:solidFill>
+                  <a:srgbClr val="FABB2E"/>
+                </a:solidFill>
+                <a:latin typeface="Trebuchet MS" pitchFamily="34" charset="0"/>
+                <a:ea typeface="Trebuchet MS" pitchFamily="34" charset="-122"/>
+                <a:cs typeface="Trebuchet MS" pitchFamily="34" charset="-120"/>
+              </a:rPr>
+              <a:t>The powder finishes first, but both lose exactly the same total mass.</a:t>
+            </a:r>
+            <a:endParaRPr lang="en-US" sz="1600" dirty="0"/>
           </a:p>
         </p:txBody>
       </p:sp>
@@ -23794,49 +25362,8 @@
         </p:nvSpPr>
         <p:spPr>
           <a:xfrm>
-            <a:off x="411480" y="3822192"/>
-            <a:ext cx="11365992" cy="384048"/>
-          </a:xfrm>
-          <a:prstGeom prst="rect">
-            <a:avLst/>
-          </a:prstGeom>
-          <a:solidFill>
-            <a:srgbClr val="B71C1C"/>
-          </a:solidFill>
-          <a:ln/>
-        </p:spPr>
-        <p:txBody>
-          <a:bodyPr wrap="square" rtlCol="0" anchor="ctr"/>
-          <a:lstStyle/>
-          <a:p>
-            <a:pPr algn="ctr" indent="0" marL="0">
-              <a:buNone/>
-            </a:pPr>
-            <a:r>
-              <a:rPr lang="en-US" sz="1300" b="1" dirty="0">
-                <a:solidFill>
-                  <a:srgbClr val="FFFFFF"/>
-                </a:solidFill>
-                <a:latin typeface="Trebuchet MS" pitchFamily="34" charset="0"/>
-                <a:ea typeface="Trebuchet MS" pitchFamily="34" charset="-122"/>
-                <a:cs typeface="Trebuchet MS" pitchFamily="34" charset="-120"/>
-              </a:rPr>
-              <a:t>MASTERING</a:t>
-            </a:r>
-            <a:endParaRPr lang="en-US" sz="1300" dirty="0"/>
-          </a:p>
-        </p:txBody>
-      </p:sp>
-      <p:sp>
-        <p:nvSpPr>
-          <p:cNvPr id="16" name="Text 14"/>
-          <p:cNvSpPr/>
-          <p:nvPr/>
-        </p:nvSpPr>
-        <p:spPr>
-          <a:xfrm>
-            <a:off x="411480" y="4206240"/>
-            <a:ext cx="11365992" cy="2258568"/>
+            <a:off x="411480" y="5184648"/>
+            <a:ext cx="11365992" cy="1188720"/>
           </a:xfrm>
           <a:prstGeom prst="rect">
             <a:avLst/>
@@ -23851,7 +25378,7 @@
           </a:ln>
         </p:spPr>
         <p:txBody>
-          <a:bodyPr wrap="square" lIns="76200" tIns="76200" rIns="76200" bIns="76200" rtlCol="0" anchor="t">
+          <a:bodyPr wrap="square" lIns="76200" tIns="76200" rIns="76200" bIns="76200" rtlCol="0" anchor="ctr">
             <a:normAutofit/>
           </a:bodyPr>
           <a:lstStyle/>
@@ -23860,7 +25387,21 @@
               <a:buNone/>
             </a:pPr>
             <a:r>
-              <a:rPr lang="en-US" sz="1800" b="1" dirty="0">
+              <a:rPr lang="en-US" sz="1300" b="1" dirty="0">
+                <a:solidFill>
+                  <a:srgbClr val="0D1B5E"/>
+                </a:solidFill>
+                <a:latin typeface="Trebuchet MS" pitchFamily="34" charset="0"/>
+                <a:ea typeface="Trebuchet MS" pitchFamily="34" charset="-122"/>
+                <a:cs typeface="Trebuchet MS" pitchFamily="34" charset="-120"/>
+              </a:rPr>
+              <a:t>WHY:  </a:t>
+            </a:r>
+            <a:pPr algn="l" indent="0" marL="0">
+              <a:buNone/>
+            </a:pPr>
+            <a:r>
+              <a:rPr lang="en-US" sz="1300" dirty="0">
                 <a:solidFill>
                   <a:srgbClr val="1A1A2E"/>
                 </a:solidFill>
@@ -23868,32 +25409,15 @@
                 <a:ea typeface="Trebuchet MS" pitchFamily="34" charset="-122"/>
                 <a:cs typeface="Trebuchet MS" pitchFamily="34" charset="-120"/>
               </a:rPr>
-              <a:t>Q1  </a:t>
-            </a:r>
-            <a:pPr algn="l" indent="0" marL="0">
-              <a:spcAft>
-                <a:spcPts val="800"/>
-              </a:spcAft>
-              <a:buNone/>
-            </a:pPr>
-            <a:r>
-              <a:rPr lang="en-US" sz="1800" dirty="0">
-                <a:solidFill>
-                  <a:srgbClr val="1A1A2E"/>
-                </a:solidFill>
-                <a:latin typeface="Trebuchet MS" pitchFamily="34" charset="0"/>
-                <a:ea typeface="Trebuchet MS" pitchFamily="34" charset="-122"/>
-                <a:cs typeface="Trebuchet MS" pitchFamily="34" charset="-120"/>
-              </a:rPr>
-              <a:t>Using collision theory, explain fully why raising the temperature of a reacting mixture by 10 degrees Celsius can roughly double the rate of reaction, and explain why a catalyst has a different effect on the same mixture.  [6 marks]</a:t>
-            </a:r>
-            <a:endParaRPr lang="en-US" sz="1800" dirty="0"/>
-          </a:p>
-        </p:txBody>
-      </p:sp>
-      <p:sp>
-        <p:nvSpPr>
-          <p:cNvPr id="17" name="Text 15"/>
+              <a:t>Surface area changes the rate, not the amount of product.</a:t>
+            </a:r>
+            <a:endParaRPr lang="en-US" sz="1300" dirty="0"/>
+          </a:p>
+        </p:txBody>
+      </p:sp>
+      <p:sp>
+        <p:nvSpPr>
+          <p:cNvPr id="16" name="Text 14"/>
           <p:cNvSpPr/>
           <p:nvPr/>
         </p:nvSpPr>
@@ -23960,7 +25484,7 @@
     <p:bg>
       <p:bgPr>
         <a:solidFill>
-          <a:srgbClr val="EDF2FA"/>
+          <a:srgbClr val="4A148C"/>
         </a:solidFill>
       </p:bgPr>
     </p:bg>
@@ -24116,7 +25640,7 @@
             <a:avLst/>
           </a:prstGeom>
           <a:solidFill>
-            <a:srgbClr val="152347"/>
+            <a:srgbClr val="E65100"/>
           </a:solidFill>
           <a:ln/>
         </p:spPr>
@@ -24128,7 +25652,7 @@
               <a:buNone/>
             </a:pPr>
             <a:r>
-              <a:rPr lang="en-US" sz="1000" dirty="0">
+              <a:rPr lang="en-US" sz="1100" b="1" dirty="0">
                 <a:solidFill>
                   <a:srgbClr val="FFFFFF"/>
                 </a:solidFill>
@@ -24138,7 +25662,7 @@
               </a:rPr>
               <a:t>BUILD</a:t>
             </a:r>
-            <a:endParaRPr lang="en-US" sz="1000" dirty="0"/>
+            <a:endParaRPr lang="en-US" sz="1100" dirty="0"/>
           </a:p>
         </p:txBody>
       </p:sp>
@@ -24198,7 +25722,7 @@
             <a:avLst/>
           </a:prstGeom>
           <a:solidFill>
-            <a:srgbClr val="1B5E20"/>
+            <a:srgbClr val="152347"/>
           </a:solidFill>
           <a:ln/>
         </p:spPr>
@@ -24210,7 +25734,7 @@
               <a:buNone/>
             </a:pPr>
             <a:r>
-              <a:rPr lang="en-US" sz="1100" b="1" dirty="0">
+              <a:rPr lang="en-US" sz="1000" dirty="0">
                 <a:solidFill>
                   <a:srgbClr val="FFFFFF"/>
                 </a:solidFill>
@@ -24220,7 +25744,7 @@
               </a:rPr>
               <a:t>REVIEW</a:t>
             </a:r>
-            <a:endParaRPr lang="en-US" sz="1100" dirty="0"/>
+            <a:endParaRPr lang="en-US" sz="1000" dirty="0"/>
           </a:p>
         </p:txBody>
       </p:sp>
@@ -24252,8 +25776,8 @@
         </p:nvSpPr>
         <p:spPr>
           <a:xfrm>
-            <a:off x="411480" y="603504"/>
-            <a:ext cx="7956194" cy="320040"/>
+            <a:off x="0" y="1796796"/>
+            <a:ext cx="12188952" cy="822960"/>
           </a:xfrm>
           <a:prstGeom prst="rect">
             <a:avLst/>
@@ -24265,21 +25789,21 @@
           <a:bodyPr wrap="square" rtlCol="0" anchor="ctr"/>
           <a:lstStyle/>
           <a:p>
-            <a:pPr indent="0" marL="0">
-              <a:buNone/>
-            </a:pPr>
-            <a:r>
-              <a:rPr lang="en-US" sz="1800" b="1" dirty="0">
-                <a:solidFill>
-                  <a:srgbClr val="2E7D32"/>
-                </a:solidFill>
-                <a:latin typeface="Trebuchet MS" pitchFamily="34" charset="0"/>
-                <a:ea typeface="Trebuchet MS" pitchFamily="34" charset="-122"/>
-                <a:cs typeface="Trebuchet MS" pitchFamily="34" charset="-120"/>
-              </a:rPr>
-              <a:t>Review · DEVELOPING</a:t>
-            </a:r>
-            <a:endParaRPr lang="en-US" sz="1800" dirty="0"/>
+            <a:pPr algn="ctr" indent="0" marL="0">
+              <a:buNone/>
+            </a:pPr>
+            <a:r>
+              <a:rPr lang="en-US" sz="4000" b="1" dirty="0">
+                <a:solidFill>
+                  <a:srgbClr val="FABB2E"/>
+                </a:solidFill>
+                <a:latin typeface="Trebuchet MS" pitchFamily="34" charset="0"/>
+                <a:ea typeface="Trebuchet MS" pitchFamily="34" charset="-122"/>
+                <a:cs typeface="Trebuchet MS" pitchFamily="34" charset="-120"/>
+              </a:rPr>
+              <a:t>IPEVO Visualiser</a:t>
+            </a:r>
+            <a:endParaRPr lang="en-US" sz="4000" dirty="0"/>
           </a:p>
         </p:txBody>
       </p:sp>
@@ -24291,36 +25815,34 @@
         </p:nvSpPr>
         <p:spPr>
           <a:xfrm>
-            <a:off x="0" y="950976"/>
-            <a:ext cx="12188952" cy="347472"/>
-          </a:xfrm>
-          <a:prstGeom prst="rect">
-            <a:avLst/>
-          </a:prstGeom>
-          <a:solidFill>
-            <a:srgbClr val="6A0DAD"/>
-          </a:solidFill>
-          <a:ln/>
-        </p:spPr>
-        <p:txBody>
-          <a:bodyPr wrap="square" lIns="101600" tIns="101600" rIns="101600" bIns="101600" rtlCol="0" anchor="ctr"/>
-          <a:lstStyle/>
-          <a:p>
-            <a:pPr algn="l" indent="0" marL="0">
-              <a:buNone/>
-            </a:pPr>
-            <a:r>
-              <a:rPr lang="en-US" sz="1300" b="1" dirty="0">
-                <a:solidFill>
-                  <a:srgbClr val="FFFFFF"/>
-                </a:solidFill>
-                <a:latin typeface="Trebuchet MS" pitchFamily="34" charset="0"/>
-                <a:ea typeface="Trebuchet MS" pitchFamily="34" charset="-122"/>
-                <a:cs typeface="Trebuchet MS" pitchFamily="34" charset="-120"/>
-              </a:rPr>
-              <a:t>☞  Purple pen time · mark and correct your answers</a:t>
-            </a:r>
-            <a:endParaRPr lang="en-US" sz="1300" dirty="0"/>
+            <a:off x="0" y="2802636"/>
+            <a:ext cx="12188952" cy="320040"/>
+          </a:xfrm>
+          <a:prstGeom prst="rect">
+            <a:avLst/>
+          </a:prstGeom>
+          <a:noFill/>
+          <a:ln/>
+        </p:spPr>
+        <p:txBody>
+          <a:bodyPr wrap="square" rtlCol="0" anchor="ctr"/>
+          <a:lstStyle/>
+          <a:p>
+            <a:pPr algn="ctr" indent="0" marL="0">
+              <a:buNone/>
+            </a:pPr>
+            <a:r>
+              <a:rPr lang="en-US" sz="1400" dirty="0">
+                <a:solidFill>
+                  <a:srgbClr val="FFFFFF"/>
+                </a:solidFill>
+                <a:latin typeface="Trebuchet MS" pitchFamily="34" charset="0"/>
+                <a:ea typeface="Trebuchet MS" pitchFamily="34" charset="-122"/>
+                <a:cs typeface="Trebuchet MS" pitchFamily="34" charset="-120"/>
+              </a:rPr>
+              <a:t>Model rate calculations under the visualiser</a:t>
+            </a:r>
+            <a:endParaRPr lang="en-US" sz="1400" dirty="0"/>
           </a:p>
         </p:txBody>
       </p:sp>
@@ -24332,57 +25854,14 @@
         </p:nvSpPr>
         <p:spPr>
           <a:xfrm>
-            <a:off x="411480" y="1389888"/>
-            <a:ext cx="3978097" cy="1655064"/>
-          </a:xfrm>
-          <a:prstGeom prst="rect">
-            <a:avLst/>
-          </a:prstGeom>
-          <a:solidFill>
-            <a:srgbClr val="2E7D32"/>
-          </a:solidFill>
-          <a:ln/>
-        </p:spPr>
-        <p:txBody>
-          <a:bodyPr wrap="square" lIns="76200" tIns="76200" rIns="76200" bIns="76200" rtlCol="0" anchor="ctr">
-            <a:normAutofit/>
-          </a:bodyPr>
-          <a:lstStyle/>
-          <a:p>
-            <a:pPr algn="l" indent="0" marL="0">
-              <a:buNone/>
-            </a:pPr>
-            <a:r>
-              <a:rPr lang="en-US" sz="2800" b="1" dirty="0">
-                <a:solidFill>
-                  <a:srgbClr val="FFFFFF"/>
-                </a:solidFill>
-                <a:latin typeface="Trebuchet MS" pitchFamily="34" charset="0"/>
-                <a:ea typeface="Trebuchet MS" pitchFamily="34" charset="-122"/>
-                <a:cs typeface="Trebuchet MS" pitchFamily="34" charset="-120"/>
-              </a:rPr>
-              <a:t>Three factors that change rate</a:t>
-            </a:r>
-            <a:endParaRPr lang="en-US" sz="2800" dirty="0"/>
-          </a:p>
-        </p:txBody>
-      </p:sp>
-      <p:sp>
-        <p:nvSpPr>
-          <p:cNvPr id="12" name="Text 10"/>
-          <p:cNvSpPr/>
-          <p:nvPr/>
-        </p:nvSpPr>
-        <p:spPr>
-          <a:xfrm>
-            <a:off x="4462729" y="1389888"/>
-            <a:ext cx="7314743" cy="1655064"/>
-          </a:xfrm>
-          <a:prstGeom prst="rect">
-            <a:avLst/>
-          </a:prstGeom>
-          <a:solidFill>
-            <a:srgbClr val="0D1B5E"/>
+            <a:off x="2742514" y="3351276"/>
+            <a:ext cx="6703924" cy="640080"/>
+          </a:xfrm>
+          <a:prstGeom prst="rect">
+            <a:avLst/>
+          </a:prstGeom>
+          <a:solidFill>
+            <a:srgbClr val="FFFFFF"/>
           </a:solidFill>
           <a:ln w="25400">
             <a:solidFill>
@@ -24396,207 +25875,73 @@
           </a:bodyPr>
           <a:lstStyle/>
           <a:p>
-            <a:pPr algn="l" indent="0" marL="0">
-              <a:buNone/>
-            </a:pPr>
-            <a:r>
-              <a:rPr lang="en-US" sz="2400" dirty="0">
-                <a:solidFill>
-                  <a:srgbClr val="FABB2E"/>
-                </a:solidFill>
-                <a:latin typeface="Trebuchet MS" pitchFamily="34" charset="0"/>
-                <a:ea typeface="Trebuchet MS" pitchFamily="34" charset="-122"/>
-                <a:cs typeface="Trebuchet MS" pitchFamily="34" charset="-120"/>
-              </a:rPr>
-              <a:t>Temperature, concentration, surface area</a:t>
-            </a:r>
-            <a:endParaRPr lang="en-US" sz="2400" dirty="0"/>
+            <a:pPr algn="ctr" indent="0" marL="0">
+              <a:buNone/>
+            </a:pPr>
+            <a:r>
+              <a:rPr lang="en-US" sz="1600" u="sng" dirty="0">
+                <a:solidFill>
+                  <a:srgbClr val="00838F"/>
+                </a:solidFill>
+                <a:latin typeface="Trebuchet MS" pitchFamily="34" charset="0"/>
+                <a:ea typeface="Trebuchet MS" pitchFamily="34" charset="-122"/>
+                <a:cs typeface="Trebuchet MS" pitchFamily="34" charset="-120"/>
+                <a:hlinkClick r:id="rId1" invalidUrl="" action="" tgtFrame="" tooltip="" history="1" highlightClick="0" endSnd="0">
+                  <a:extLst>
+                    <a:ext uri="{A12FA001-AC4F-418D-AE19-62706E023703}">
+                      <ahyp:hlinkClr xmlns:ahyp="http://schemas.microsoft.com/office/drawing/2018/hyperlinkcolor" val="tx"/>
+                    </a:ext>
+                  </a:extLst>
+                </a:hlinkClick>
+              </a:rPr>
+              <a:t>https://apps.ipevo.com/pwa/visualizer.app/</a:t>
+            </a:r>
+            <a:endParaRPr lang="en-US" sz="1300" dirty="0"/>
+          </a:p>
+        </p:txBody>
+      </p:sp>
+      <p:sp>
+        <p:nvSpPr>
+          <p:cNvPr id="12" name="Text 10"/>
+          <p:cNvSpPr/>
+          <p:nvPr/>
+        </p:nvSpPr>
+        <p:spPr>
+          <a:xfrm>
+            <a:off x="0" y="4128516"/>
+            <a:ext cx="12188952" cy="274320"/>
+          </a:xfrm>
+          <a:prstGeom prst="rect">
+            <a:avLst/>
+          </a:prstGeom>
+          <a:noFill/>
+          <a:ln/>
+        </p:spPr>
+        <p:txBody>
+          <a:bodyPr wrap="square" rtlCol="0" anchor="ctr"/>
+          <a:lstStyle/>
+          <a:p>
+            <a:pPr algn="ctr" indent="0" marL="0">
+              <a:buNone/>
+            </a:pPr>
+            <a:r>
+              <a:rPr lang="en-US" sz="1100" i="1" dirty="0">
+                <a:solidFill>
+                  <a:srgbClr val="FFFFFF"/>
+                </a:solidFill>
+                <a:latin typeface="Trebuchet MS" pitchFamily="34" charset="0"/>
+                <a:ea typeface="Trebuchet MS" pitchFamily="34" charset="-122"/>
+                <a:cs typeface="Trebuchet MS" pitchFamily="34" charset="-120"/>
+              </a:rPr>
+              <a:t>↑  Click to open</a:t>
+            </a:r>
+            <a:endParaRPr lang="en-US" sz="1100" dirty="0"/>
           </a:p>
         </p:txBody>
       </p:sp>
       <p:sp>
         <p:nvSpPr>
           <p:cNvPr id="13" name="Text 11"/>
-          <p:cNvSpPr/>
-          <p:nvPr/>
-        </p:nvSpPr>
-        <p:spPr>
-          <a:xfrm>
-            <a:off x="411480" y="3099816"/>
-            <a:ext cx="3978097" cy="1655064"/>
-          </a:xfrm>
-          <a:prstGeom prst="rect">
-            <a:avLst/>
-          </a:prstGeom>
-          <a:solidFill>
-            <a:srgbClr val="2E7D32"/>
-          </a:solidFill>
-          <a:ln/>
-        </p:spPr>
-        <p:txBody>
-          <a:bodyPr wrap="square" lIns="76200" tIns="76200" rIns="76200" bIns="76200" rtlCol="0" anchor="ctr">
-            <a:normAutofit/>
-          </a:bodyPr>
-          <a:lstStyle/>
-          <a:p>
-            <a:pPr algn="l" indent="0" marL="0">
-              <a:buNone/>
-            </a:pPr>
-            <a:r>
-              <a:rPr lang="en-US" sz="2800" b="1" dirty="0">
-                <a:solidFill>
-                  <a:srgbClr val="FFFFFF"/>
-                </a:solidFill>
-                <a:latin typeface="Trebuchet MS" pitchFamily="34" charset="0"/>
-                <a:ea typeface="Trebuchet MS" pitchFamily="34" charset="-122"/>
-                <a:cs typeface="Trebuchet MS" pitchFamily="34" charset="-120"/>
-              </a:rPr>
-              <a:t>What a catalyst does</a:t>
-            </a:r>
-            <a:endParaRPr lang="en-US" sz="2800" dirty="0"/>
-          </a:p>
-        </p:txBody>
-      </p:sp>
-      <p:sp>
-        <p:nvSpPr>
-          <p:cNvPr id="14" name="Text 12"/>
-          <p:cNvSpPr/>
-          <p:nvPr/>
-        </p:nvSpPr>
-        <p:spPr>
-          <a:xfrm>
-            <a:off x="4462729" y="3099816"/>
-            <a:ext cx="7314743" cy="1655064"/>
-          </a:xfrm>
-          <a:prstGeom prst="rect">
-            <a:avLst/>
-          </a:prstGeom>
-          <a:solidFill>
-            <a:srgbClr val="0D1B5E"/>
-          </a:solidFill>
-          <a:ln w="25400">
-            <a:solidFill>
-              <a:srgbClr val="FABB2E"/>
-            </a:solidFill>
-          </a:ln>
-        </p:spPr>
-        <p:txBody>
-          <a:bodyPr wrap="square" lIns="76200" tIns="76200" rIns="76200" bIns="76200" rtlCol="0" anchor="ctr">
-            <a:normAutofit/>
-          </a:bodyPr>
-          <a:lstStyle/>
-          <a:p>
-            <a:pPr algn="l" indent="0" marL="0">
-              <a:buNone/>
-            </a:pPr>
-            <a:r>
-              <a:rPr lang="en-US" sz="2400" dirty="0">
-                <a:solidFill>
-                  <a:srgbClr val="FABB2E"/>
-                </a:solidFill>
-                <a:latin typeface="Trebuchet MS" pitchFamily="34" charset="0"/>
-                <a:ea typeface="Trebuchet MS" pitchFamily="34" charset="-122"/>
-                <a:cs typeface="Trebuchet MS" pitchFamily="34" charset="-120"/>
-              </a:rPr>
-              <a:t>Speeds the reaction without being used up</a:t>
-            </a:r>
-            <a:endParaRPr lang="en-US" sz="2400" dirty="0"/>
-          </a:p>
-        </p:txBody>
-      </p:sp>
-      <p:sp>
-        <p:nvSpPr>
-          <p:cNvPr id="15" name="Text 13"/>
-          <p:cNvSpPr/>
-          <p:nvPr/>
-        </p:nvSpPr>
-        <p:spPr>
-          <a:xfrm>
-            <a:off x="411480" y="4809744"/>
-            <a:ext cx="3978097" cy="1655064"/>
-          </a:xfrm>
-          <a:prstGeom prst="rect">
-            <a:avLst/>
-          </a:prstGeom>
-          <a:solidFill>
-            <a:srgbClr val="2E7D32"/>
-          </a:solidFill>
-          <a:ln/>
-        </p:spPr>
-        <p:txBody>
-          <a:bodyPr wrap="square" lIns="76200" tIns="76200" rIns="76200" bIns="76200" rtlCol="0" anchor="ctr">
-            <a:normAutofit/>
-          </a:bodyPr>
-          <a:lstStyle/>
-          <a:p>
-            <a:pPr algn="l" indent="0" marL="0">
-              <a:buNone/>
-            </a:pPr>
-            <a:r>
-              <a:rPr lang="en-US" sz="2800" b="1" dirty="0">
-                <a:solidFill>
-                  <a:srgbClr val="FFFFFF"/>
-                </a:solidFill>
-                <a:latin typeface="Trebuchet MS" pitchFamily="34" charset="0"/>
-                <a:ea typeface="Trebuchet MS" pitchFamily="34" charset="-122"/>
-                <a:cs typeface="Trebuchet MS" pitchFamily="34" charset="-120"/>
-              </a:rPr>
-              <a:t>Unit of rate by gas volume</a:t>
-            </a:r>
-            <a:endParaRPr lang="en-US" sz="2800" dirty="0"/>
-          </a:p>
-        </p:txBody>
-      </p:sp>
-      <p:sp>
-        <p:nvSpPr>
-          <p:cNvPr id="16" name="Text 14"/>
-          <p:cNvSpPr/>
-          <p:nvPr/>
-        </p:nvSpPr>
-        <p:spPr>
-          <a:xfrm>
-            <a:off x="4462729" y="4809744"/>
-            <a:ext cx="7314743" cy="1655064"/>
-          </a:xfrm>
-          <a:prstGeom prst="rect">
-            <a:avLst/>
-          </a:prstGeom>
-          <a:solidFill>
-            <a:srgbClr val="0D1B5E"/>
-          </a:solidFill>
-          <a:ln w="25400">
-            <a:solidFill>
-              <a:srgbClr val="FABB2E"/>
-            </a:solidFill>
-          </a:ln>
-        </p:spPr>
-        <p:txBody>
-          <a:bodyPr wrap="square" lIns="76200" tIns="76200" rIns="76200" bIns="76200" rtlCol="0" anchor="ctr">
-            <a:normAutofit/>
-          </a:bodyPr>
-          <a:lstStyle/>
-          <a:p>
-            <a:pPr algn="l" indent="0" marL="0">
-              <a:buNone/>
-            </a:pPr>
-            <a:r>
-              <a:rPr lang="en-US" sz="2400" dirty="0">
-                <a:solidFill>
-                  <a:srgbClr val="FABB2E"/>
-                </a:solidFill>
-                <a:latin typeface="Trebuchet MS" pitchFamily="34" charset="0"/>
-                <a:ea typeface="Trebuchet MS" pitchFamily="34" charset="-122"/>
-                <a:cs typeface="Trebuchet MS" pitchFamily="34" charset="-120"/>
-              </a:rPr>
-              <a:t>cm3/s</a:t>
-            </a:r>
-            <a:endParaRPr lang="en-US" sz="2400" dirty="0"/>
-          </a:p>
-        </p:txBody>
-      </p:sp>
-      <p:sp>
-        <p:nvSpPr>
-          <p:cNvPr id="17" name="Text 15"/>
           <p:cNvSpPr/>
           <p:nvPr/>
         </p:nvSpPr>
@@ -24860,7 +26205,7 @@
             <a:avLst/>
           </a:prstGeom>
           <a:solidFill>
-            <a:srgbClr val="152347"/>
+            <a:srgbClr val="B71C1C"/>
           </a:solidFill>
           <a:ln/>
         </p:spPr>
@@ -24872,7 +26217,7 @@
               <a:buNone/>
             </a:pPr>
             <a:r>
-              <a:rPr lang="en-US" sz="1000" dirty="0">
+              <a:rPr lang="en-US" sz="1100" b="1" dirty="0">
                 <a:solidFill>
                   <a:srgbClr val="FFFFFF"/>
                 </a:solidFill>
@@ -24882,7 +26227,7 @@
               </a:rPr>
               <a:t>APPLY</a:t>
             </a:r>
-            <a:endParaRPr lang="en-US" sz="1000" dirty="0"/>
+            <a:endParaRPr lang="en-US" sz="1100" dirty="0"/>
           </a:p>
         </p:txBody>
       </p:sp>
@@ -24901,7 +26246,7 @@
             <a:avLst/>
           </a:prstGeom>
           <a:solidFill>
-            <a:srgbClr val="1B5E20"/>
+            <a:srgbClr val="152347"/>
           </a:solidFill>
           <a:ln/>
         </p:spPr>
@@ -24913,7 +26258,7 @@
               <a:buNone/>
             </a:pPr>
             <a:r>
-              <a:rPr lang="en-US" sz="1100" b="1" dirty="0">
+              <a:rPr lang="en-US" sz="1000" dirty="0">
                 <a:solidFill>
                   <a:srgbClr val="FFFFFF"/>
                 </a:solidFill>
@@ -24923,7 +26268,7 @@
               </a:rPr>
               <a:t>REVIEW</a:t>
             </a:r>
-            <a:endParaRPr lang="en-US" sz="1100" dirty="0"/>
+            <a:endParaRPr lang="en-US" sz="1000" dirty="0"/>
           </a:p>
         </p:txBody>
       </p:sp>
@@ -24955,61 +26300,104 @@
         </p:nvSpPr>
         <p:spPr>
           <a:xfrm>
-            <a:off x="411480" y="603504"/>
-            <a:ext cx="7956194" cy="320040"/>
-          </a:xfrm>
-          <a:prstGeom prst="rect">
-            <a:avLst/>
-          </a:prstGeom>
-          <a:noFill/>
+            <a:off x="0" y="649224"/>
+            <a:ext cx="12188952" cy="347472"/>
+          </a:xfrm>
+          <a:prstGeom prst="rect">
+            <a:avLst/>
+          </a:prstGeom>
+          <a:solidFill>
+            <a:srgbClr val="B71C1C"/>
+          </a:solidFill>
+          <a:ln/>
+        </p:spPr>
+        <p:txBody>
+          <a:bodyPr wrap="square" lIns="101600" tIns="101600" rIns="101600" bIns="101600" rtlCol="0" anchor="ctr"/>
+          <a:lstStyle/>
+          <a:p>
+            <a:pPr algn="ctr" indent="0" marL="0">
+              <a:buNone/>
+            </a:pPr>
+            <a:r>
+              <a:rPr lang="en-US" sz="1300" b="1" dirty="0">
+                <a:solidFill>
+                  <a:srgbClr val="FFFFFF"/>
+                </a:solidFill>
+                <a:latin typeface="Trebuchet MS" pitchFamily="34" charset="0"/>
+                <a:ea typeface="Trebuchet MS" pitchFamily="34" charset="-122"/>
+                <a:cs typeface="Trebuchet MS" pitchFamily="34" charset="-120"/>
+              </a:rPr>
+              <a:t>APPLY · CHOOSE YOUR LEVEL</a:t>
+            </a:r>
+            <a:endParaRPr lang="en-US" sz="1300" dirty="0"/>
+          </a:p>
+        </p:txBody>
+      </p:sp>
+      <p:sp>
+        <p:nvSpPr>
+          <p:cNvPr id="10" name="Text 8"/>
+          <p:cNvSpPr/>
+          <p:nvPr/>
+        </p:nvSpPr>
+        <p:spPr>
+          <a:xfrm>
+            <a:off x="7982712" y="649224"/>
+            <a:ext cx="4114800" cy="347472"/>
+          </a:xfrm>
+          <a:prstGeom prst="rect">
+            <a:avLst/>
+          </a:prstGeom>
+          <a:solidFill>
+            <a:srgbClr val="0D1B5E"/>
+          </a:solidFill>
+          <a:ln/>
+        </p:spPr>
+        <p:txBody>
+          <a:bodyPr wrap="square" lIns="76200" tIns="76200" rIns="76200" bIns="76200" rtlCol="0" anchor="ctr"/>
+          <a:lstStyle/>
+          <a:p>
+            <a:pPr algn="r" indent="0" marL="0">
+              <a:buNone/>
+            </a:pPr>
+            <a:r>
+              <a:rPr lang="en-US" sz="1050" b="1" dirty="0">
+                <a:solidFill>
+                  <a:srgbClr val="FABB2E"/>
+                </a:solidFill>
+                <a:latin typeface="Trebuchet MS" pitchFamily="34" charset="0"/>
+                <a:ea typeface="Trebuchet MS" pitchFamily="34" charset="-122"/>
+                <a:cs typeface="Trebuchet MS" pitchFamily="34" charset="-120"/>
+              </a:rPr>
+              <a:t>Read more — AQA Chemistry (Kerboodle), pp. 130–136</a:t>
+            </a:r>
+            <a:endParaRPr lang="en-US" sz="1050" dirty="0"/>
+          </a:p>
+        </p:txBody>
+      </p:sp>
+      <p:sp>
+        <p:nvSpPr>
+          <p:cNvPr id="11" name="Text 9"/>
+          <p:cNvSpPr/>
+          <p:nvPr/>
+        </p:nvSpPr>
+        <p:spPr>
+          <a:xfrm>
+            <a:off x="411480" y="1088136"/>
+            <a:ext cx="5614416" cy="384048"/>
+          </a:xfrm>
+          <a:prstGeom prst="rect">
+            <a:avLst/>
+          </a:prstGeom>
+          <a:solidFill>
+            <a:srgbClr val="2E7D32"/>
+          </a:solidFill>
           <a:ln/>
         </p:spPr>
         <p:txBody>
           <a:bodyPr wrap="square" rtlCol="0" anchor="ctr"/>
           <a:lstStyle/>
           <a:p>
-            <a:pPr indent="0" marL="0">
-              <a:buNone/>
-            </a:pPr>
-            <a:r>
-              <a:rPr lang="en-US" sz="1800" b="1" dirty="0">
-                <a:solidFill>
-                  <a:srgbClr val="E65100"/>
-                </a:solidFill>
-                <a:latin typeface="Trebuchet MS" pitchFamily="34" charset="0"/>
-                <a:ea typeface="Trebuchet MS" pitchFamily="34" charset="-122"/>
-                <a:cs typeface="Trebuchet MS" pitchFamily="34" charset="-120"/>
-              </a:rPr>
-              <a:t>Review · REACHING</a:t>
-            </a:r>
-            <a:endParaRPr lang="en-US" sz="1800" dirty="0"/>
-          </a:p>
-        </p:txBody>
-      </p:sp>
-      <p:sp>
-        <p:nvSpPr>
-          <p:cNvPr id="10" name="Text 8"/>
-          <p:cNvSpPr/>
-          <p:nvPr/>
-        </p:nvSpPr>
-        <p:spPr>
-          <a:xfrm>
-            <a:off x="0" y="950976"/>
-            <a:ext cx="12188952" cy="347472"/>
-          </a:xfrm>
-          <a:prstGeom prst="rect">
-            <a:avLst/>
-          </a:prstGeom>
-          <a:solidFill>
-            <a:srgbClr val="6A0DAD"/>
-          </a:solidFill>
-          <a:ln/>
-        </p:spPr>
-        <p:txBody>
-          <a:bodyPr wrap="square" lIns="101600" tIns="101600" rIns="101600" bIns="101600" rtlCol="0" anchor="ctr"/>
-          <a:lstStyle/>
-          <a:p>
-            <a:pPr algn="l" indent="0" marL="0">
+            <a:pPr algn="ctr" indent="0" marL="0">
               <a:buNone/>
             </a:pPr>
             <a:r>
@@ -25021,7 +26409,7 @@
                 <a:ea typeface="Trebuchet MS" pitchFamily="34" charset="-122"/>
                 <a:cs typeface="Trebuchet MS" pitchFamily="34" charset="-120"/>
               </a:rPr>
-              <a:t>☞  Purple pen time · mark and correct your answers</a:t>
+              <a:t>DEVELOPING</a:t>
             </a:r>
             <a:endParaRPr lang="en-US" sz="1300" dirty="0"/>
           </a:p>
@@ -25029,63 +26417,20 @@
       </p:sp>
       <p:sp>
         <p:nvSpPr>
-          <p:cNvPr id="11" name="Text 9"/>
-          <p:cNvSpPr/>
-          <p:nvPr/>
-        </p:nvSpPr>
-        <p:spPr>
-          <a:xfrm>
-            <a:off x="411480" y="1389888"/>
-            <a:ext cx="3978097" cy="1655064"/>
-          </a:xfrm>
-          <a:prstGeom prst="rect">
-            <a:avLst/>
-          </a:prstGeom>
-          <a:solidFill>
-            <a:srgbClr val="E65100"/>
-          </a:solidFill>
-          <a:ln/>
-        </p:spPr>
-        <p:txBody>
-          <a:bodyPr wrap="square" lIns="76200" tIns="76200" rIns="76200" bIns="76200" rtlCol="0" anchor="ctr">
-            <a:normAutofit/>
-          </a:bodyPr>
-          <a:lstStyle/>
-          <a:p>
-            <a:pPr algn="l" indent="0" marL="0">
-              <a:buNone/>
-            </a:pPr>
-            <a:r>
-              <a:rPr lang="en-US" sz="2800" b="1" dirty="0">
-                <a:solidFill>
-                  <a:srgbClr val="FFFFFF"/>
-                </a:solidFill>
-                <a:latin typeface="Trebuchet MS" pitchFamily="34" charset="0"/>
-                <a:ea typeface="Trebuchet MS" pitchFamily="34" charset="-122"/>
-                <a:cs typeface="Trebuchet MS" pitchFamily="34" charset="-120"/>
-              </a:rPr>
-              <a:t>Why powder beats chips</a:t>
-            </a:r>
-            <a:endParaRPr lang="en-US" sz="2800" dirty="0"/>
-          </a:p>
-        </p:txBody>
-      </p:sp>
-      <p:sp>
-        <p:nvSpPr>
           <p:cNvPr id="12" name="Text 10"/>
           <p:cNvSpPr/>
           <p:nvPr/>
         </p:nvSpPr>
         <p:spPr>
           <a:xfrm>
-            <a:off x="4462729" y="1389888"/>
-            <a:ext cx="7314743" cy="1655064"/>
-          </a:xfrm>
-          <a:prstGeom prst="rect">
-            <a:avLst/>
-          </a:prstGeom>
-          <a:solidFill>
-            <a:srgbClr val="0D1B5E"/>
+            <a:off x="411480" y="1472184"/>
+            <a:ext cx="5614416" cy="2258568"/>
+          </a:xfrm>
+          <a:prstGeom prst="rect">
+            <a:avLst/>
+          </a:prstGeom>
+          <a:solidFill>
+            <a:srgbClr val="FFFFFF"/>
           </a:solidFill>
           <a:ln w="25400">
             <a:solidFill>
@@ -25094,7 +26439,7 @@
           </a:ln>
         </p:spPr>
         <p:txBody>
-          <a:bodyPr wrap="square" lIns="76200" tIns="76200" rIns="76200" bIns="76200" rtlCol="0" anchor="ctr">
+          <a:bodyPr wrap="square" lIns="76200" tIns="76200" rIns="76200" bIns="76200" rtlCol="0" anchor="t">
             <a:normAutofit/>
           </a:bodyPr>
           <a:lstStyle/>
@@ -25103,17 +26448,102 @@
               <a:buNone/>
             </a:pPr>
             <a:r>
-              <a:rPr lang="en-US" sz="2400" dirty="0">
-                <a:solidFill>
-                  <a:srgbClr val="FABB2E"/>
-                </a:solidFill>
-                <a:latin typeface="Trebuchet MS" pitchFamily="34" charset="0"/>
-                <a:ea typeface="Trebuchet MS" pitchFamily="34" charset="-122"/>
-                <a:cs typeface="Trebuchet MS" pitchFamily="34" charset="-120"/>
-              </a:rPr>
-              <a:t>More surface area, more frequent collisions</a:t>
-            </a:r>
-            <a:endParaRPr lang="en-US" sz="2400" dirty="0"/>
+              <a:rPr lang="en-US" sz="1800" b="1" dirty="0">
+                <a:solidFill>
+                  <a:srgbClr val="1A1A2E"/>
+                </a:solidFill>
+                <a:latin typeface="Trebuchet MS" pitchFamily="34" charset="0"/>
+                <a:ea typeface="Trebuchet MS" pitchFamily="34" charset="-122"/>
+                <a:cs typeface="Trebuchet MS" pitchFamily="34" charset="-120"/>
+              </a:rPr>
+              <a:t>Q1  </a:t>
+            </a:r>
+            <a:pPr algn="l" indent="0" marL="0">
+              <a:spcAft>
+                <a:spcPts val="800"/>
+              </a:spcAft>
+              <a:buNone/>
+            </a:pPr>
+            <a:r>
+              <a:rPr lang="en-US" sz="1800" dirty="0">
+                <a:solidFill>
+                  <a:srgbClr val="1A1A2E"/>
+                </a:solidFill>
+                <a:latin typeface="Trebuchet MS" pitchFamily="34" charset="0"/>
+                <a:ea typeface="Trebuchet MS" pitchFamily="34" charset="-122"/>
+                <a:cs typeface="Trebuchet MS" pitchFamily="34" charset="-120"/>
+              </a:rPr>
+              <a:t>Name three factors that change the rate of a reaction.  [3 marks]</a:t>
+            </a:r>
+            <a:endParaRPr lang="en-US" sz="1800" dirty="0"/>
+          </a:p>
+          <a:p>
+            <a:pPr algn="l" indent="0" marL="0">
+              <a:buNone/>
+            </a:pPr>
+            <a:r>
+              <a:rPr lang="en-US" sz="1800" b="1" dirty="0">
+                <a:solidFill>
+                  <a:srgbClr val="1A1A2E"/>
+                </a:solidFill>
+                <a:latin typeface="Trebuchet MS" pitchFamily="34" charset="0"/>
+                <a:ea typeface="Trebuchet MS" pitchFamily="34" charset="-122"/>
+                <a:cs typeface="Trebuchet MS" pitchFamily="34" charset="-120"/>
+              </a:rPr>
+              <a:t>Q2  </a:t>
+            </a:r>
+            <a:pPr algn="l" indent="0" marL="0">
+              <a:spcAft>
+                <a:spcPts val="800"/>
+              </a:spcAft>
+              <a:buNone/>
+            </a:pPr>
+            <a:r>
+              <a:rPr lang="en-US" sz="1800" dirty="0">
+                <a:solidFill>
+                  <a:srgbClr val="1A1A2E"/>
+                </a:solidFill>
+                <a:latin typeface="Trebuchet MS" pitchFamily="34" charset="0"/>
+                <a:ea typeface="Trebuchet MS" pitchFamily="34" charset="-122"/>
+                <a:cs typeface="Trebuchet MS" pitchFamily="34" charset="-120"/>
+              </a:rPr>
+              <a:t>State what a catalyst does.  [1 mark]</a:t>
+            </a:r>
+            <a:endParaRPr lang="en-US" sz="1800" dirty="0"/>
+          </a:p>
+          <a:p>
+            <a:pPr algn="l" indent="0" marL="0">
+              <a:buNone/>
+            </a:pPr>
+            <a:r>
+              <a:rPr lang="en-US" sz="1800" b="1" dirty="0">
+                <a:solidFill>
+                  <a:srgbClr val="1A1A2E"/>
+                </a:solidFill>
+                <a:latin typeface="Trebuchet MS" pitchFamily="34" charset="0"/>
+                <a:ea typeface="Trebuchet MS" pitchFamily="34" charset="-122"/>
+                <a:cs typeface="Trebuchet MS" pitchFamily="34" charset="-120"/>
+              </a:rPr>
+              <a:t>Q3  </a:t>
+            </a:r>
+            <a:pPr algn="l" indent="0" marL="0">
+              <a:spcAft>
+                <a:spcPts val="800"/>
+              </a:spcAft>
+              <a:buNone/>
+            </a:pPr>
+            <a:r>
+              <a:rPr lang="en-US" sz="1800" dirty="0">
+                <a:solidFill>
+                  <a:srgbClr val="1A1A2E"/>
+                </a:solidFill>
+                <a:latin typeface="Trebuchet MS" pitchFamily="34" charset="0"/>
+                <a:ea typeface="Trebuchet MS" pitchFamily="34" charset="-122"/>
+                <a:cs typeface="Trebuchet MS" pitchFamily="34" charset="-120"/>
+              </a:rPr>
+              <a:t>Give the unit of rate measured by gas volume.  [1 mark]</a:t>
+            </a:r>
+            <a:endParaRPr lang="en-US" sz="1800" dirty="0"/>
           </a:p>
         </p:txBody>
       </p:sp>
@@ -25125,8 +26555,8 @@
         </p:nvSpPr>
         <p:spPr>
           <a:xfrm>
-            <a:off x="411480" y="3099816"/>
-            <a:ext cx="3978097" cy="1655064"/>
+            <a:off x="6163056" y="1088136"/>
+            <a:ext cx="5614416" cy="384048"/>
           </a:xfrm>
           <a:prstGeom prst="rect">
             <a:avLst/>
@@ -25137,26 +26567,24 @@
           <a:ln/>
         </p:spPr>
         <p:txBody>
-          <a:bodyPr wrap="square" lIns="76200" tIns="76200" rIns="76200" bIns="76200" rtlCol="0" anchor="ctr">
-            <a:normAutofit/>
-          </a:bodyPr>
-          <a:lstStyle/>
-          <a:p>
-            <a:pPr algn="l" indent="0" marL="0">
-              <a:buNone/>
-            </a:pPr>
-            <a:r>
-              <a:rPr lang="en-US" sz="2800" b="1" dirty="0">
-                <a:solidFill>
-                  <a:srgbClr val="FFFFFF"/>
-                </a:solidFill>
-                <a:latin typeface="Trebuchet MS" pitchFamily="34" charset="0"/>
-                <a:ea typeface="Trebuchet MS" pitchFamily="34" charset="-122"/>
-                <a:cs typeface="Trebuchet MS" pitchFamily="34" charset="-120"/>
-              </a:rPr>
-              <a:t>Why the curve levels off</a:t>
-            </a:r>
-            <a:endParaRPr lang="en-US" sz="2800" dirty="0"/>
+          <a:bodyPr wrap="square" rtlCol="0" anchor="ctr"/>
+          <a:lstStyle/>
+          <a:p>
+            <a:pPr algn="ctr" indent="0" marL="0">
+              <a:buNone/>
+            </a:pPr>
+            <a:r>
+              <a:rPr lang="en-US" sz="1300" b="1" dirty="0">
+                <a:solidFill>
+                  <a:srgbClr val="FFFFFF"/>
+                </a:solidFill>
+                <a:latin typeface="Trebuchet MS" pitchFamily="34" charset="0"/>
+                <a:ea typeface="Trebuchet MS" pitchFamily="34" charset="-122"/>
+                <a:cs typeface="Trebuchet MS" pitchFamily="34" charset="-120"/>
+              </a:rPr>
+              <a:t>REACHING</a:t>
+            </a:r>
+            <a:endParaRPr lang="en-US" sz="1300" dirty="0"/>
           </a:p>
         </p:txBody>
       </p:sp>
@@ -25168,14 +26596,14 @@
         </p:nvSpPr>
         <p:spPr>
           <a:xfrm>
-            <a:off x="4462729" y="3099816"/>
-            <a:ext cx="7314743" cy="1655064"/>
-          </a:xfrm>
-          <a:prstGeom prst="rect">
-            <a:avLst/>
-          </a:prstGeom>
-          <a:solidFill>
-            <a:srgbClr val="0D1B5E"/>
+            <a:off x="6163056" y="1472184"/>
+            <a:ext cx="5614416" cy="2258568"/>
+          </a:xfrm>
+          <a:prstGeom prst="rect">
+            <a:avLst/>
+          </a:prstGeom>
+          <a:solidFill>
+            <a:srgbClr val="FFFFFF"/>
           </a:solidFill>
           <a:ln w="25400">
             <a:solidFill>
@@ -25184,7 +26612,7 @@
           </a:ln>
         </p:spPr>
         <p:txBody>
-          <a:bodyPr wrap="square" lIns="76200" tIns="76200" rIns="76200" bIns="76200" rtlCol="0" anchor="ctr">
+          <a:bodyPr wrap="square" lIns="76200" tIns="76200" rIns="76200" bIns="76200" rtlCol="0" anchor="t">
             <a:normAutofit/>
           </a:bodyPr>
           <a:lstStyle/>
@@ -25193,17 +26621,102 @@
               <a:buNone/>
             </a:pPr>
             <a:r>
-              <a:rPr lang="en-US" sz="2400" dirty="0">
-                <a:solidFill>
-                  <a:srgbClr val="FABB2E"/>
-                </a:solidFill>
-                <a:latin typeface="Trebuchet MS" pitchFamily="34" charset="0"/>
-                <a:ea typeface="Trebuchet MS" pitchFamily="34" charset="-122"/>
-                <a:cs typeface="Trebuchet MS" pitchFamily="34" charset="-120"/>
-              </a:rPr>
-              <a:t>A reactant has run out</a:t>
-            </a:r>
-            <a:endParaRPr lang="en-US" sz="2400" dirty="0"/>
+              <a:rPr lang="en-US" sz="1800" b="1" dirty="0">
+                <a:solidFill>
+                  <a:srgbClr val="1A1A2E"/>
+                </a:solidFill>
+                <a:latin typeface="Trebuchet MS" pitchFamily="34" charset="0"/>
+                <a:ea typeface="Trebuchet MS" pitchFamily="34" charset="-122"/>
+                <a:cs typeface="Trebuchet MS" pitchFamily="34" charset="-120"/>
+              </a:rPr>
+              <a:t>Q1  </a:t>
+            </a:r>
+            <a:pPr algn="l" indent="0" marL="0">
+              <a:spcAft>
+                <a:spcPts val="800"/>
+              </a:spcAft>
+              <a:buNone/>
+            </a:pPr>
+            <a:r>
+              <a:rPr lang="en-US" sz="1800" dirty="0">
+                <a:solidFill>
+                  <a:srgbClr val="1A1A2E"/>
+                </a:solidFill>
+                <a:latin typeface="Trebuchet MS" pitchFamily="34" charset="0"/>
+                <a:ea typeface="Trebuchet MS" pitchFamily="34" charset="-122"/>
+                <a:cs typeface="Trebuchet MS" pitchFamily="34" charset="-120"/>
+              </a:rPr>
+              <a:t>Explain why powdered marble reacts faster than chips.  [3 marks]</a:t>
+            </a:r>
+            <a:endParaRPr lang="en-US" sz="1800" dirty="0"/>
+          </a:p>
+          <a:p>
+            <a:pPr algn="l" indent="0" marL="0">
+              <a:buNone/>
+            </a:pPr>
+            <a:r>
+              <a:rPr lang="en-US" sz="1800" b="1" dirty="0">
+                <a:solidFill>
+                  <a:srgbClr val="1A1A2E"/>
+                </a:solidFill>
+                <a:latin typeface="Trebuchet MS" pitchFamily="34" charset="0"/>
+                <a:ea typeface="Trebuchet MS" pitchFamily="34" charset="-122"/>
+                <a:cs typeface="Trebuchet MS" pitchFamily="34" charset="-120"/>
+              </a:rPr>
+              <a:t>Q2  </a:t>
+            </a:r>
+            <a:pPr algn="l" indent="0" marL="0">
+              <a:spcAft>
+                <a:spcPts val="800"/>
+              </a:spcAft>
+              <a:buNone/>
+            </a:pPr>
+            <a:r>
+              <a:rPr lang="en-US" sz="1800" dirty="0">
+                <a:solidFill>
+                  <a:srgbClr val="1A1A2E"/>
+                </a:solidFill>
+                <a:latin typeface="Trebuchet MS" pitchFamily="34" charset="0"/>
+                <a:ea typeface="Trebuchet MS" pitchFamily="34" charset="-122"/>
+                <a:cs typeface="Trebuchet MS" pitchFamily="34" charset="-120"/>
+              </a:rPr>
+              <a:t>Explain the shape of a mass loss curve.  [3 marks]</a:t>
+            </a:r>
+            <a:endParaRPr lang="en-US" sz="1800" dirty="0"/>
+          </a:p>
+          <a:p>
+            <a:pPr algn="l" indent="0" marL="0">
+              <a:buNone/>
+            </a:pPr>
+            <a:r>
+              <a:rPr lang="en-US" sz="1800" b="1" dirty="0">
+                <a:solidFill>
+                  <a:srgbClr val="1A1A2E"/>
+                </a:solidFill>
+                <a:latin typeface="Trebuchet MS" pitchFamily="34" charset="0"/>
+                <a:ea typeface="Trebuchet MS" pitchFamily="34" charset="-122"/>
+                <a:cs typeface="Trebuchet MS" pitchFamily="34" charset="-120"/>
+              </a:rPr>
+              <a:t>Q3  </a:t>
+            </a:r>
+            <a:pPr algn="l" indent="0" marL="0">
+              <a:spcAft>
+                <a:spcPts val="800"/>
+              </a:spcAft>
+              <a:buNone/>
+            </a:pPr>
+            <a:r>
+              <a:rPr lang="en-US" sz="1800" dirty="0">
+                <a:solidFill>
+                  <a:srgbClr val="1A1A2E"/>
+                </a:solidFill>
+                <a:latin typeface="Trebuchet MS" pitchFamily="34" charset="0"/>
+                <a:ea typeface="Trebuchet MS" pitchFamily="34" charset="-122"/>
+                <a:cs typeface="Trebuchet MS" pitchFamily="34" charset="-120"/>
+              </a:rPr>
+              <a:t>60 cm3 of gas is collected in 25 s. Calculate the mean rate.  [2 marks]</a:t>
+            </a:r>
+            <a:endParaRPr lang="en-US" sz="1800" dirty="0"/>
           </a:p>
         </p:txBody>
       </p:sp>
@@ -25215,38 +26728,36 @@
         </p:nvSpPr>
         <p:spPr>
           <a:xfrm>
-            <a:off x="411480" y="4809744"/>
-            <a:ext cx="3978097" cy="1655064"/>
-          </a:xfrm>
-          <a:prstGeom prst="rect">
-            <a:avLst/>
-          </a:prstGeom>
-          <a:solidFill>
-            <a:srgbClr val="E65100"/>
-          </a:solidFill>
-          <a:ln/>
-        </p:spPr>
-        <p:txBody>
-          <a:bodyPr wrap="square" lIns="76200" tIns="76200" rIns="76200" bIns="76200" rtlCol="0" anchor="ctr">
-            <a:normAutofit/>
-          </a:bodyPr>
-          <a:lstStyle/>
-          <a:p>
-            <a:pPr algn="l" indent="0" marL="0">
-              <a:buNone/>
-            </a:pPr>
-            <a:r>
-              <a:rPr lang="en-US" sz="2800" b="1" dirty="0">
-                <a:solidFill>
-                  <a:srgbClr val="FFFFFF"/>
-                </a:solidFill>
-                <a:latin typeface="Trebuchet MS" pitchFamily="34" charset="0"/>
-                <a:ea typeface="Trebuchet MS" pitchFamily="34" charset="-122"/>
-                <a:cs typeface="Trebuchet MS" pitchFamily="34" charset="-120"/>
-              </a:rPr>
-              <a:t>60 cm3 in 25 s</a:t>
-            </a:r>
-            <a:endParaRPr lang="en-US" sz="2800" dirty="0"/>
+            <a:off x="411480" y="3822192"/>
+            <a:ext cx="11365992" cy="384048"/>
+          </a:xfrm>
+          <a:prstGeom prst="rect">
+            <a:avLst/>
+          </a:prstGeom>
+          <a:solidFill>
+            <a:srgbClr val="B71C1C"/>
+          </a:solidFill>
+          <a:ln/>
+        </p:spPr>
+        <p:txBody>
+          <a:bodyPr wrap="square" rtlCol="0" anchor="ctr"/>
+          <a:lstStyle/>
+          <a:p>
+            <a:pPr algn="ctr" indent="0" marL="0">
+              <a:buNone/>
+            </a:pPr>
+            <a:r>
+              <a:rPr lang="en-US" sz="1300" b="1" dirty="0">
+                <a:solidFill>
+                  <a:srgbClr val="FFFFFF"/>
+                </a:solidFill>
+                <a:latin typeface="Trebuchet MS" pitchFamily="34" charset="0"/>
+                <a:ea typeface="Trebuchet MS" pitchFamily="34" charset="-122"/>
+                <a:cs typeface="Trebuchet MS" pitchFamily="34" charset="-120"/>
+              </a:rPr>
+              <a:t>MASTERING</a:t>
+            </a:r>
+            <a:endParaRPr lang="en-US" sz="1300" dirty="0"/>
           </a:p>
         </p:txBody>
       </p:sp>
@@ -25258,14 +26769,14 @@
         </p:nvSpPr>
         <p:spPr>
           <a:xfrm>
-            <a:off x="4462729" y="4809744"/>
-            <a:ext cx="7314743" cy="1655064"/>
-          </a:xfrm>
-          <a:prstGeom prst="rect">
-            <a:avLst/>
-          </a:prstGeom>
-          <a:solidFill>
-            <a:srgbClr val="0D1B5E"/>
+            <a:off x="411480" y="4206240"/>
+            <a:ext cx="11365992" cy="2258568"/>
+          </a:xfrm>
+          <a:prstGeom prst="rect">
+            <a:avLst/>
+          </a:prstGeom>
+          <a:solidFill>
+            <a:srgbClr val="FFFFFF"/>
           </a:solidFill>
           <a:ln w="25400">
             <a:solidFill>
@@ -25274,7 +26785,7 @@
           </a:ln>
         </p:spPr>
         <p:txBody>
-          <a:bodyPr wrap="square" lIns="76200" tIns="76200" rIns="76200" bIns="76200" rtlCol="0" anchor="ctr">
+          <a:bodyPr wrap="square" lIns="76200" tIns="76200" rIns="76200" bIns="76200" rtlCol="0" anchor="t">
             <a:normAutofit/>
           </a:bodyPr>
           <a:lstStyle/>
@@ -25283,17 +26794,34 @@
               <a:buNone/>
             </a:pPr>
             <a:r>
-              <a:rPr lang="en-US" sz="2400" dirty="0">
-                <a:solidFill>
-                  <a:srgbClr val="FABB2E"/>
-                </a:solidFill>
-                <a:latin typeface="Trebuchet MS" pitchFamily="34" charset="0"/>
-                <a:ea typeface="Trebuchet MS" pitchFamily="34" charset="-122"/>
-                <a:cs typeface="Trebuchet MS" pitchFamily="34" charset="-120"/>
-              </a:rPr>
-              <a:t>2.4 cm3/s</a:t>
-            </a:r>
-            <a:endParaRPr lang="en-US" sz="2400" dirty="0"/>
+              <a:rPr lang="en-US" sz="1800" b="1" dirty="0">
+                <a:solidFill>
+                  <a:srgbClr val="1A1A2E"/>
+                </a:solidFill>
+                <a:latin typeface="Trebuchet MS" pitchFamily="34" charset="0"/>
+                <a:ea typeface="Trebuchet MS" pitchFamily="34" charset="-122"/>
+                <a:cs typeface="Trebuchet MS" pitchFamily="34" charset="-120"/>
+              </a:rPr>
+              <a:t>Q1  </a:t>
+            </a:r>
+            <a:pPr algn="l" indent="0" marL="0">
+              <a:spcAft>
+                <a:spcPts val="800"/>
+              </a:spcAft>
+              <a:buNone/>
+            </a:pPr>
+            <a:r>
+              <a:rPr lang="en-US" sz="1800" dirty="0">
+                <a:solidFill>
+                  <a:srgbClr val="1A1A2E"/>
+                </a:solidFill>
+                <a:latin typeface="Trebuchet MS" pitchFamily="34" charset="0"/>
+                <a:ea typeface="Trebuchet MS" pitchFamily="34" charset="-122"/>
+                <a:cs typeface="Trebuchet MS" pitchFamily="34" charset="-120"/>
+              </a:rPr>
+              <a:t>Using collision theory, explain fully why raising the temperature of a reacting mixture by 10 degrees Celsius can roughly double the rate of reaction, and explain why a catalyst has a different effect on the same mixture.  [6 marks]</a:t>
+            </a:r>
+            <a:endParaRPr lang="en-US" sz="1800" dirty="0"/>
           </a:p>
         </p:txBody>
       </p:sp>
@@ -25677,13 +27205,13 @@
             <a:r>
               <a:rPr lang="en-US" sz="1800" b="1" dirty="0">
                 <a:solidFill>
-                  <a:srgbClr val="B71C1C"/>
-                </a:solidFill>
-                <a:latin typeface="Trebuchet MS" pitchFamily="34" charset="0"/>
-                <a:ea typeface="Trebuchet MS" pitchFamily="34" charset="-122"/>
-                <a:cs typeface="Trebuchet MS" pitchFamily="34" charset="-120"/>
-              </a:rPr>
-              <a:t>Review · MASTERING</a:t>
+                  <a:srgbClr val="2E7D32"/>
+                </a:solidFill>
+                <a:latin typeface="Trebuchet MS" pitchFamily="34" charset="0"/>
+                <a:ea typeface="Trebuchet MS" pitchFamily="34" charset="-122"/>
+                <a:cs typeface="Trebuchet MS" pitchFamily="34" charset="-120"/>
+              </a:rPr>
+              <a:t>Review · DEVELOPING</a:t>
             </a:r>
             <a:endParaRPr lang="en-US" sz="1800" dirty="0"/>
           </a:p>
@@ -25739,13 +27267,13 @@
         <p:spPr>
           <a:xfrm>
             <a:off x="411480" y="1389888"/>
-            <a:ext cx="3978097" cy="5074920"/>
-          </a:xfrm>
-          <a:prstGeom prst="rect">
-            <a:avLst/>
-          </a:prstGeom>
-          <a:solidFill>
-            <a:srgbClr val="B71C1C"/>
+            <a:ext cx="3978097" cy="1655064"/>
+          </a:xfrm>
+          <a:prstGeom prst="rect">
+            <a:avLst/>
+          </a:prstGeom>
+          <a:solidFill>
+            <a:srgbClr val="2E7D32"/>
           </a:solidFill>
           <a:ln/>
         </p:spPr>
@@ -25767,7 +27295,7 @@
                 <a:ea typeface="Trebuchet MS" pitchFamily="34" charset="-122"/>
                 <a:cs typeface="Trebuchet MS" pitchFamily="34" charset="-120"/>
               </a:rPr>
-              <a:t>Temperature and catalyst compared</a:t>
+              <a:t>Three factors that change rate</a:t>
             </a:r>
             <a:endParaRPr lang="en-US" sz="2800" dirty="0"/>
           </a:p>
@@ -25782,7 +27310,7 @@
         <p:spPr>
           <a:xfrm>
             <a:off x="4462729" y="1389888"/>
-            <a:ext cx="7314743" cy="5074920"/>
+            <a:ext cx="7314743" cy="1655064"/>
           </a:xfrm>
           <a:prstGeom prst="rect">
             <a:avLst/>
@@ -25814,7 +27342,7 @@
                 <a:ea typeface="Trebuchet MS" pitchFamily="34" charset="-122"/>
                 <a:cs typeface="Trebuchet MS" pitchFamily="34" charset="-120"/>
               </a:rPr>
-              <a:t>Temperature raises collision energy and frequency, a catalyst lowers activation energy</a:t>
+              <a:t>Temperature, concentration, surface area</a:t>
             </a:r>
             <a:endParaRPr lang="en-US" sz="2400" dirty="0"/>
           </a:p>
@@ -25823,6 +27351,186 @@
       <p:sp>
         <p:nvSpPr>
           <p:cNvPr id="13" name="Text 11"/>
+          <p:cNvSpPr/>
+          <p:nvPr/>
+        </p:nvSpPr>
+        <p:spPr>
+          <a:xfrm>
+            <a:off x="411480" y="3099816"/>
+            <a:ext cx="3978097" cy="1655064"/>
+          </a:xfrm>
+          <a:prstGeom prst="rect">
+            <a:avLst/>
+          </a:prstGeom>
+          <a:solidFill>
+            <a:srgbClr val="2E7D32"/>
+          </a:solidFill>
+          <a:ln/>
+        </p:spPr>
+        <p:txBody>
+          <a:bodyPr wrap="square" lIns="76200" tIns="76200" rIns="76200" bIns="76200" rtlCol="0" anchor="ctr">
+            <a:normAutofit/>
+          </a:bodyPr>
+          <a:lstStyle/>
+          <a:p>
+            <a:pPr algn="l" indent="0" marL="0">
+              <a:buNone/>
+            </a:pPr>
+            <a:r>
+              <a:rPr lang="en-US" sz="2800" b="1" dirty="0">
+                <a:solidFill>
+                  <a:srgbClr val="FFFFFF"/>
+                </a:solidFill>
+                <a:latin typeface="Trebuchet MS" pitchFamily="34" charset="0"/>
+                <a:ea typeface="Trebuchet MS" pitchFamily="34" charset="-122"/>
+                <a:cs typeface="Trebuchet MS" pitchFamily="34" charset="-120"/>
+              </a:rPr>
+              <a:t>What a catalyst does</a:t>
+            </a:r>
+            <a:endParaRPr lang="en-US" sz="2800" dirty="0"/>
+          </a:p>
+        </p:txBody>
+      </p:sp>
+      <p:sp>
+        <p:nvSpPr>
+          <p:cNvPr id="14" name="Text 12"/>
+          <p:cNvSpPr/>
+          <p:nvPr/>
+        </p:nvSpPr>
+        <p:spPr>
+          <a:xfrm>
+            <a:off x="4462729" y="3099816"/>
+            <a:ext cx="7314743" cy="1655064"/>
+          </a:xfrm>
+          <a:prstGeom prst="rect">
+            <a:avLst/>
+          </a:prstGeom>
+          <a:solidFill>
+            <a:srgbClr val="0D1B5E"/>
+          </a:solidFill>
+          <a:ln w="25400">
+            <a:solidFill>
+              <a:srgbClr val="FABB2E"/>
+            </a:solidFill>
+          </a:ln>
+        </p:spPr>
+        <p:txBody>
+          <a:bodyPr wrap="square" lIns="76200" tIns="76200" rIns="76200" bIns="76200" rtlCol="0" anchor="ctr">
+            <a:normAutofit/>
+          </a:bodyPr>
+          <a:lstStyle/>
+          <a:p>
+            <a:pPr algn="l" indent="0" marL="0">
+              <a:buNone/>
+            </a:pPr>
+            <a:r>
+              <a:rPr lang="en-US" sz="2400" dirty="0">
+                <a:solidFill>
+                  <a:srgbClr val="FABB2E"/>
+                </a:solidFill>
+                <a:latin typeface="Trebuchet MS" pitchFamily="34" charset="0"/>
+                <a:ea typeface="Trebuchet MS" pitchFamily="34" charset="-122"/>
+                <a:cs typeface="Trebuchet MS" pitchFamily="34" charset="-120"/>
+              </a:rPr>
+              <a:t>Speeds the reaction without being used up</a:t>
+            </a:r>
+            <a:endParaRPr lang="en-US" sz="2400" dirty="0"/>
+          </a:p>
+        </p:txBody>
+      </p:sp>
+      <p:sp>
+        <p:nvSpPr>
+          <p:cNvPr id="15" name="Text 13"/>
+          <p:cNvSpPr/>
+          <p:nvPr/>
+        </p:nvSpPr>
+        <p:spPr>
+          <a:xfrm>
+            <a:off x="411480" y="4809744"/>
+            <a:ext cx="3978097" cy="1655064"/>
+          </a:xfrm>
+          <a:prstGeom prst="rect">
+            <a:avLst/>
+          </a:prstGeom>
+          <a:solidFill>
+            <a:srgbClr val="2E7D32"/>
+          </a:solidFill>
+          <a:ln/>
+        </p:spPr>
+        <p:txBody>
+          <a:bodyPr wrap="square" lIns="76200" tIns="76200" rIns="76200" bIns="76200" rtlCol="0" anchor="ctr">
+            <a:normAutofit/>
+          </a:bodyPr>
+          <a:lstStyle/>
+          <a:p>
+            <a:pPr algn="l" indent="0" marL="0">
+              <a:buNone/>
+            </a:pPr>
+            <a:r>
+              <a:rPr lang="en-US" sz="2800" b="1" dirty="0">
+                <a:solidFill>
+                  <a:srgbClr val="FFFFFF"/>
+                </a:solidFill>
+                <a:latin typeface="Trebuchet MS" pitchFamily="34" charset="0"/>
+                <a:ea typeface="Trebuchet MS" pitchFamily="34" charset="-122"/>
+                <a:cs typeface="Trebuchet MS" pitchFamily="34" charset="-120"/>
+              </a:rPr>
+              <a:t>Unit of rate by gas volume</a:t>
+            </a:r>
+            <a:endParaRPr lang="en-US" sz="2800" dirty="0"/>
+          </a:p>
+        </p:txBody>
+      </p:sp>
+      <p:sp>
+        <p:nvSpPr>
+          <p:cNvPr id="16" name="Text 14"/>
+          <p:cNvSpPr/>
+          <p:nvPr/>
+        </p:nvSpPr>
+        <p:spPr>
+          <a:xfrm>
+            <a:off x="4462729" y="4809744"/>
+            <a:ext cx="7314743" cy="1655064"/>
+          </a:xfrm>
+          <a:prstGeom prst="rect">
+            <a:avLst/>
+          </a:prstGeom>
+          <a:solidFill>
+            <a:srgbClr val="0D1B5E"/>
+          </a:solidFill>
+          <a:ln w="25400">
+            <a:solidFill>
+              <a:srgbClr val="FABB2E"/>
+            </a:solidFill>
+          </a:ln>
+        </p:spPr>
+        <p:txBody>
+          <a:bodyPr wrap="square" lIns="76200" tIns="76200" rIns="76200" bIns="76200" rtlCol="0" anchor="ctr">
+            <a:normAutofit/>
+          </a:bodyPr>
+          <a:lstStyle/>
+          <a:p>
+            <a:pPr algn="l" indent="0" marL="0">
+              <a:buNone/>
+            </a:pPr>
+            <a:r>
+              <a:rPr lang="en-US" sz="2400" dirty="0">
+                <a:solidFill>
+                  <a:srgbClr val="FABB2E"/>
+                </a:solidFill>
+                <a:latin typeface="Trebuchet MS" pitchFamily="34" charset="0"/>
+                <a:ea typeface="Trebuchet MS" pitchFamily="34" charset="-122"/>
+                <a:cs typeface="Trebuchet MS" pitchFamily="34" charset="-120"/>
+              </a:rPr>
+              <a:t>cm3/s</a:t>
+            </a:r>
+            <a:endParaRPr lang="en-US" sz="2400" dirty="0"/>
+          </a:p>
+        </p:txBody>
+      </p:sp>
+      <p:sp>
+        <p:nvSpPr>
+          <p:cNvPr id="17" name="Text 15"/>
           <p:cNvSpPr/>
           <p:nvPr/>
         </p:nvSpPr>
@@ -25916,6 +27624,1232 @@
         <p:spPr>
           <a:xfrm>
             <a:off x="0" y="0"/>
+            <a:ext cx="2031492" cy="502920"/>
+          </a:xfrm>
+          <a:prstGeom prst="rect">
+            <a:avLst/>
+          </a:prstGeom>
+          <a:solidFill>
+            <a:srgbClr val="152347"/>
+          </a:solidFill>
+          <a:ln/>
+        </p:spPr>
+        <p:txBody>
+          <a:bodyPr wrap="square" rtlCol="0" anchor="ctr"/>
+          <a:lstStyle/>
+          <a:p>
+            <a:pPr algn="ctr" indent="0" marL="0">
+              <a:buNone/>
+            </a:pPr>
+            <a:r>
+              <a:rPr lang="en-US" sz="1000" dirty="0">
+                <a:solidFill>
+                  <a:srgbClr val="FFFFFF"/>
+                </a:solidFill>
+                <a:latin typeface="Trebuchet MS" pitchFamily="34" charset="0"/>
+                <a:ea typeface="Trebuchet MS" pitchFamily="34" charset="-122"/>
+                <a:cs typeface="Trebuchet MS" pitchFamily="34" charset="-120"/>
+              </a:rPr>
+              <a:t>DO NOW</a:t>
+            </a:r>
+            <a:endParaRPr lang="en-US" sz="1000" dirty="0"/>
+          </a:p>
+        </p:txBody>
+      </p:sp>
+      <p:sp>
+        <p:nvSpPr>
+          <p:cNvPr id="3" name="Text 1"/>
+          <p:cNvSpPr/>
+          <p:nvPr/>
+        </p:nvSpPr>
+        <p:spPr>
+          <a:xfrm>
+            <a:off x="2031492" y="0"/>
+            <a:ext cx="2031492" cy="502920"/>
+          </a:xfrm>
+          <a:prstGeom prst="rect">
+            <a:avLst/>
+          </a:prstGeom>
+          <a:solidFill>
+            <a:srgbClr val="152347"/>
+          </a:solidFill>
+          <a:ln/>
+        </p:spPr>
+        <p:txBody>
+          <a:bodyPr wrap="square" rtlCol="0" anchor="ctr"/>
+          <a:lstStyle/>
+          <a:p>
+            <a:pPr algn="ctr" indent="0" marL="0">
+              <a:buNone/>
+            </a:pPr>
+            <a:r>
+              <a:rPr lang="en-US" sz="1000" dirty="0">
+                <a:solidFill>
+                  <a:srgbClr val="FFFFFF"/>
+                </a:solidFill>
+                <a:latin typeface="Trebuchet MS" pitchFamily="34" charset="0"/>
+                <a:ea typeface="Trebuchet MS" pitchFamily="34" charset="-122"/>
+                <a:cs typeface="Trebuchet MS" pitchFamily="34" charset="-120"/>
+              </a:rPr>
+              <a:t>ENGAGE</a:t>
+            </a:r>
+            <a:endParaRPr lang="en-US" sz="1000" dirty="0"/>
+          </a:p>
+        </p:txBody>
+      </p:sp>
+      <p:sp>
+        <p:nvSpPr>
+          <p:cNvPr id="4" name="Text 2"/>
+          <p:cNvSpPr/>
+          <p:nvPr/>
+        </p:nvSpPr>
+        <p:spPr>
+          <a:xfrm>
+            <a:off x="4062984" y="0"/>
+            <a:ext cx="2031492" cy="502920"/>
+          </a:xfrm>
+          <a:prstGeom prst="rect">
+            <a:avLst/>
+          </a:prstGeom>
+          <a:solidFill>
+            <a:srgbClr val="152347"/>
+          </a:solidFill>
+          <a:ln/>
+        </p:spPr>
+        <p:txBody>
+          <a:bodyPr wrap="square" rtlCol="0" anchor="ctr"/>
+          <a:lstStyle/>
+          <a:p>
+            <a:pPr algn="ctr" indent="0" marL="0">
+              <a:buNone/>
+            </a:pPr>
+            <a:r>
+              <a:rPr lang="en-US" sz="1000" dirty="0">
+                <a:solidFill>
+                  <a:srgbClr val="FFFFFF"/>
+                </a:solidFill>
+                <a:latin typeface="Trebuchet MS" pitchFamily="34" charset="0"/>
+                <a:ea typeface="Trebuchet MS" pitchFamily="34" charset="-122"/>
+                <a:cs typeface="Trebuchet MS" pitchFamily="34" charset="-120"/>
+              </a:rPr>
+              <a:t>LEARN</a:t>
+            </a:r>
+            <a:endParaRPr lang="en-US" sz="1000" dirty="0"/>
+          </a:p>
+        </p:txBody>
+      </p:sp>
+      <p:sp>
+        <p:nvSpPr>
+          <p:cNvPr id="5" name="Text 3"/>
+          <p:cNvSpPr/>
+          <p:nvPr/>
+        </p:nvSpPr>
+        <p:spPr>
+          <a:xfrm>
+            <a:off x="6094476" y="0"/>
+            <a:ext cx="2031492" cy="502920"/>
+          </a:xfrm>
+          <a:prstGeom prst="rect">
+            <a:avLst/>
+          </a:prstGeom>
+          <a:solidFill>
+            <a:srgbClr val="152347"/>
+          </a:solidFill>
+          <a:ln/>
+        </p:spPr>
+        <p:txBody>
+          <a:bodyPr wrap="square" rtlCol="0" anchor="ctr"/>
+          <a:lstStyle/>
+          <a:p>
+            <a:pPr algn="ctr" indent="0" marL="0">
+              <a:buNone/>
+            </a:pPr>
+            <a:r>
+              <a:rPr lang="en-US" sz="1000" dirty="0">
+                <a:solidFill>
+                  <a:srgbClr val="FFFFFF"/>
+                </a:solidFill>
+                <a:latin typeface="Trebuchet MS" pitchFamily="34" charset="0"/>
+                <a:ea typeface="Trebuchet MS" pitchFamily="34" charset="-122"/>
+                <a:cs typeface="Trebuchet MS" pitchFamily="34" charset="-120"/>
+              </a:rPr>
+              <a:t>BUILD</a:t>
+            </a:r>
+            <a:endParaRPr lang="en-US" sz="1000" dirty="0"/>
+          </a:p>
+        </p:txBody>
+      </p:sp>
+      <p:sp>
+        <p:nvSpPr>
+          <p:cNvPr id="6" name="Text 4"/>
+          <p:cNvSpPr/>
+          <p:nvPr/>
+        </p:nvSpPr>
+        <p:spPr>
+          <a:xfrm>
+            <a:off x="8125968" y="0"/>
+            <a:ext cx="2031492" cy="502920"/>
+          </a:xfrm>
+          <a:prstGeom prst="rect">
+            <a:avLst/>
+          </a:prstGeom>
+          <a:solidFill>
+            <a:srgbClr val="152347"/>
+          </a:solidFill>
+          <a:ln/>
+        </p:spPr>
+        <p:txBody>
+          <a:bodyPr wrap="square" rtlCol="0" anchor="ctr"/>
+          <a:lstStyle/>
+          <a:p>
+            <a:pPr algn="ctr" indent="0" marL="0">
+              <a:buNone/>
+            </a:pPr>
+            <a:r>
+              <a:rPr lang="en-US" sz="1000" dirty="0">
+                <a:solidFill>
+                  <a:srgbClr val="FFFFFF"/>
+                </a:solidFill>
+                <a:latin typeface="Trebuchet MS" pitchFamily="34" charset="0"/>
+                <a:ea typeface="Trebuchet MS" pitchFamily="34" charset="-122"/>
+                <a:cs typeface="Trebuchet MS" pitchFamily="34" charset="-120"/>
+              </a:rPr>
+              <a:t>APPLY</a:t>
+            </a:r>
+            <a:endParaRPr lang="en-US" sz="1000" dirty="0"/>
+          </a:p>
+        </p:txBody>
+      </p:sp>
+      <p:sp>
+        <p:nvSpPr>
+          <p:cNvPr id="7" name="Text 5"/>
+          <p:cNvSpPr/>
+          <p:nvPr/>
+        </p:nvSpPr>
+        <p:spPr>
+          <a:xfrm>
+            <a:off x="10157460" y="0"/>
+            <a:ext cx="2031492" cy="502920"/>
+          </a:xfrm>
+          <a:prstGeom prst="rect">
+            <a:avLst/>
+          </a:prstGeom>
+          <a:solidFill>
+            <a:srgbClr val="1B5E20"/>
+          </a:solidFill>
+          <a:ln/>
+        </p:spPr>
+        <p:txBody>
+          <a:bodyPr wrap="square" rtlCol="0" anchor="ctr"/>
+          <a:lstStyle/>
+          <a:p>
+            <a:pPr algn="ctr" indent="0" marL="0">
+              <a:buNone/>
+            </a:pPr>
+            <a:r>
+              <a:rPr lang="en-US" sz="1100" b="1" dirty="0">
+                <a:solidFill>
+                  <a:srgbClr val="FFFFFF"/>
+                </a:solidFill>
+                <a:latin typeface="Trebuchet MS" pitchFamily="34" charset="0"/>
+                <a:ea typeface="Trebuchet MS" pitchFamily="34" charset="-122"/>
+                <a:cs typeface="Trebuchet MS" pitchFamily="34" charset="-120"/>
+              </a:rPr>
+              <a:t>REVIEW</a:t>
+            </a:r>
+            <a:endParaRPr lang="en-US" sz="1100" dirty="0"/>
+          </a:p>
+        </p:txBody>
+      </p:sp>
+      <p:sp>
+        <p:nvSpPr>
+          <p:cNvPr id="8" name="Shape 6"/>
+          <p:cNvSpPr/>
+          <p:nvPr/>
+        </p:nvSpPr>
+        <p:spPr>
+          <a:xfrm>
+            <a:off x="0" y="502920"/>
+            <a:ext cx="12188952" cy="36576"/>
+          </a:xfrm>
+          <a:prstGeom prst="rect">
+            <a:avLst/>
+          </a:prstGeom>
+          <a:solidFill>
+            <a:srgbClr val="FABB2E"/>
+          </a:solidFill>
+          <a:ln/>
+        </p:spPr>
+      </p:sp>
+      <p:sp>
+        <p:nvSpPr>
+          <p:cNvPr id="9" name="Text 7"/>
+          <p:cNvSpPr/>
+          <p:nvPr/>
+        </p:nvSpPr>
+        <p:spPr>
+          <a:xfrm>
+            <a:off x="411480" y="603504"/>
+            <a:ext cx="7956194" cy="320040"/>
+          </a:xfrm>
+          <a:prstGeom prst="rect">
+            <a:avLst/>
+          </a:prstGeom>
+          <a:noFill/>
+          <a:ln/>
+        </p:spPr>
+        <p:txBody>
+          <a:bodyPr wrap="square" rtlCol="0" anchor="ctr"/>
+          <a:lstStyle/>
+          <a:p>
+            <a:pPr indent="0" marL="0">
+              <a:buNone/>
+            </a:pPr>
+            <a:r>
+              <a:rPr lang="en-US" sz="1800" b="1" dirty="0">
+                <a:solidFill>
+                  <a:srgbClr val="E65100"/>
+                </a:solidFill>
+                <a:latin typeface="Trebuchet MS" pitchFamily="34" charset="0"/>
+                <a:ea typeface="Trebuchet MS" pitchFamily="34" charset="-122"/>
+                <a:cs typeface="Trebuchet MS" pitchFamily="34" charset="-120"/>
+              </a:rPr>
+              <a:t>Review · REACHING</a:t>
+            </a:r>
+            <a:endParaRPr lang="en-US" sz="1800" dirty="0"/>
+          </a:p>
+        </p:txBody>
+      </p:sp>
+      <p:sp>
+        <p:nvSpPr>
+          <p:cNvPr id="10" name="Text 8"/>
+          <p:cNvSpPr/>
+          <p:nvPr/>
+        </p:nvSpPr>
+        <p:spPr>
+          <a:xfrm>
+            <a:off x="0" y="950976"/>
+            <a:ext cx="12188952" cy="347472"/>
+          </a:xfrm>
+          <a:prstGeom prst="rect">
+            <a:avLst/>
+          </a:prstGeom>
+          <a:solidFill>
+            <a:srgbClr val="6A0DAD"/>
+          </a:solidFill>
+          <a:ln/>
+        </p:spPr>
+        <p:txBody>
+          <a:bodyPr wrap="square" lIns="101600" tIns="101600" rIns="101600" bIns="101600" rtlCol="0" anchor="ctr"/>
+          <a:lstStyle/>
+          <a:p>
+            <a:pPr algn="l" indent="0" marL="0">
+              <a:buNone/>
+            </a:pPr>
+            <a:r>
+              <a:rPr lang="en-US" sz="1300" b="1" dirty="0">
+                <a:solidFill>
+                  <a:srgbClr val="FFFFFF"/>
+                </a:solidFill>
+                <a:latin typeface="Trebuchet MS" pitchFamily="34" charset="0"/>
+                <a:ea typeface="Trebuchet MS" pitchFamily="34" charset="-122"/>
+                <a:cs typeface="Trebuchet MS" pitchFamily="34" charset="-120"/>
+              </a:rPr>
+              <a:t>☞  Purple pen time · mark and correct your answers</a:t>
+            </a:r>
+            <a:endParaRPr lang="en-US" sz="1300" dirty="0"/>
+          </a:p>
+        </p:txBody>
+      </p:sp>
+      <p:sp>
+        <p:nvSpPr>
+          <p:cNvPr id="11" name="Text 9"/>
+          <p:cNvSpPr/>
+          <p:nvPr/>
+        </p:nvSpPr>
+        <p:spPr>
+          <a:xfrm>
+            <a:off x="411480" y="1389888"/>
+            <a:ext cx="3978097" cy="1655064"/>
+          </a:xfrm>
+          <a:prstGeom prst="rect">
+            <a:avLst/>
+          </a:prstGeom>
+          <a:solidFill>
+            <a:srgbClr val="E65100"/>
+          </a:solidFill>
+          <a:ln/>
+        </p:spPr>
+        <p:txBody>
+          <a:bodyPr wrap="square" lIns="76200" tIns="76200" rIns="76200" bIns="76200" rtlCol="0" anchor="ctr">
+            <a:normAutofit/>
+          </a:bodyPr>
+          <a:lstStyle/>
+          <a:p>
+            <a:pPr algn="l" indent="0" marL="0">
+              <a:buNone/>
+            </a:pPr>
+            <a:r>
+              <a:rPr lang="en-US" sz="2800" b="1" dirty="0">
+                <a:solidFill>
+                  <a:srgbClr val="FFFFFF"/>
+                </a:solidFill>
+                <a:latin typeface="Trebuchet MS" pitchFamily="34" charset="0"/>
+                <a:ea typeface="Trebuchet MS" pitchFamily="34" charset="-122"/>
+                <a:cs typeface="Trebuchet MS" pitchFamily="34" charset="-120"/>
+              </a:rPr>
+              <a:t>Why powder beats chips</a:t>
+            </a:r>
+            <a:endParaRPr lang="en-US" sz="2800" dirty="0"/>
+          </a:p>
+        </p:txBody>
+      </p:sp>
+      <p:sp>
+        <p:nvSpPr>
+          <p:cNvPr id="12" name="Text 10"/>
+          <p:cNvSpPr/>
+          <p:nvPr/>
+        </p:nvSpPr>
+        <p:spPr>
+          <a:xfrm>
+            <a:off x="4462729" y="1389888"/>
+            <a:ext cx="7314743" cy="1655064"/>
+          </a:xfrm>
+          <a:prstGeom prst="rect">
+            <a:avLst/>
+          </a:prstGeom>
+          <a:solidFill>
+            <a:srgbClr val="0D1B5E"/>
+          </a:solidFill>
+          <a:ln w="25400">
+            <a:solidFill>
+              <a:srgbClr val="FABB2E"/>
+            </a:solidFill>
+          </a:ln>
+        </p:spPr>
+        <p:txBody>
+          <a:bodyPr wrap="square" lIns="76200" tIns="76200" rIns="76200" bIns="76200" rtlCol="0" anchor="ctr">
+            <a:normAutofit/>
+          </a:bodyPr>
+          <a:lstStyle/>
+          <a:p>
+            <a:pPr algn="l" indent="0" marL="0">
+              <a:buNone/>
+            </a:pPr>
+            <a:r>
+              <a:rPr lang="en-US" sz="2400" dirty="0">
+                <a:solidFill>
+                  <a:srgbClr val="FABB2E"/>
+                </a:solidFill>
+                <a:latin typeface="Trebuchet MS" pitchFamily="34" charset="0"/>
+                <a:ea typeface="Trebuchet MS" pitchFamily="34" charset="-122"/>
+                <a:cs typeface="Trebuchet MS" pitchFamily="34" charset="-120"/>
+              </a:rPr>
+              <a:t>More surface area, more frequent collisions</a:t>
+            </a:r>
+            <a:endParaRPr lang="en-US" sz="2400" dirty="0"/>
+          </a:p>
+        </p:txBody>
+      </p:sp>
+      <p:sp>
+        <p:nvSpPr>
+          <p:cNvPr id="13" name="Text 11"/>
+          <p:cNvSpPr/>
+          <p:nvPr/>
+        </p:nvSpPr>
+        <p:spPr>
+          <a:xfrm>
+            <a:off x="411480" y="3099816"/>
+            <a:ext cx="3978097" cy="1655064"/>
+          </a:xfrm>
+          <a:prstGeom prst="rect">
+            <a:avLst/>
+          </a:prstGeom>
+          <a:solidFill>
+            <a:srgbClr val="E65100"/>
+          </a:solidFill>
+          <a:ln/>
+        </p:spPr>
+        <p:txBody>
+          <a:bodyPr wrap="square" lIns="76200" tIns="76200" rIns="76200" bIns="76200" rtlCol="0" anchor="ctr">
+            <a:normAutofit/>
+          </a:bodyPr>
+          <a:lstStyle/>
+          <a:p>
+            <a:pPr algn="l" indent="0" marL="0">
+              <a:buNone/>
+            </a:pPr>
+            <a:r>
+              <a:rPr lang="en-US" sz="2800" b="1" dirty="0">
+                <a:solidFill>
+                  <a:srgbClr val="FFFFFF"/>
+                </a:solidFill>
+                <a:latin typeface="Trebuchet MS" pitchFamily="34" charset="0"/>
+                <a:ea typeface="Trebuchet MS" pitchFamily="34" charset="-122"/>
+                <a:cs typeface="Trebuchet MS" pitchFamily="34" charset="-120"/>
+              </a:rPr>
+              <a:t>Why the curve levels off</a:t>
+            </a:r>
+            <a:endParaRPr lang="en-US" sz="2800" dirty="0"/>
+          </a:p>
+        </p:txBody>
+      </p:sp>
+      <p:sp>
+        <p:nvSpPr>
+          <p:cNvPr id="14" name="Text 12"/>
+          <p:cNvSpPr/>
+          <p:nvPr/>
+        </p:nvSpPr>
+        <p:spPr>
+          <a:xfrm>
+            <a:off x="4462729" y="3099816"/>
+            <a:ext cx="7314743" cy="1655064"/>
+          </a:xfrm>
+          <a:prstGeom prst="rect">
+            <a:avLst/>
+          </a:prstGeom>
+          <a:solidFill>
+            <a:srgbClr val="0D1B5E"/>
+          </a:solidFill>
+          <a:ln w="25400">
+            <a:solidFill>
+              <a:srgbClr val="FABB2E"/>
+            </a:solidFill>
+          </a:ln>
+        </p:spPr>
+        <p:txBody>
+          <a:bodyPr wrap="square" lIns="76200" tIns="76200" rIns="76200" bIns="76200" rtlCol="0" anchor="ctr">
+            <a:normAutofit/>
+          </a:bodyPr>
+          <a:lstStyle/>
+          <a:p>
+            <a:pPr algn="l" indent="0" marL="0">
+              <a:buNone/>
+            </a:pPr>
+            <a:r>
+              <a:rPr lang="en-US" sz="2400" dirty="0">
+                <a:solidFill>
+                  <a:srgbClr val="FABB2E"/>
+                </a:solidFill>
+                <a:latin typeface="Trebuchet MS" pitchFamily="34" charset="0"/>
+                <a:ea typeface="Trebuchet MS" pitchFamily="34" charset="-122"/>
+                <a:cs typeface="Trebuchet MS" pitchFamily="34" charset="-120"/>
+              </a:rPr>
+              <a:t>A reactant has run out</a:t>
+            </a:r>
+            <a:endParaRPr lang="en-US" sz="2400" dirty="0"/>
+          </a:p>
+        </p:txBody>
+      </p:sp>
+      <p:sp>
+        <p:nvSpPr>
+          <p:cNvPr id="15" name="Text 13"/>
+          <p:cNvSpPr/>
+          <p:nvPr/>
+        </p:nvSpPr>
+        <p:spPr>
+          <a:xfrm>
+            <a:off x="411480" y="4809744"/>
+            <a:ext cx="3978097" cy="1655064"/>
+          </a:xfrm>
+          <a:prstGeom prst="rect">
+            <a:avLst/>
+          </a:prstGeom>
+          <a:solidFill>
+            <a:srgbClr val="E65100"/>
+          </a:solidFill>
+          <a:ln/>
+        </p:spPr>
+        <p:txBody>
+          <a:bodyPr wrap="square" lIns="76200" tIns="76200" rIns="76200" bIns="76200" rtlCol="0" anchor="ctr">
+            <a:normAutofit/>
+          </a:bodyPr>
+          <a:lstStyle/>
+          <a:p>
+            <a:pPr algn="l" indent="0" marL="0">
+              <a:buNone/>
+            </a:pPr>
+            <a:r>
+              <a:rPr lang="en-US" sz="2800" b="1" dirty="0">
+                <a:solidFill>
+                  <a:srgbClr val="FFFFFF"/>
+                </a:solidFill>
+                <a:latin typeface="Trebuchet MS" pitchFamily="34" charset="0"/>
+                <a:ea typeface="Trebuchet MS" pitchFamily="34" charset="-122"/>
+                <a:cs typeface="Trebuchet MS" pitchFamily="34" charset="-120"/>
+              </a:rPr>
+              <a:t>60 cm3 in 25 s</a:t>
+            </a:r>
+            <a:endParaRPr lang="en-US" sz="2800" dirty="0"/>
+          </a:p>
+        </p:txBody>
+      </p:sp>
+      <p:sp>
+        <p:nvSpPr>
+          <p:cNvPr id="16" name="Text 14"/>
+          <p:cNvSpPr/>
+          <p:nvPr/>
+        </p:nvSpPr>
+        <p:spPr>
+          <a:xfrm>
+            <a:off x="4462729" y="4809744"/>
+            <a:ext cx="7314743" cy="1655064"/>
+          </a:xfrm>
+          <a:prstGeom prst="rect">
+            <a:avLst/>
+          </a:prstGeom>
+          <a:solidFill>
+            <a:srgbClr val="0D1B5E"/>
+          </a:solidFill>
+          <a:ln w="25400">
+            <a:solidFill>
+              <a:srgbClr val="FABB2E"/>
+            </a:solidFill>
+          </a:ln>
+        </p:spPr>
+        <p:txBody>
+          <a:bodyPr wrap="square" lIns="76200" tIns="76200" rIns="76200" bIns="76200" rtlCol="0" anchor="ctr">
+            <a:normAutofit/>
+          </a:bodyPr>
+          <a:lstStyle/>
+          <a:p>
+            <a:pPr algn="l" indent="0" marL="0">
+              <a:buNone/>
+            </a:pPr>
+            <a:r>
+              <a:rPr lang="en-US" sz="2400" dirty="0">
+                <a:solidFill>
+                  <a:srgbClr val="FABB2E"/>
+                </a:solidFill>
+                <a:latin typeface="Trebuchet MS" pitchFamily="34" charset="0"/>
+                <a:ea typeface="Trebuchet MS" pitchFamily="34" charset="-122"/>
+                <a:cs typeface="Trebuchet MS" pitchFamily="34" charset="-120"/>
+              </a:rPr>
+              <a:t>2.4 cm3/s</a:t>
+            </a:r>
+            <a:endParaRPr lang="en-US" sz="2400" dirty="0"/>
+          </a:p>
+        </p:txBody>
+      </p:sp>
+      <p:sp>
+        <p:nvSpPr>
+          <p:cNvPr id="17" name="Text 15"/>
+          <p:cNvSpPr/>
+          <p:nvPr/>
+        </p:nvSpPr>
+        <p:spPr>
+          <a:xfrm>
+            <a:off x="0" y="6537960"/>
+            <a:ext cx="12188952" cy="320040"/>
+          </a:xfrm>
+          <a:prstGeom prst="rect">
+            <a:avLst/>
+          </a:prstGeom>
+          <a:solidFill>
+            <a:srgbClr val="0D1B5E"/>
+          </a:solidFill>
+          <a:ln/>
+        </p:spPr>
+        <p:txBody>
+          <a:bodyPr wrap="square" lIns="101600" tIns="101600" rIns="101600" bIns="101600" rtlCol="0" anchor="ctr"/>
+          <a:lstStyle/>
+          <a:p>
+            <a:pPr algn="l" indent="0" marL="0">
+              <a:buNone/>
+            </a:pPr>
+            <a:r>
+              <a:rPr lang="en-US" sz="1100" b="1" dirty="0">
+                <a:solidFill>
+                  <a:srgbClr val="FFFFFF"/>
+                </a:solidFill>
+                <a:latin typeface="Trebuchet MS" pitchFamily="34" charset="0"/>
+                <a:ea typeface="Trebuchet MS" pitchFamily="34" charset="-122"/>
+                <a:cs typeface="Trebuchet MS" pitchFamily="34" charset="-120"/>
+              </a:rPr>
+              <a:t>Learning objective:  </a:t>
+            </a:r>
+            <a:pPr algn="l" indent="0" marL="0">
+              <a:buNone/>
+            </a:pPr>
+            <a:r>
+              <a:rPr lang="en-US" sz="1100" i="1" dirty="0">
+                <a:solidFill>
+                  <a:srgbClr val="FFFFFF"/>
+                </a:solidFill>
+                <a:latin typeface="Trebuchet MS" pitchFamily="34" charset="0"/>
+                <a:ea typeface="Trebuchet MS" pitchFamily="34" charset="-122"/>
+                <a:cs typeface="Trebuchet MS" pitchFamily="34" charset="-120"/>
+              </a:rPr>
+              <a:t>Describe how surface area affects the rate of a reaction</a:t>
+            </a:r>
+            <a:endParaRPr lang="en-US" sz="1100" dirty="0"/>
+          </a:p>
+        </p:txBody>
+      </p:sp>
+    </p:spTree>
+  </p:cSld>
+  <p:clrMapOvr>
+    <a:masterClrMapping/>
+  </p:clrMapOvr>
+</p:sld>
+</file>
+
+<file path=ppt/slides/slide35.xml><?xml version="1.0" encoding="utf-8"?>
+<p:sld xmlns:a="http://schemas.openxmlformats.org/drawingml/2006/main" xmlns:r="http://schemas.openxmlformats.org/officeDocument/2006/relationships" xmlns:p="http://schemas.openxmlformats.org/presentationml/2006/main">
+  <p:cSld name="Slide 35">
+    <p:bg>
+      <p:bgPr>
+        <a:solidFill>
+          <a:srgbClr val="EDF2FA"/>
+        </a:solidFill>
+      </p:bgPr>
+    </p:bg>
+    <p:spTree>
+      <p:nvGrpSpPr>
+        <p:cNvPr id="1" name=""/>
+        <p:cNvGrpSpPr/>
+        <p:nvPr/>
+      </p:nvGrpSpPr>
+      <p:grpSpPr>
+        <a:xfrm>
+          <a:off x="0" y="0"/>
+          <a:ext cx="0" cy="0"/>
+          <a:chOff x="0" y="0"/>
+          <a:chExt cx="0" cy="0"/>
+        </a:xfrm>
+      </p:grpSpPr>
+      <p:sp>
+        <p:nvSpPr>
+          <p:cNvPr id="2" name="Text 0"/>
+          <p:cNvSpPr/>
+          <p:nvPr/>
+        </p:nvSpPr>
+        <p:spPr>
+          <a:xfrm>
+            <a:off x="0" y="0"/>
+            <a:ext cx="2031492" cy="502920"/>
+          </a:xfrm>
+          <a:prstGeom prst="rect">
+            <a:avLst/>
+          </a:prstGeom>
+          <a:solidFill>
+            <a:srgbClr val="152347"/>
+          </a:solidFill>
+          <a:ln/>
+        </p:spPr>
+        <p:txBody>
+          <a:bodyPr wrap="square" rtlCol="0" anchor="ctr"/>
+          <a:lstStyle/>
+          <a:p>
+            <a:pPr algn="ctr" indent="0" marL="0">
+              <a:buNone/>
+            </a:pPr>
+            <a:r>
+              <a:rPr lang="en-US" sz="1000" dirty="0">
+                <a:solidFill>
+                  <a:srgbClr val="FFFFFF"/>
+                </a:solidFill>
+                <a:latin typeface="Trebuchet MS" pitchFamily="34" charset="0"/>
+                <a:ea typeface="Trebuchet MS" pitchFamily="34" charset="-122"/>
+                <a:cs typeface="Trebuchet MS" pitchFamily="34" charset="-120"/>
+              </a:rPr>
+              <a:t>DO NOW</a:t>
+            </a:r>
+            <a:endParaRPr lang="en-US" sz="1000" dirty="0"/>
+          </a:p>
+        </p:txBody>
+      </p:sp>
+      <p:sp>
+        <p:nvSpPr>
+          <p:cNvPr id="3" name="Text 1"/>
+          <p:cNvSpPr/>
+          <p:nvPr/>
+        </p:nvSpPr>
+        <p:spPr>
+          <a:xfrm>
+            <a:off x="2031492" y="0"/>
+            <a:ext cx="2031492" cy="502920"/>
+          </a:xfrm>
+          <a:prstGeom prst="rect">
+            <a:avLst/>
+          </a:prstGeom>
+          <a:solidFill>
+            <a:srgbClr val="152347"/>
+          </a:solidFill>
+          <a:ln/>
+        </p:spPr>
+        <p:txBody>
+          <a:bodyPr wrap="square" rtlCol="0" anchor="ctr"/>
+          <a:lstStyle/>
+          <a:p>
+            <a:pPr algn="ctr" indent="0" marL="0">
+              <a:buNone/>
+            </a:pPr>
+            <a:r>
+              <a:rPr lang="en-US" sz="1000" dirty="0">
+                <a:solidFill>
+                  <a:srgbClr val="FFFFFF"/>
+                </a:solidFill>
+                <a:latin typeface="Trebuchet MS" pitchFamily="34" charset="0"/>
+                <a:ea typeface="Trebuchet MS" pitchFamily="34" charset="-122"/>
+                <a:cs typeface="Trebuchet MS" pitchFamily="34" charset="-120"/>
+              </a:rPr>
+              <a:t>ENGAGE</a:t>
+            </a:r>
+            <a:endParaRPr lang="en-US" sz="1000" dirty="0"/>
+          </a:p>
+        </p:txBody>
+      </p:sp>
+      <p:sp>
+        <p:nvSpPr>
+          <p:cNvPr id="4" name="Text 2"/>
+          <p:cNvSpPr/>
+          <p:nvPr/>
+        </p:nvSpPr>
+        <p:spPr>
+          <a:xfrm>
+            <a:off x="4062984" y="0"/>
+            <a:ext cx="2031492" cy="502920"/>
+          </a:xfrm>
+          <a:prstGeom prst="rect">
+            <a:avLst/>
+          </a:prstGeom>
+          <a:solidFill>
+            <a:srgbClr val="152347"/>
+          </a:solidFill>
+          <a:ln/>
+        </p:spPr>
+        <p:txBody>
+          <a:bodyPr wrap="square" rtlCol="0" anchor="ctr"/>
+          <a:lstStyle/>
+          <a:p>
+            <a:pPr algn="ctr" indent="0" marL="0">
+              <a:buNone/>
+            </a:pPr>
+            <a:r>
+              <a:rPr lang="en-US" sz="1000" dirty="0">
+                <a:solidFill>
+                  <a:srgbClr val="FFFFFF"/>
+                </a:solidFill>
+                <a:latin typeface="Trebuchet MS" pitchFamily="34" charset="0"/>
+                <a:ea typeface="Trebuchet MS" pitchFamily="34" charset="-122"/>
+                <a:cs typeface="Trebuchet MS" pitchFamily="34" charset="-120"/>
+              </a:rPr>
+              <a:t>LEARN</a:t>
+            </a:r>
+            <a:endParaRPr lang="en-US" sz="1000" dirty="0"/>
+          </a:p>
+        </p:txBody>
+      </p:sp>
+      <p:sp>
+        <p:nvSpPr>
+          <p:cNvPr id="5" name="Text 3"/>
+          <p:cNvSpPr/>
+          <p:nvPr/>
+        </p:nvSpPr>
+        <p:spPr>
+          <a:xfrm>
+            <a:off x="6094476" y="0"/>
+            <a:ext cx="2031492" cy="502920"/>
+          </a:xfrm>
+          <a:prstGeom prst="rect">
+            <a:avLst/>
+          </a:prstGeom>
+          <a:solidFill>
+            <a:srgbClr val="152347"/>
+          </a:solidFill>
+          <a:ln/>
+        </p:spPr>
+        <p:txBody>
+          <a:bodyPr wrap="square" rtlCol="0" anchor="ctr"/>
+          <a:lstStyle/>
+          <a:p>
+            <a:pPr algn="ctr" indent="0" marL="0">
+              <a:buNone/>
+            </a:pPr>
+            <a:r>
+              <a:rPr lang="en-US" sz="1000" dirty="0">
+                <a:solidFill>
+                  <a:srgbClr val="FFFFFF"/>
+                </a:solidFill>
+                <a:latin typeface="Trebuchet MS" pitchFamily="34" charset="0"/>
+                <a:ea typeface="Trebuchet MS" pitchFamily="34" charset="-122"/>
+                <a:cs typeface="Trebuchet MS" pitchFamily="34" charset="-120"/>
+              </a:rPr>
+              <a:t>BUILD</a:t>
+            </a:r>
+            <a:endParaRPr lang="en-US" sz="1000" dirty="0"/>
+          </a:p>
+        </p:txBody>
+      </p:sp>
+      <p:sp>
+        <p:nvSpPr>
+          <p:cNvPr id="6" name="Text 4"/>
+          <p:cNvSpPr/>
+          <p:nvPr/>
+        </p:nvSpPr>
+        <p:spPr>
+          <a:xfrm>
+            <a:off x="8125968" y="0"/>
+            <a:ext cx="2031492" cy="502920"/>
+          </a:xfrm>
+          <a:prstGeom prst="rect">
+            <a:avLst/>
+          </a:prstGeom>
+          <a:solidFill>
+            <a:srgbClr val="152347"/>
+          </a:solidFill>
+          <a:ln/>
+        </p:spPr>
+        <p:txBody>
+          <a:bodyPr wrap="square" rtlCol="0" anchor="ctr"/>
+          <a:lstStyle/>
+          <a:p>
+            <a:pPr algn="ctr" indent="0" marL="0">
+              <a:buNone/>
+            </a:pPr>
+            <a:r>
+              <a:rPr lang="en-US" sz="1000" dirty="0">
+                <a:solidFill>
+                  <a:srgbClr val="FFFFFF"/>
+                </a:solidFill>
+                <a:latin typeface="Trebuchet MS" pitchFamily="34" charset="0"/>
+                <a:ea typeface="Trebuchet MS" pitchFamily="34" charset="-122"/>
+                <a:cs typeface="Trebuchet MS" pitchFamily="34" charset="-120"/>
+              </a:rPr>
+              <a:t>APPLY</a:t>
+            </a:r>
+            <a:endParaRPr lang="en-US" sz="1000" dirty="0"/>
+          </a:p>
+        </p:txBody>
+      </p:sp>
+      <p:sp>
+        <p:nvSpPr>
+          <p:cNvPr id="7" name="Text 5"/>
+          <p:cNvSpPr/>
+          <p:nvPr/>
+        </p:nvSpPr>
+        <p:spPr>
+          <a:xfrm>
+            <a:off x="10157460" y="0"/>
+            <a:ext cx="2031492" cy="502920"/>
+          </a:xfrm>
+          <a:prstGeom prst="rect">
+            <a:avLst/>
+          </a:prstGeom>
+          <a:solidFill>
+            <a:srgbClr val="1B5E20"/>
+          </a:solidFill>
+          <a:ln/>
+        </p:spPr>
+        <p:txBody>
+          <a:bodyPr wrap="square" rtlCol="0" anchor="ctr"/>
+          <a:lstStyle/>
+          <a:p>
+            <a:pPr algn="ctr" indent="0" marL="0">
+              <a:buNone/>
+            </a:pPr>
+            <a:r>
+              <a:rPr lang="en-US" sz="1100" b="1" dirty="0">
+                <a:solidFill>
+                  <a:srgbClr val="FFFFFF"/>
+                </a:solidFill>
+                <a:latin typeface="Trebuchet MS" pitchFamily="34" charset="0"/>
+                <a:ea typeface="Trebuchet MS" pitchFamily="34" charset="-122"/>
+                <a:cs typeface="Trebuchet MS" pitchFamily="34" charset="-120"/>
+              </a:rPr>
+              <a:t>REVIEW</a:t>
+            </a:r>
+            <a:endParaRPr lang="en-US" sz="1100" dirty="0"/>
+          </a:p>
+        </p:txBody>
+      </p:sp>
+      <p:sp>
+        <p:nvSpPr>
+          <p:cNvPr id="8" name="Shape 6"/>
+          <p:cNvSpPr/>
+          <p:nvPr/>
+        </p:nvSpPr>
+        <p:spPr>
+          <a:xfrm>
+            <a:off x="0" y="502920"/>
+            <a:ext cx="12188952" cy="36576"/>
+          </a:xfrm>
+          <a:prstGeom prst="rect">
+            <a:avLst/>
+          </a:prstGeom>
+          <a:solidFill>
+            <a:srgbClr val="FABB2E"/>
+          </a:solidFill>
+          <a:ln/>
+        </p:spPr>
+      </p:sp>
+      <p:sp>
+        <p:nvSpPr>
+          <p:cNvPr id="9" name="Text 7"/>
+          <p:cNvSpPr/>
+          <p:nvPr/>
+        </p:nvSpPr>
+        <p:spPr>
+          <a:xfrm>
+            <a:off x="411480" y="603504"/>
+            <a:ext cx="7956194" cy="320040"/>
+          </a:xfrm>
+          <a:prstGeom prst="rect">
+            <a:avLst/>
+          </a:prstGeom>
+          <a:noFill/>
+          <a:ln/>
+        </p:spPr>
+        <p:txBody>
+          <a:bodyPr wrap="square" rtlCol="0" anchor="ctr"/>
+          <a:lstStyle/>
+          <a:p>
+            <a:pPr indent="0" marL="0">
+              <a:buNone/>
+            </a:pPr>
+            <a:r>
+              <a:rPr lang="en-US" sz="1800" b="1" dirty="0">
+                <a:solidFill>
+                  <a:srgbClr val="B71C1C"/>
+                </a:solidFill>
+                <a:latin typeface="Trebuchet MS" pitchFamily="34" charset="0"/>
+                <a:ea typeface="Trebuchet MS" pitchFamily="34" charset="-122"/>
+                <a:cs typeface="Trebuchet MS" pitchFamily="34" charset="-120"/>
+              </a:rPr>
+              <a:t>Review · MASTERING</a:t>
+            </a:r>
+            <a:endParaRPr lang="en-US" sz="1800" dirty="0"/>
+          </a:p>
+        </p:txBody>
+      </p:sp>
+      <p:sp>
+        <p:nvSpPr>
+          <p:cNvPr id="10" name="Text 8"/>
+          <p:cNvSpPr/>
+          <p:nvPr/>
+        </p:nvSpPr>
+        <p:spPr>
+          <a:xfrm>
+            <a:off x="0" y="950976"/>
+            <a:ext cx="12188952" cy="347472"/>
+          </a:xfrm>
+          <a:prstGeom prst="rect">
+            <a:avLst/>
+          </a:prstGeom>
+          <a:solidFill>
+            <a:srgbClr val="6A0DAD"/>
+          </a:solidFill>
+          <a:ln/>
+        </p:spPr>
+        <p:txBody>
+          <a:bodyPr wrap="square" lIns="101600" tIns="101600" rIns="101600" bIns="101600" rtlCol="0" anchor="ctr"/>
+          <a:lstStyle/>
+          <a:p>
+            <a:pPr algn="l" indent="0" marL="0">
+              <a:buNone/>
+            </a:pPr>
+            <a:r>
+              <a:rPr lang="en-US" sz="1300" b="1" dirty="0">
+                <a:solidFill>
+                  <a:srgbClr val="FFFFFF"/>
+                </a:solidFill>
+                <a:latin typeface="Trebuchet MS" pitchFamily="34" charset="0"/>
+                <a:ea typeface="Trebuchet MS" pitchFamily="34" charset="-122"/>
+                <a:cs typeface="Trebuchet MS" pitchFamily="34" charset="-120"/>
+              </a:rPr>
+              <a:t>☞  Purple pen time · mark and correct your answers</a:t>
+            </a:r>
+            <a:endParaRPr lang="en-US" sz="1300" dirty="0"/>
+          </a:p>
+        </p:txBody>
+      </p:sp>
+      <p:sp>
+        <p:nvSpPr>
+          <p:cNvPr id="11" name="Text 9"/>
+          <p:cNvSpPr/>
+          <p:nvPr/>
+        </p:nvSpPr>
+        <p:spPr>
+          <a:xfrm>
+            <a:off x="411480" y="1389888"/>
+            <a:ext cx="3978097" cy="5074920"/>
+          </a:xfrm>
+          <a:prstGeom prst="rect">
+            <a:avLst/>
+          </a:prstGeom>
+          <a:solidFill>
+            <a:srgbClr val="B71C1C"/>
+          </a:solidFill>
+          <a:ln/>
+        </p:spPr>
+        <p:txBody>
+          <a:bodyPr wrap="square" lIns="76200" tIns="76200" rIns="76200" bIns="76200" rtlCol="0" anchor="ctr">
+            <a:normAutofit/>
+          </a:bodyPr>
+          <a:lstStyle/>
+          <a:p>
+            <a:pPr algn="l" indent="0" marL="0">
+              <a:buNone/>
+            </a:pPr>
+            <a:r>
+              <a:rPr lang="en-US" sz="2800" b="1" dirty="0">
+                <a:solidFill>
+                  <a:srgbClr val="FFFFFF"/>
+                </a:solidFill>
+                <a:latin typeface="Trebuchet MS" pitchFamily="34" charset="0"/>
+                <a:ea typeface="Trebuchet MS" pitchFamily="34" charset="-122"/>
+                <a:cs typeface="Trebuchet MS" pitchFamily="34" charset="-120"/>
+              </a:rPr>
+              <a:t>Temperature and catalyst compared</a:t>
+            </a:r>
+            <a:endParaRPr lang="en-US" sz="2800" dirty="0"/>
+          </a:p>
+        </p:txBody>
+      </p:sp>
+      <p:sp>
+        <p:nvSpPr>
+          <p:cNvPr id="12" name="Text 10"/>
+          <p:cNvSpPr/>
+          <p:nvPr/>
+        </p:nvSpPr>
+        <p:spPr>
+          <a:xfrm>
+            <a:off x="4462729" y="1389888"/>
+            <a:ext cx="7314743" cy="5074920"/>
+          </a:xfrm>
+          <a:prstGeom prst="rect">
+            <a:avLst/>
+          </a:prstGeom>
+          <a:solidFill>
+            <a:srgbClr val="0D1B5E"/>
+          </a:solidFill>
+          <a:ln w="25400">
+            <a:solidFill>
+              <a:srgbClr val="FABB2E"/>
+            </a:solidFill>
+          </a:ln>
+        </p:spPr>
+        <p:txBody>
+          <a:bodyPr wrap="square" lIns="76200" tIns="76200" rIns="76200" bIns="76200" rtlCol="0" anchor="ctr">
+            <a:normAutofit/>
+          </a:bodyPr>
+          <a:lstStyle/>
+          <a:p>
+            <a:pPr algn="l" indent="0" marL="0">
+              <a:buNone/>
+            </a:pPr>
+            <a:r>
+              <a:rPr lang="en-US" sz="2400" dirty="0">
+                <a:solidFill>
+                  <a:srgbClr val="FABB2E"/>
+                </a:solidFill>
+                <a:latin typeface="Trebuchet MS" pitchFamily="34" charset="0"/>
+                <a:ea typeface="Trebuchet MS" pitchFamily="34" charset="-122"/>
+                <a:cs typeface="Trebuchet MS" pitchFamily="34" charset="-120"/>
+              </a:rPr>
+              <a:t>Temperature raises collision energy and frequency, a catalyst lowers activation energy</a:t>
+            </a:r>
+            <a:endParaRPr lang="en-US" sz="2400" dirty="0"/>
+          </a:p>
+        </p:txBody>
+      </p:sp>
+      <p:sp>
+        <p:nvSpPr>
+          <p:cNvPr id="13" name="Text 11"/>
+          <p:cNvSpPr/>
+          <p:nvPr/>
+        </p:nvSpPr>
+        <p:spPr>
+          <a:xfrm>
+            <a:off x="0" y="6537960"/>
+            <a:ext cx="12188952" cy="320040"/>
+          </a:xfrm>
+          <a:prstGeom prst="rect">
+            <a:avLst/>
+          </a:prstGeom>
+          <a:solidFill>
+            <a:srgbClr val="0D1B5E"/>
+          </a:solidFill>
+          <a:ln/>
+        </p:spPr>
+        <p:txBody>
+          <a:bodyPr wrap="square" lIns="101600" tIns="101600" rIns="101600" bIns="101600" rtlCol="0" anchor="ctr"/>
+          <a:lstStyle/>
+          <a:p>
+            <a:pPr algn="l" indent="0" marL="0">
+              <a:buNone/>
+            </a:pPr>
+            <a:r>
+              <a:rPr lang="en-US" sz="1100" b="1" dirty="0">
+                <a:solidFill>
+                  <a:srgbClr val="FFFFFF"/>
+                </a:solidFill>
+                <a:latin typeface="Trebuchet MS" pitchFamily="34" charset="0"/>
+                <a:ea typeface="Trebuchet MS" pitchFamily="34" charset="-122"/>
+                <a:cs typeface="Trebuchet MS" pitchFamily="34" charset="-120"/>
+              </a:rPr>
+              <a:t>Learning objective:  </a:t>
+            </a:r>
+            <a:pPr algn="l" indent="0" marL="0">
+              <a:buNone/>
+            </a:pPr>
+            <a:r>
+              <a:rPr lang="en-US" sz="1100" i="1" dirty="0">
+                <a:solidFill>
+                  <a:srgbClr val="FFFFFF"/>
+                </a:solidFill>
+                <a:latin typeface="Trebuchet MS" pitchFamily="34" charset="0"/>
+                <a:ea typeface="Trebuchet MS" pitchFamily="34" charset="-122"/>
+                <a:cs typeface="Trebuchet MS" pitchFamily="34" charset="-120"/>
+              </a:rPr>
+              <a:t>Describe how surface area affects the rate of a reaction</a:t>
+            </a:r>
+            <a:endParaRPr lang="en-US" sz="1100" dirty="0"/>
+          </a:p>
+        </p:txBody>
+      </p:sp>
+    </p:spTree>
+  </p:cSld>
+  <p:clrMapOvr>
+    <a:masterClrMapping/>
+  </p:clrMapOvr>
+</p:sld>
+</file>
+
+<file path=ppt/slides/slide36.xml><?xml version="1.0" encoding="utf-8"?>
+<p:sld xmlns:a="http://schemas.openxmlformats.org/drawingml/2006/main" xmlns:r="http://schemas.openxmlformats.org/officeDocument/2006/relationships" xmlns:p="http://schemas.openxmlformats.org/presentationml/2006/main">
+  <p:cSld name="Slide 36">
+    <p:bg>
+      <p:bgPr>
+        <a:solidFill>
+          <a:srgbClr val="EDF2FA"/>
+        </a:solidFill>
+      </p:bgPr>
+    </p:bg>
+    <p:spTree>
+      <p:nvGrpSpPr>
+        <p:cNvPr id="1" name=""/>
+        <p:cNvGrpSpPr/>
+        <p:nvPr/>
+      </p:nvGrpSpPr>
+      <p:grpSpPr>
+        <a:xfrm>
+          <a:off x="0" y="0"/>
+          <a:ext cx="0" cy="0"/>
+          <a:chOff x="0" y="0"/>
+          <a:chExt cx="0" cy="0"/>
+        </a:xfrm>
+      </p:grpSpPr>
+      <p:sp>
+        <p:nvSpPr>
+          <p:cNvPr id="2" name="Text 0"/>
+          <p:cNvSpPr/>
+          <p:nvPr/>
+        </p:nvSpPr>
+        <p:spPr>
+          <a:xfrm>
+            <a:off x="0" y="0"/>
             <a:ext cx="12188952" cy="457200"/>
           </a:xfrm>
           <a:prstGeom prst="rect">
@@ -25970,7 +28904,7 @@
       </p:sp>
       <p:pic>
         <p:nvPicPr>
-          <p:cNvPr id="4" name="Image 0" descr="C:\Users\magda\AppData\Local\Temp\gg_out_1788477032947.png">    </p:cNvPr>
+          <p:cNvPr id="4" name="Image 0" descr="C:\Users\magda\AppData\Local\Temp\gg_out_1790976036066.png">    </p:cNvPr>
           <p:cNvPicPr>
             <a:picLocks noChangeAspect="1"/>
           </p:cNvPicPr>
